--- a/all-letters/16-waw.pptx
+++ b/all-letters/16-waw.pptx
@@ -2103,7 +2103,7 @@
     <p:bg>
       <p:bgPr>
         <a:solidFill>
-          <a:srgbClr val="DDF1FF"/>
+          <a:srgbClr val="2B1B3D"/>
         </a:solidFill>
       </p:bgPr>
     </p:bg>
@@ -2136,11 +2136,11 @@
             <a:avLst/>
           </a:prstGeom>
           <a:solidFill>
-            <a:srgbClr val="8ED98F"/>
+            <a:srgbClr val="5C2A6F"/>
           </a:solidFill>
           <a:ln w="12700">
             <a:solidFill>
-              <a:srgbClr val="8ED98F"/>
+              <a:srgbClr val="5C2A6F"/>
             </a:solidFill>
             <a:prstDash val="solid"/>
           </a:ln>
@@ -2161,19 +2161,19 @@
             <a:avLst/>
           </a:prstGeom>
           <a:solidFill>
-            <a:srgbClr val="6CCB7A"/>
+            <a:srgbClr val="7B3A8F"/>
           </a:solidFill>
           <a:ln w="12700">
             <a:solidFill>
-              <a:srgbClr val="6CCB7A"/>
-            </a:solidFill>
-            <a:prstDash val="solid"/>
-          </a:ln>
-        </p:spPr>
-      </p:sp>
-      <p:sp>
-        <p:nvSpPr>
-          <p:cNvPr id="4" name="Deco sun"/>
+              <a:srgbClr val="7B3A8F"/>
+            </a:solidFill>
+            <a:prstDash val="solid"/>
+          </a:ln>
+        </p:spPr>
+      </p:sp>
+      <p:sp>
+        <p:nvSpPr>
+          <p:cNvPr id="4" name="Deco top left"/>
           <p:cNvSpPr/>
           <p:nvPr/>
         </p:nvSpPr>
@@ -2182,15 +2182,15 @@
             <a:off x="320040" y="228600"/>
             <a:ext cx="914400" cy="914400"/>
           </a:xfrm>
-          <a:prstGeom prst="sun">
-            <a:avLst/>
-          </a:prstGeom>
-          <a:solidFill>
-            <a:srgbClr val="FFD23F"/>
+          <a:prstGeom prst="moon">
+            <a:avLst/>
+          </a:prstGeom>
+          <a:solidFill>
+            <a:srgbClr val="FFD6F6"/>
           </a:solidFill>
           <a:ln w="12700">
             <a:solidFill>
-              <a:srgbClr val="FFD23F"/>
+              <a:srgbClr val="FFD6F6"/>
             </a:solidFill>
             <a:prstDash val="solid"/>
           </a:ln>
@@ -2211,11 +2211,11 @@
             <a:avLst/>
           </a:prstGeom>
           <a:solidFill>
-            <a:srgbClr val="FFFFFF"/>
+            <a:srgbClr val="6B4A8F"/>
           </a:solidFill>
           <a:ln w="12700">
             <a:solidFill>
-              <a:srgbClr val="FFFFFF"/>
+              <a:srgbClr val="6B4A8F"/>
             </a:solidFill>
             <a:prstDash val="solid"/>
           </a:ln>
@@ -2236,19 +2236,19 @@
             <a:avLst/>
           </a:prstGeom>
           <a:solidFill>
-            <a:srgbClr val="F2FAFF"/>
+            <a:srgbClr val="553678"/>
           </a:solidFill>
           <a:ln w="12700">
             <a:solidFill>
-              <a:srgbClr val="F2FAFF"/>
-            </a:solidFill>
-            <a:prstDash val="solid"/>
-          </a:ln>
-        </p:spPr>
-      </p:sp>
-      <p:sp>
-        <p:nvSpPr>
-          <p:cNvPr id="7" name="Deco friend pink"/>
+              <a:srgbClr val="553678"/>
+            </a:solidFill>
+            <a:prstDash val="solid"/>
+          </a:ln>
+        </p:spPr>
+      </p:sp>
+      <p:sp>
+        <p:nvSpPr>
+          <p:cNvPr id="7" name="Deco friend left"/>
           <p:cNvSpPr/>
           <p:nvPr/>
         </p:nvSpPr>
@@ -2261,19 +2261,19 @@
             <a:avLst/>
           </a:prstGeom>
           <a:solidFill>
-            <a:srgbClr val="FF9EC4"/>
+            <a:srgbClr val="FFB703"/>
           </a:solidFill>
           <a:ln w="12700">
             <a:solidFill>
-              <a:srgbClr val="FF9EC4"/>
-            </a:solidFill>
-            <a:prstDash val="solid"/>
-          </a:ln>
-        </p:spPr>
-      </p:sp>
-      <p:sp>
-        <p:nvSpPr>
-          <p:cNvPr id="8" name="Deco friend orange"/>
+              <a:srgbClr val="FFB703"/>
+            </a:solidFill>
+            <a:prstDash val="solid"/>
+          </a:ln>
+        </p:spPr>
+      </p:sp>
+      <p:sp>
+        <p:nvSpPr>
+          <p:cNvPr id="8" name="Deco friend right"/>
           <p:cNvSpPr/>
           <p:nvPr/>
         </p:nvSpPr>
@@ -2286,11 +2286,11 @@
             <a:avLst/>
           </a:prstGeom>
           <a:solidFill>
-            <a:srgbClr val="FFB347"/>
+            <a:srgbClr val="7DF9FF"/>
           </a:solidFill>
           <a:ln w="12700">
             <a:solidFill>
-              <a:srgbClr val="FFB347"/>
+              <a:srgbClr val="7DF9FF"/>
             </a:solidFill>
             <a:prstDash val="solid"/>
           </a:ln>
@@ -2311,11 +2311,11 @@
             <a:avLst/>
           </a:prstGeom>
           <a:solidFill>
-            <a:srgbClr val="FFD23F"/>
+            <a:srgbClr val="FFD6F6"/>
           </a:solidFill>
           <a:ln w="12700">
             <a:solidFill>
-              <a:srgbClr val="FFD23F"/>
+              <a:srgbClr val="FFD6F6"/>
             </a:solidFill>
             <a:prstDash val="solid"/>
           </a:ln>
@@ -2336,11 +2336,11 @@
             <a:avLst/>
           </a:prstGeom>
           <a:solidFill>
-            <a:srgbClr val="FFD23F"/>
+            <a:srgbClr val="FFD6F6"/>
           </a:solidFill>
           <a:ln w="12700">
             <a:solidFill>
-              <a:srgbClr val="FFD23F"/>
+              <a:srgbClr val="FFD6F6"/>
             </a:solidFill>
             <a:prstDash val="solid"/>
           </a:ln>
@@ -2361,11 +2361,11 @@
             <a:avLst/>
           </a:prstGeom>
           <a:solidFill>
-            <a:srgbClr val="FF7A90"/>
+            <a:srgbClr val="FF7AA2"/>
           </a:solidFill>
           <a:ln w="12700">
             <a:solidFill>
-              <a:srgbClr val="FF7A90"/>
+              <a:srgbClr val="FF7AA2"/>
             </a:solidFill>
             <a:prstDash val="solid"/>
           </a:ln>
@@ -2628,7 +2628,7 @@
     <p:bg>
       <p:bgPr>
         <a:solidFill>
-          <a:srgbClr val="DDF1FF"/>
+          <a:srgbClr val="2B1B3D"/>
         </a:solidFill>
       </p:bgPr>
     </p:bg>
@@ -2661,11 +2661,11 @@
             <a:avLst/>
           </a:prstGeom>
           <a:solidFill>
-            <a:srgbClr val="8ED98F"/>
+            <a:srgbClr val="5C2A6F"/>
           </a:solidFill>
           <a:ln w="12700">
             <a:solidFill>
-              <a:srgbClr val="8ED98F"/>
+              <a:srgbClr val="5C2A6F"/>
             </a:solidFill>
             <a:prstDash val="solid"/>
           </a:ln>
@@ -2686,19 +2686,19 @@
             <a:avLst/>
           </a:prstGeom>
           <a:solidFill>
-            <a:srgbClr val="6CCB7A"/>
+            <a:srgbClr val="7B3A8F"/>
           </a:solidFill>
           <a:ln w="12700">
             <a:solidFill>
-              <a:srgbClr val="6CCB7A"/>
-            </a:solidFill>
-            <a:prstDash val="solid"/>
-          </a:ln>
-        </p:spPr>
-      </p:sp>
-      <p:sp>
-        <p:nvSpPr>
-          <p:cNvPr id="4" name="Deco sun"/>
+              <a:srgbClr val="7B3A8F"/>
+            </a:solidFill>
+            <a:prstDash val="solid"/>
+          </a:ln>
+        </p:spPr>
+      </p:sp>
+      <p:sp>
+        <p:nvSpPr>
+          <p:cNvPr id="4" name="Deco top left"/>
           <p:cNvSpPr/>
           <p:nvPr/>
         </p:nvSpPr>
@@ -2707,15 +2707,15 @@
             <a:off x="320040" y="228600"/>
             <a:ext cx="914400" cy="914400"/>
           </a:xfrm>
-          <a:prstGeom prst="sun">
-            <a:avLst/>
-          </a:prstGeom>
-          <a:solidFill>
-            <a:srgbClr val="FFD23F"/>
+          <a:prstGeom prst="moon">
+            <a:avLst/>
+          </a:prstGeom>
+          <a:solidFill>
+            <a:srgbClr val="FFD6F6"/>
           </a:solidFill>
           <a:ln w="12700">
             <a:solidFill>
-              <a:srgbClr val="FFD23F"/>
+              <a:srgbClr val="FFD6F6"/>
             </a:solidFill>
             <a:prstDash val="solid"/>
           </a:ln>
@@ -2736,11 +2736,11 @@
             <a:avLst/>
           </a:prstGeom>
           <a:solidFill>
-            <a:srgbClr val="FFFFFF"/>
+            <a:srgbClr val="6B4A8F"/>
           </a:solidFill>
           <a:ln w="12700">
             <a:solidFill>
-              <a:srgbClr val="FFFFFF"/>
+              <a:srgbClr val="6B4A8F"/>
             </a:solidFill>
             <a:prstDash val="solid"/>
           </a:ln>
@@ -2761,19 +2761,19 @@
             <a:avLst/>
           </a:prstGeom>
           <a:solidFill>
-            <a:srgbClr val="F2FAFF"/>
+            <a:srgbClr val="553678"/>
           </a:solidFill>
           <a:ln w="12700">
             <a:solidFill>
-              <a:srgbClr val="F2FAFF"/>
-            </a:solidFill>
-            <a:prstDash val="solid"/>
-          </a:ln>
-        </p:spPr>
-      </p:sp>
-      <p:sp>
-        <p:nvSpPr>
-          <p:cNvPr id="7" name="Deco friend pink"/>
+              <a:srgbClr val="553678"/>
+            </a:solidFill>
+            <a:prstDash val="solid"/>
+          </a:ln>
+        </p:spPr>
+      </p:sp>
+      <p:sp>
+        <p:nvSpPr>
+          <p:cNvPr id="7" name="Deco friend left"/>
           <p:cNvSpPr/>
           <p:nvPr/>
         </p:nvSpPr>
@@ -2786,19 +2786,19 @@
             <a:avLst/>
           </a:prstGeom>
           <a:solidFill>
-            <a:srgbClr val="FF9EC4"/>
+            <a:srgbClr val="FFB703"/>
           </a:solidFill>
           <a:ln w="12700">
             <a:solidFill>
-              <a:srgbClr val="FF9EC4"/>
-            </a:solidFill>
-            <a:prstDash val="solid"/>
-          </a:ln>
-        </p:spPr>
-      </p:sp>
-      <p:sp>
-        <p:nvSpPr>
-          <p:cNvPr id="8" name="Deco friend orange"/>
+              <a:srgbClr val="FFB703"/>
+            </a:solidFill>
+            <a:prstDash val="solid"/>
+          </a:ln>
+        </p:spPr>
+      </p:sp>
+      <p:sp>
+        <p:nvSpPr>
+          <p:cNvPr id="8" name="Deco friend right"/>
           <p:cNvSpPr/>
           <p:nvPr/>
         </p:nvSpPr>
@@ -2811,11 +2811,11 @@
             <a:avLst/>
           </a:prstGeom>
           <a:solidFill>
-            <a:srgbClr val="FFB347"/>
+            <a:srgbClr val="7DF9FF"/>
           </a:solidFill>
           <a:ln w="12700">
             <a:solidFill>
-              <a:srgbClr val="FFB347"/>
+              <a:srgbClr val="7DF9FF"/>
             </a:solidFill>
             <a:prstDash val="solid"/>
           </a:ln>
@@ -2836,11 +2836,11 @@
             <a:avLst/>
           </a:prstGeom>
           <a:solidFill>
-            <a:srgbClr val="FFD23F"/>
+            <a:srgbClr val="FFD6F6"/>
           </a:solidFill>
           <a:ln w="12700">
             <a:solidFill>
-              <a:srgbClr val="FFD23F"/>
+              <a:srgbClr val="FFD6F6"/>
             </a:solidFill>
             <a:prstDash val="solid"/>
           </a:ln>
@@ -2861,11 +2861,11 @@
             <a:avLst/>
           </a:prstGeom>
           <a:solidFill>
-            <a:srgbClr val="FFD23F"/>
+            <a:srgbClr val="FFD6F6"/>
           </a:solidFill>
           <a:ln w="12700">
             <a:solidFill>
-              <a:srgbClr val="FFD23F"/>
+              <a:srgbClr val="FFD6F6"/>
             </a:solidFill>
             <a:prstDash val="solid"/>
           </a:ln>
@@ -2886,11 +2886,11 @@
             <a:avLst/>
           </a:prstGeom>
           <a:solidFill>
-            <a:srgbClr val="FF7A90"/>
+            <a:srgbClr val="FF7AA2"/>
           </a:solidFill>
           <a:ln w="12700">
             <a:solidFill>
-              <a:srgbClr val="FF7A90"/>
+              <a:srgbClr val="FF7AA2"/>
             </a:solidFill>
             <a:prstDash val="solid"/>
           </a:ln>
@@ -3013,11 +3013,11 @@
             <a:avLst/>
           </a:prstGeom>
           <a:solidFill>
-            <a:srgbClr val="F2994A"/>
+            <a:srgbClr val="FFC857"/>
           </a:solidFill>
           <a:ln w="12700">
             <a:solidFill>
-              <a:srgbClr val="F2994A"/>
+              <a:srgbClr val="FFC857"/>
             </a:solidFill>
             <a:prstDash val="solid"/>
           </a:ln>
@@ -3038,11 +3038,11 @@
             <a:avLst/>
           </a:prstGeom>
           <a:solidFill>
-            <a:srgbClr val="F2994A"/>
+            <a:srgbClr val="FFC857"/>
           </a:solidFill>
           <a:ln w="12700">
             <a:solidFill>
-              <a:srgbClr val="F2994A"/>
+              <a:srgbClr val="FFC857"/>
             </a:solidFill>
             <a:prstDash val="solid"/>
           </a:ln>
@@ -3063,11 +3063,11 @@
             <a:avLst/>
           </a:prstGeom>
           <a:solidFill>
-            <a:srgbClr val="8E5BD0"/>
+            <a:srgbClr val="7DF9FF"/>
           </a:solidFill>
           <a:ln w="12700">
             <a:solidFill>
-              <a:srgbClr val="8E5BD0"/>
+              <a:srgbClr val="7DF9FF"/>
             </a:solidFill>
             <a:prstDash val="solid"/>
           </a:ln>
@@ -3932,7 +3932,7 @@
     <p:bg>
       <p:bgPr>
         <a:solidFill>
-          <a:srgbClr val="DDF1FF"/>
+          <a:srgbClr val="2B1B3D"/>
         </a:solidFill>
       </p:bgPr>
     </p:bg>
@@ -3965,11 +3965,11 @@
             <a:avLst/>
           </a:prstGeom>
           <a:solidFill>
-            <a:srgbClr val="8ED98F"/>
+            <a:srgbClr val="5C2A6F"/>
           </a:solidFill>
           <a:ln w="12700">
             <a:solidFill>
-              <a:srgbClr val="8ED98F"/>
+              <a:srgbClr val="5C2A6F"/>
             </a:solidFill>
             <a:prstDash val="solid"/>
           </a:ln>
@@ -3990,19 +3990,19 @@
             <a:avLst/>
           </a:prstGeom>
           <a:solidFill>
-            <a:srgbClr val="6CCB7A"/>
+            <a:srgbClr val="7B3A8F"/>
           </a:solidFill>
           <a:ln w="12700">
             <a:solidFill>
-              <a:srgbClr val="6CCB7A"/>
-            </a:solidFill>
-            <a:prstDash val="solid"/>
-          </a:ln>
-        </p:spPr>
-      </p:sp>
-      <p:sp>
-        <p:nvSpPr>
-          <p:cNvPr id="4" name="Deco sun"/>
+              <a:srgbClr val="7B3A8F"/>
+            </a:solidFill>
+            <a:prstDash val="solid"/>
+          </a:ln>
+        </p:spPr>
+      </p:sp>
+      <p:sp>
+        <p:nvSpPr>
+          <p:cNvPr id="4" name="Deco top left"/>
           <p:cNvSpPr/>
           <p:nvPr/>
         </p:nvSpPr>
@@ -4011,15 +4011,15 @@
             <a:off x="320040" y="228600"/>
             <a:ext cx="914400" cy="914400"/>
           </a:xfrm>
-          <a:prstGeom prst="sun">
-            <a:avLst/>
-          </a:prstGeom>
-          <a:solidFill>
-            <a:srgbClr val="FFD23F"/>
+          <a:prstGeom prst="moon">
+            <a:avLst/>
+          </a:prstGeom>
+          <a:solidFill>
+            <a:srgbClr val="FFD6F6"/>
           </a:solidFill>
           <a:ln w="12700">
             <a:solidFill>
-              <a:srgbClr val="FFD23F"/>
+              <a:srgbClr val="FFD6F6"/>
             </a:solidFill>
             <a:prstDash val="solid"/>
           </a:ln>
@@ -4040,11 +4040,11 @@
             <a:avLst/>
           </a:prstGeom>
           <a:solidFill>
-            <a:srgbClr val="FFFFFF"/>
+            <a:srgbClr val="6B4A8F"/>
           </a:solidFill>
           <a:ln w="12700">
             <a:solidFill>
-              <a:srgbClr val="FFFFFF"/>
+              <a:srgbClr val="6B4A8F"/>
             </a:solidFill>
             <a:prstDash val="solid"/>
           </a:ln>
@@ -4065,19 +4065,19 @@
             <a:avLst/>
           </a:prstGeom>
           <a:solidFill>
-            <a:srgbClr val="F2FAFF"/>
+            <a:srgbClr val="553678"/>
           </a:solidFill>
           <a:ln w="12700">
             <a:solidFill>
-              <a:srgbClr val="F2FAFF"/>
-            </a:solidFill>
-            <a:prstDash val="solid"/>
-          </a:ln>
-        </p:spPr>
-      </p:sp>
-      <p:sp>
-        <p:nvSpPr>
-          <p:cNvPr id="7" name="Deco friend pink"/>
+              <a:srgbClr val="553678"/>
+            </a:solidFill>
+            <a:prstDash val="solid"/>
+          </a:ln>
+        </p:spPr>
+      </p:sp>
+      <p:sp>
+        <p:nvSpPr>
+          <p:cNvPr id="7" name="Deco friend left"/>
           <p:cNvSpPr/>
           <p:nvPr/>
         </p:nvSpPr>
@@ -4090,19 +4090,19 @@
             <a:avLst/>
           </a:prstGeom>
           <a:solidFill>
-            <a:srgbClr val="FF9EC4"/>
+            <a:srgbClr val="FFB703"/>
           </a:solidFill>
           <a:ln w="12700">
             <a:solidFill>
-              <a:srgbClr val="FF9EC4"/>
-            </a:solidFill>
-            <a:prstDash val="solid"/>
-          </a:ln>
-        </p:spPr>
-      </p:sp>
-      <p:sp>
-        <p:nvSpPr>
-          <p:cNvPr id="8" name="Deco friend orange"/>
+              <a:srgbClr val="FFB703"/>
+            </a:solidFill>
+            <a:prstDash val="solid"/>
+          </a:ln>
+        </p:spPr>
+      </p:sp>
+      <p:sp>
+        <p:nvSpPr>
+          <p:cNvPr id="8" name="Deco friend right"/>
           <p:cNvSpPr/>
           <p:nvPr/>
         </p:nvSpPr>
@@ -4115,11 +4115,11 @@
             <a:avLst/>
           </a:prstGeom>
           <a:solidFill>
-            <a:srgbClr val="FFB347"/>
+            <a:srgbClr val="7DF9FF"/>
           </a:solidFill>
           <a:ln w="12700">
             <a:solidFill>
-              <a:srgbClr val="FFB347"/>
+              <a:srgbClr val="7DF9FF"/>
             </a:solidFill>
             <a:prstDash val="solid"/>
           </a:ln>
@@ -4140,11 +4140,11 @@
             <a:avLst/>
           </a:prstGeom>
           <a:solidFill>
-            <a:srgbClr val="FFD23F"/>
+            <a:srgbClr val="FFD6F6"/>
           </a:solidFill>
           <a:ln w="12700">
             <a:solidFill>
-              <a:srgbClr val="FFD23F"/>
+              <a:srgbClr val="FFD6F6"/>
             </a:solidFill>
             <a:prstDash val="solid"/>
           </a:ln>
@@ -4165,11 +4165,11 @@
             <a:avLst/>
           </a:prstGeom>
           <a:solidFill>
-            <a:srgbClr val="FFD23F"/>
+            <a:srgbClr val="FFD6F6"/>
           </a:solidFill>
           <a:ln w="12700">
             <a:solidFill>
-              <a:srgbClr val="FFD23F"/>
+              <a:srgbClr val="FFD6F6"/>
             </a:solidFill>
             <a:prstDash val="solid"/>
           </a:ln>
@@ -4190,11 +4190,11 @@
             <a:avLst/>
           </a:prstGeom>
           <a:solidFill>
-            <a:srgbClr val="FF7A90"/>
+            <a:srgbClr val="FF7AA2"/>
           </a:solidFill>
           <a:ln w="12700">
             <a:solidFill>
-              <a:srgbClr val="FF7A90"/>
+              <a:srgbClr val="FF7AA2"/>
             </a:solidFill>
             <a:prstDash val="solid"/>
           </a:ln>
@@ -4317,11 +4317,11 @@
             <a:avLst/>
           </a:prstGeom>
           <a:solidFill>
-            <a:srgbClr val="F2994A"/>
+            <a:srgbClr val="FFC857"/>
           </a:solidFill>
           <a:ln w="12700">
             <a:solidFill>
-              <a:srgbClr val="F2994A"/>
+              <a:srgbClr val="FFC857"/>
             </a:solidFill>
             <a:prstDash val="solid"/>
           </a:ln>
@@ -4342,11 +4342,11 @@
             <a:avLst/>
           </a:prstGeom>
           <a:solidFill>
-            <a:srgbClr val="F2994A"/>
+            <a:srgbClr val="FFC857"/>
           </a:solidFill>
           <a:ln w="12700">
             <a:solidFill>
-              <a:srgbClr val="F2994A"/>
+              <a:srgbClr val="FFC857"/>
             </a:solidFill>
             <a:prstDash val="solid"/>
           </a:ln>
@@ -4367,11 +4367,11 @@
             <a:avLst/>
           </a:prstGeom>
           <a:solidFill>
-            <a:srgbClr val="8E5BD0"/>
+            <a:srgbClr val="7DF9FF"/>
           </a:solidFill>
           <a:ln w="12700">
             <a:solidFill>
-              <a:srgbClr val="8E5BD0"/>
+              <a:srgbClr val="7DF9FF"/>
             </a:solidFill>
             <a:prstDash val="solid"/>
           </a:ln>
@@ -5236,7 +5236,7 @@
     <p:bg>
       <p:bgPr>
         <a:solidFill>
-          <a:srgbClr val="DDF1FF"/>
+          <a:srgbClr val="2B1B3D"/>
         </a:solidFill>
       </p:bgPr>
     </p:bg>
@@ -5269,11 +5269,11 @@
             <a:avLst/>
           </a:prstGeom>
           <a:solidFill>
-            <a:srgbClr val="8ED98F"/>
+            <a:srgbClr val="5C2A6F"/>
           </a:solidFill>
           <a:ln w="12700">
             <a:solidFill>
-              <a:srgbClr val="8ED98F"/>
+              <a:srgbClr val="5C2A6F"/>
             </a:solidFill>
             <a:prstDash val="solid"/>
           </a:ln>
@@ -5294,19 +5294,19 @@
             <a:avLst/>
           </a:prstGeom>
           <a:solidFill>
-            <a:srgbClr val="6CCB7A"/>
+            <a:srgbClr val="7B3A8F"/>
           </a:solidFill>
           <a:ln w="12700">
             <a:solidFill>
-              <a:srgbClr val="6CCB7A"/>
-            </a:solidFill>
-            <a:prstDash val="solid"/>
-          </a:ln>
-        </p:spPr>
-      </p:sp>
-      <p:sp>
-        <p:nvSpPr>
-          <p:cNvPr id="4" name="Deco sun"/>
+              <a:srgbClr val="7B3A8F"/>
+            </a:solidFill>
+            <a:prstDash val="solid"/>
+          </a:ln>
+        </p:spPr>
+      </p:sp>
+      <p:sp>
+        <p:nvSpPr>
+          <p:cNvPr id="4" name="Deco top left"/>
           <p:cNvSpPr/>
           <p:nvPr/>
         </p:nvSpPr>
@@ -5315,15 +5315,15 @@
             <a:off x="320040" y="228600"/>
             <a:ext cx="914400" cy="914400"/>
           </a:xfrm>
-          <a:prstGeom prst="sun">
-            <a:avLst/>
-          </a:prstGeom>
-          <a:solidFill>
-            <a:srgbClr val="FFD23F"/>
+          <a:prstGeom prst="moon">
+            <a:avLst/>
+          </a:prstGeom>
+          <a:solidFill>
+            <a:srgbClr val="FFD6F6"/>
           </a:solidFill>
           <a:ln w="12700">
             <a:solidFill>
-              <a:srgbClr val="FFD23F"/>
+              <a:srgbClr val="FFD6F6"/>
             </a:solidFill>
             <a:prstDash val="solid"/>
           </a:ln>
@@ -5344,11 +5344,11 @@
             <a:avLst/>
           </a:prstGeom>
           <a:solidFill>
-            <a:srgbClr val="FFFFFF"/>
+            <a:srgbClr val="6B4A8F"/>
           </a:solidFill>
           <a:ln w="12700">
             <a:solidFill>
-              <a:srgbClr val="FFFFFF"/>
+              <a:srgbClr val="6B4A8F"/>
             </a:solidFill>
             <a:prstDash val="solid"/>
           </a:ln>
@@ -5369,19 +5369,19 @@
             <a:avLst/>
           </a:prstGeom>
           <a:solidFill>
-            <a:srgbClr val="F2FAFF"/>
+            <a:srgbClr val="553678"/>
           </a:solidFill>
           <a:ln w="12700">
             <a:solidFill>
-              <a:srgbClr val="F2FAFF"/>
-            </a:solidFill>
-            <a:prstDash val="solid"/>
-          </a:ln>
-        </p:spPr>
-      </p:sp>
-      <p:sp>
-        <p:nvSpPr>
-          <p:cNvPr id="7" name="Deco friend pink"/>
+              <a:srgbClr val="553678"/>
+            </a:solidFill>
+            <a:prstDash val="solid"/>
+          </a:ln>
+        </p:spPr>
+      </p:sp>
+      <p:sp>
+        <p:nvSpPr>
+          <p:cNvPr id="7" name="Deco friend left"/>
           <p:cNvSpPr/>
           <p:nvPr/>
         </p:nvSpPr>
@@ -5394,19 +5394,19 @@
             <a:avLst/>
           </a:prstGeom>
           <a:solidFill>
-            <a:srgbClr val="FF9EC4"/>
+            <a:srgbClr val="FFB703"/>
           </a:solidFill>
           <a:ln w="12700">
             <a:solidFill>
-              <a:srgbClr val="FF9EC4"/>
-            </a:solidFill>
-            <a:prstDash val="solid"/>
-          </a:ln>
-        </p:spPr>
-      </p:sp>
-      <p:sp>
-        <p:nvSpPr>
-          <p:cNvPr id="8" name="Deco friend orange"/>
+              <a:srgbClr val="FFB703"/>
+            </a:solidFill>
+            <a:prstDash val="solid"/>
+          </a:ln>
+        </p:spPr>
+      </p:sp>
+      <p:sp>
+        <p:nvSpPr>
+          <p:cNvPr id="8" name="Deco friend right"/>
           <p:cNvSpPr/>
           <p:nvPr/>
         </p:nvSpPr>
@@ -5419,11 +5419,11 @@
             <a:avLst/>
           </a:prstGeom>
           <a:solidFill>
-            <a:srgbClr val="FFB347"/>
+            <a:srgbClr val="7DF9FF"/>
           </a:solidFill>
           <a:ln w="12700">
             <a:solidFill>
-              <a:srgbClr val="FFB347"/>
+              <a:srgbClr val="7DF9FF"/>
             </a:solidFill>
             <a:prstDash val="solid"/>
           </a:ln>
@@ -5444,11 +5444,11 @@
             <a:avLst/>
           </a:prstGeom>
           <a:solidFill>
-            <a:srgbClr val="FFD23F"/>
+            <a:srgbClr val="FFD6F6"/>
           </a:solidFill>
           <a:ln w="12700">
             <a:solidFill>
-              <a:srgbClr val="FFD23F"/>
+              <a:srgbClr val="FFD6F6"/>
             </a:solidFill>
             <a:prstDash val="solid"/>
           </a:ln>
@@ -5469,11 +5469,11 @@
             <a:avLst/>
           </a:prstGeom>
           <a:solidFill>
-            <a:srgbClr val="FFD23F"/>
+            <a:srgbClr val="FFD6F6"/>
           </a:solidFill>
           <a:ln w="12700">
             <a:solidFill>
-              <a:srgbClr val="FFD23F"/>
+              <a:srgbClr val="FFD6F6"/>
             </a:solidFill>
             <a:prstDash val="solid"/>
           </a:ln>
@@ -5494,11 +5494,11 @@
             <a:avLst/>
           </a:prstGeom>
           <a:solidFill>
-            <a:srgbClr val="FF7A90"/>
+            <a:srgbClr val="FF7AA2"/>
           </a:solidFill>
           <a:ln w="12700">
             <a:solidFill>
-              <a:srgbClr val="FF7A90"/>
+              <a:srgbClr val="FF7AA2"/>
             </a:solidFill>
             <a:prstDash val="solid"/>
           </a:ln>
@@ -5621,11 +5621,11 @@
             <a:avLst/>
           </a:prstGeom>
           <a:solidFill>
-            <a:srgbClr val="F2994A"/>
+            <a:srgbClr val="FFC857"/>
           </a:solidFill>
           <a:ln w="12700">
             <a:solidFill>
-              <a:srgbClr val="F2994A"/>
+              <a:srgbClr val="FFC857"/>
             </a:solidFill>
             <a:prstDash val="solid"/>
           </a:ln>
@@ -5646,11 +5646,11 @@
             <a:avLst/>
           </a:prstGeom>
           <a:solidFill>
-            <a:srgbClr val="F2994A"/>
+            <a:srgbClr val="FFC857"/>
           </a:solidFill>
           <a:ln w="12700">
             <a:solidFill>
-              <a:srgbClr val="F2994A"/>
+              <a:srgbClr val="FFC857"/>
             </a:solidFill>
             <a:prstDash val="solid"/>
           </a:ln>
@@ -5671,11 +5671,11 @@
             <a:avLst/>
           </a:prstGeom>
           <a:solidFill>
-            <a:srgbClr val="8E5BD0"/>
+            <a:srgbClr val="7DF9FF"/>
           </a:solidFill>
           <a:ln w="12700">
             <a:solidFill>
-              <a:srgbClr val="8E5BD0"/>
+              <a:srgbClr val="7DF9FF"/>
             </a:solidFill>
             <a:prstDash val="solid"/>
           </a:ln>
@@ -6540,7 +6540,7 @@
     <p:bg>
       <p:bgPr>
         <a:solidFill>
-          <a:srgbClr val="DDF1FF"/>
+          <a:srgbClr val="2B1B3D"/>
         </a:solidFill>
       </p:bgPr>
     </p:bg>
@@ -6573,11 +6573,11 @@
             <a:avLst/>
           </a:prstGeom>
           <a:solidFill>
-            <a:srgbClr val="8ED98F"/>
+            <a:srgbClr val="5C2A6F"/>
           </a:solidFill>
           <a:ln w="12700">
             <a:solidFill>
-              <a:srgbClr val="8ED98F"/>
+              <a:srgbClr val="5C2A6F"/>
             </a:solidFill>
             <a:prstDash val="solid"/>
           </a:ln>
@@ -6598,19 +6598,19 @@
             <a:avLst/>
           </a:prstGeom>
           <a:solidFill>
-            <a:srgbClr val="6CCB7A"/>
+            <a:srgbClr val="7B3A8F"/>
           </a:solidFill>
           <a:ln w="12700">
             <a:solidFill>
-              <a:srgbClr val="6CCB7A"/>
-            </a:solidFill>
-            <a:prstDash val="solid"/>
-          </a:ln>
-        </p:spPr>
-      </p:sp>
-      <p:sp>
-        <p:nvSpPr>
-          <p:cNvPr id="4" name="Deco sun"/>
+              <a:srgbClr val="7B3A8F"/>
+            </a:solidFill>
+            <a:prstDash val="solid"/>
+          </a:ln>
+        </p:spPr>
+      </p:sp>
+      <p:sp>
+        <p:nvSpPr>
+          <p:cNvPr id="4" name="Deco top left"/>
           <p:cNvSpPr/>
           <p:nvPr/>
         </p:nvSpPr>
@@ -6619,15 +6619,15 @@
             <a:off x="320040" y="228600"/>
             <a:ext cx="914400" cy="914400"/>
           </a:xfrm>
-          <a:prstGeom prst="sun">
-            <a:avLst/>
-          </a:prstGeom>
-          <a:solidFill>
-            <a:srgbClr val="FFD23F"/>
+          <a:prstGeom prst="moon">
+            <a:avLst/>
+          </a:prstGeom>
+          <a:solidFill>
+            <a:srgbClr val="FFD6F6"/>
           </a:solidFill>
           <a:ln w="12700">
             <a:solidFill>
-              <a:srgbClr val="FFD23F"/>
+              <a:srgbClr val="FFD6F6"/>
             </a:solidFill>
             <a:prstDash val="solid"/>
           </a:ln>
@@ -6648,11 +6648,11 @@
             <a:avLst/>
           </a:prstGeom>
           <a:solidFill>
-            <a:srgbClr val="FFFFFF"/>
+            <a:srgbClr val="6B4A8F"/>
           </a:solidFill>
           <a:ln w="12700">
             <a:solidFill>
-              <a:srgbClr val="FFFFFF"/>
+              <a:srgbClr val="6B4A8F"/>
             </a:solidFill>
             <a:prstDash val="solid"/>
           </a:ln>
@@ -6673,19 +6673,19 @@
             <a:avLst/>
           </a:prstGeom>
           <a:solidFill>
-            <a:srgbClr val="F2FAFF"/>
+            <a:srgbClr val="553678"/>
           </a:solidFill>
           <a:ln w="12700">
             <a:solidFill>
-              <a:srgbClr val="F2FAFF"/>
-            </a:solidFill>
-            <a:prstDash val="solid"/>
-          </a:ln>
-        </p:spPr>
-      </p:sp>
-      <p:sp>
-        <p:nvSpPr>
-          <p:cNvPr id="7" name="Deco friend pink"/>
+              <a:srgbClr val="553678"/>
+            </a:solidFill>
+            <a:prstDash val="solid"/>
+          </a:ln>
+        </p:spPr>
+      </p:sp>
+      <p:sp>
+        <p:nvSpPr>
+          <p:cNvPr id="7" name="Deco friend left"/>
           <p:cNvSpPr/>
           <p:nvPr/>
         </p:nvSpPr>
@@ -6698,19 +6698,19 @@
             <a:avLst/>
           </a:prstGeom>
           <a:solidFill>
-            <a:srgbClr val="FF9EC4"/>
+            <a:srgbClr val="FFB703"/>
           </a:solidFill>
           <a:ln w="12700">
             <a:solidFill>
-              <a:srgbClr val="FF9EC4"/>
-            </a:solidFill>
-            <a:prstDash val="solid"/>
-          </a:ln>
-        </p:spPr>
-      </p:sp>
-      <p:sp>
-        <p:nvSpPr>
-          <p:cNvPr id="8" name="Deco friend orange"/>
+              <a:srgbClr val="FFB703"/>
+            </a:solidFill>
+            <a:prstDash val="solid"/>
+          </a:ln>
+        </p:spPr>
+      </p:sp>
+      <p:sp>
+        <p:nvSpPr>
+          <p:cNvPr id="8" name="Deco friend right"/>
           <p:cNvSpPr/>
           <p:nvPr/>
         </p:nvSpPr>
@@ -6723,11 +6723,11 @@
             <a:avLst/>
           </a:prstGeom>
           <a:solidFill>
-            <a:srgbClr val="FFB347"/>
+            <a:srgbClr val="7DF9FF"/>
           </a:solidFill>
           <a:ln w="12700">
             <a:solidFill>
-              <a:srgbClr val="FFB347"/>
+              <a:srgbClr val="7DF9FF"/>
             </a:solidFill>
             <a:prstDash val="solid"/>
           </a:ln>
@@ -6748,11 +6748,11 @@
             <a:avLst/>
           </a:prstGeom>
           <a:solidFill>
-            <a:srgbClr val="FFD23F"/>
+            <a:srgbClr val="FFD6F6"/>
           </a:solidFill>
           <a:ln w="12700">
             <a:solidFill>
-              <a:srgbClr val="FFD23F"/>
+              <a:srgbClr val="FFD6F6"/>
             </a:solidFill>
             <a:prstDash val="solid"/>
           </a:ln>
@@ -6773,11 +6773,11 @@
             <a:avLst/>
           </a:prstGeom>
           <a:solidFill>
-            <a:srgbClr val="FFD23F"/>
+            <a:srgbClr val="FFD6F6"/>
           </a:solidFill>
           <a:ln w="12700">
             <a:solidFill>
-              <a:srgbClr val="FFD23F"/>
+              <a:srgbClr val="FFD6F6"/>
             </a:solidFill>
             <a:prstDash val="solid"/>
           </a:ln>
@@ -6798,11 +6798,11 @@
             <a:avLst/>
           </a:prstGeom>
           <a:solidFill>
-            <a:srgbClr val="FF7A90"/>
+            <a:srgbClr val="FF7AA2"/>
           </a:solidFill>
           <a:ln w="12700">
             <a:solidFill>
-              <a:srgbClr val="FF7A90"/>
+              <a:srgbClr val="FF7AA2"/>
             </a:solidFill>
             <a:prstDash val="solid"/>
           </a:ln>
@@ -6925,11 +6925,11 @@
             <a:avLst/>
           </a:prstGeom>
           <a:solidFill>
-            <a:srgbClr val="F2994A"/>
+            <a:srgbClr val="FFC857"/>
           </a:solidFill>
           <a:ln w="12700">
             <a:solidFill>
-              <a:srgbClr val="F2994A"/>
+              <a:srgbClr val="FFC857"/>
             </a:solidFill>
             <a:prstDash val="solid"/>
           </a:ln>
@@ -6950,11 +6950,11 @@
             <a:avLst/>
           </a:prstGeom>
           <a:solidFill>
-            <a:srgbClr val="F2994A"/>
+            <a:srgbClr val="FFC857"/>
           </a:solidFill>
           <a:ln w="12700">
             <a:solidFill>
-              <a:srgbClr val="F2994A"/>
+              <a:srgbClr val="FFC857"/>
             </a:solidFill>
             <a:prstDash val="solid"/>
           </a:ln>
@@ -6975,11 +6975,11 @@
             <a:avLst/>
           </a:prstGeom>
           <a:solidFill>
-            <a:srgbClr val="8E5BD0"/>
+            <a:srgbClr val="7DF9FF"/>
           </a:solidFill>
           <a:ln w="12700">
             <a:solidFill>
-              <a:srgbClr val="8E5BD0"/>
+              <a:srgbClr val="7DF9FF"/>
             </a:solidFill>
             <a:prstDash val="solid"/>
           </a:ln>
@@ -7844,7 +7844,7 @@
     <p:bg>
       <p:bgPr>
         <a:solidFill>
-          <a:srgbClr val="DDF1FF"/>
+          <a:srgbClr val="2B1B3D"/>
         </a:solidFill>
       </p:bgPr>
     </p:bg>
@@ -7877,11 +7877,11 @@
             <a:avLst/>
           </a:prstGeom>
           <a:solidFill>
-            <a:srgbClr val="8ED98F"/>
+            <a:srgbClr val="5C2A6F"/>
           </a:solidFill>
           <a:ln w="12700">
             <a:solidFill>
-              <a:srgbClr val="8ED98F"/>
+              <a:srgbClr val="5C2A6F"/>
             </a:solidFill>
             <a:prstDash val="solid"/>
           </a:ln>
@@ -7902,19 +7902,19 @@
             <a:avLst/>
           </a:prstGeom>
           <a:solidFill>
-            <a:srgbClr val="6CCB7A"/>
+            <a:srgbClr val="7B3A8F"/>
           </a:solidFill>
           <a:ln w="12700">
             <a:solidFill>
-              <a:srgbClr val="6CCB7A"/>
-            </a:solidFill>
-            <a:prstDash val="solid"/>
-          </a:ln>
-        </p:spPr>
-      </p:sp>
-      <p:sp>
-        <p:nvSpPr>
-          <p:cNvPr id="4" name="Deco sun"/>
+              <a:srgbClr val="7B3A8F"/>
+            </a:solidFill>
+            <a:prstDash val="solid"/>
+          </a:ln>
+        </p:spPr>
+      </p:sp>
+      <p:sp>
+        <p:nvSpPr>
+          <p:cNvPr id="4" name="Deco top left"/>
           <p:cNvSpPr/>
           <p:nvPr/>
         </p:nvSpPr>
@@ -7923,15 +7923,15 @@
             <a:off x="320040" y="228600"/>
             <a:ext cx="914400" cy="914400"/>
           </a:xfrm>
-          <a:prstGeom prst="sun">
-            <a:avLst/>
-          </a:prstGeom>
-          <a:solidFill>
-            <a:srgbClr val="FFD23F"/>
+          <a:prstGeom prst="moon">
+            <a:avLst/>
+          </a:prstGeom>
+          <a:solidFill>
+            <a:srgbClr val="FFD6F6"/>
           </a:solidFill>
           <a:ln w="12700">
             <a:solidFill>
-              <a:srgbClr val="FFD23F"/>
+              <a:srgbClr val="FFD6F6"/>
             </a:solidFill>
             <a:prstDash val="solid"/>
           </a:ln>
@@ -7952,11 +7952,11 @@
             <a:avLst/>
           </a:prstGeom>
           <a:solidFill>
-            <a:srgbClr val="FFFFFF"/>
+            <a:srgbClr val="6B4A8F"/>
           </a:solidFill>
           <a:ln w="12700">
             <a:solidFill>
-              <a:srgbClr val="FFFFFF"/>
+              <a:srgbClr val="6B4A8F"/>
             </a:solidFill>
             <a:prstDash val="solid"/>
           </a:ln>
@@ -7977,19 +7977,19 @@
             <a:avLst/>
           </a:prstGeom>
           <a:solidFill>
-            <a:srgbClr val="F2FAFF"/>
+            <a:srgbClr val="553678"/>
           </a:solidFill>
           <a:ln w="12700">
             <a:solidFill>
-              <a:srgbClr val="F2FAFF"/>
-            </a:solidFill>
-            <a:prstDash val="solid"/>
-          </a:ln>
-        </p:spPr>
-      </p:sp>
-      <p:sp>
-        <p:nvSpPr>
-          <p:cNvPr id="7" name="Deco friend pink"/>
+              <a:srgbClr val="553678"/>
+            </a:solidFill>
+            <a:prstDash val="solid"/>
+          </a:ln>
+        </p:spPr>
+      </p:sp>
+      <p:sp>
+        <p:nvSpPr>
+          <p:cNvPr id="7" name="Deco friend left"/>
           <p:cNvSpPr/>
           <p:nvPr/>
         </p:nvSpPr>
@@ -8002,19 +8002,19 @@
             <a:avLst/>
           </a:prstGeom>
           <a:solidFill>
-            <a:srgbClr val="FF9EC4"/>
+            <a:srgbClr val="FFB703"/>
           </a:solidFill>
           <a:ln w="12700">
             <a:solidFill>
-              <a:srgbClr val="FF9EC4"/>
-            </a:solidFill>
-            <a:prstDash val="solid"/>
-          </a:ln>
-        </p:spPr>
-      </p:sp>
-      <p:sp>
-        <p:nvSpPr>
-          <p:cNvPr id="8" name="Deco friend orange"/>
+              <a:srgbClr val="FFB703"/>
+            </a:solidFill>
+            <a:prstDash val="solid"/>
+          </a:ln>
+        </p:spPr>
+      </p:sp>
+      <p:sp>
+        <p:nvSpPr>
+          <p:cNvPr id="8" name="Deco friend right"/>
           <p:cNvSpPr/>
           <p:nvPr/>
         </p:nvSpPr>
@@ -8027,11 +8027,11 @@
             <a:avLst/>
           </a:prstGeom>
           <a:solidFill>
-            <a:srgbClr val="FFB347"/>
+            <a:srgbClr val="7DF9FF"/>
           </a:solidFill>
           <a:ln w="12700">
             <a:solidFill>
-              <a:srgbClr val="FFB347"/>
+              <a:srgbClr val="7DF9FF"/>
             </a:solidFill>
             <a:prstDash val="solid"/>
           </a:ln>
@@ -8052,11 +8052,11 @@
             <a:avLst/>
           </a:prstGeom>
           <a:solidFill>
-            <a:srgbClr val="FFD23F"/>
+            <a:srgbClr val="FFD6F6"/>
           </a:solidFill>
           <a:ln w="12700">
             <a:solidFill>
-              <a:srgbClr val="FFD23F"/>
+              <a:srgbClr val="FFD6F6"/>
             </a:solidFill>
             <a:prstDash val="solid"/>
           </a:ln>
@@ -8077,11 +8077,11 @@
             <a:avLst/>
           </a:prstGeom>
           <a:solidFill>
-            <a:srgbClr val="FFD23F"/>
+            <a:srgbClr val="FFD6F6"/>
           </a:solidFill>
           <a:ln w="12700">
             <a:solidFill>
-              <a:srgbClr val="FFD23F"/>
+              <a:srgbClr val="FFD6F6"/>
             </a:solidFill>
             <a:prstDash val="solid"/>
           </a:ln>
@@ -8102,11 +8102,11 @@
             <a:avLst/>
           </a:prstGeom>
           <a:solidFill>
-            <a:srgbClr val="FF7A90"/>
+            <a:srgbClr val="FF7AA2"/>
           </a:solidFill>
           <a:ln w="12700">
             <a:solidFill>
-              <a:srgbClr val="FF7A90"/>
+              <a:srgbClr val="FF7AA2"/>
             </a:solidFill>
             <a:prstDash val="solid"/>
           </a:ln>
@@ -8229,11 +8229,11 @@
             <a:avLst/>
           </a:prstGeom>
           <a:solidFill>
-            <a:srgbClr val="F2994A"/>
+            <a:srgbClr val="FFC857"/>
           </a:solidFill>
           <a:ln w="12700">
             <a:solidFill>
-              <a:srgbClr val="F2994A"/>
+              <a:srgbClr val="FFC857"/>
             </a:solidFill>
             <a:prstDash val="solid"/>
           </a:ln>
@@ -8254,11 +8254,11 @@
             <a:avLst/>
           </a:prstGeom>
           <a:solidFill>
-            <a:srgbClr val="F2994A"/>
+            <a:srgbClr val="FFC857"/>
           </a:solidFill>
           <a:ln w="12700">
             <a:solidFill>
-              <a:srgbClr val="F2994A"/>
+              <a:srgbClr val="FFC857"/>
             </a:solidFill>
             <a:prstDash val="solid"/>
           </a:ln>
@@ -8279,11 +8279,11 @@
             <a:avLst/>
           </a:prstGeom>
           <a:solidFill>
-            <a:srgbClr val="8E5BD0"/>
+            <a:srgbClr val="7DF9FF"/>
           </a:solidFill>
           <a:ln w="12700">
             <a:solidFill>
-              <a:srgbClr val="8E5BD0"/>
+              <a:srgbClr val="7DF9FF"/>
             </a:solidFill>
             <a:prstDash val="solid"/>
           </a:ln>
@@ -9148,7 +9148,7 @@
     <p:bg>
       <p:bgPr>
         <a:solidFill>
-          <a:srgbClr val="DDF1FF"/>
+          <a:srgbClr val="2B1B3D"/>
         </a:solidFill>
       </p:bgPr>
     </p:bg>
@@ -9181,11 +9181,11 @@
             <a:avLst/>
           </a:prstGeom>
           <a:solidFill>
-            <a:srgbClr val="8ED98F"/>
+            <a:srgbClr val="5C2A6F"/>
           </a:solidFill>
           <a:ln w="12700">
             <a:solidFill>
-              <a:srgbClr val="8ED98F"/>
+              <a:srgbClr val="5C2A6F"/>
             </a:solidFill>
             <a:prstDash val="solid"/>
           </a:ln>
@@ -9206,19 +9206,19 @@
             <a:avLst/>
           </a:prstGeom>
           <a:solidFill>
-            <a:srgbClr val="6CCB7A"/>
+            <a:srgbClr val="7B3A8F"/>
           </a:solidFill>
           <a:ln w="12700">
             <a:solidFill>
-              <a:srgbClr val="6CCB7A"/>
-            </a:solidFill>
-            <a:prstDash val="solid"/>
-          </a:ln>
-        </p:spPr>
-      </p:sp>
-      <p:sp>
-        <p:nvSpPr>
-          <p:cNvPr id="4" name="Deco sun"/>
+              <a:srgbClr val="7B3A8F"/>
+            </a:solidFill>
+            <a:prstDash val="solid"/>
+          </a:ln>
+        </p:spPr>
+      </p:sp>
+      <p:sp>
+        <p:nvSpPr>
+          <p:cNvPr id="4" name="Deco top left"/>
           <p:cNvSpPr/>
           <p:nvPr/>
         </p:nvSpPr>
@@ -9227,15 +9227,15 @@
             <a:off x="320040" y="228600"/>
             <a:ext cx="914400" cy="914400"/>
           </a:xfrm>
-          <a:prstGeom prst="sun">
-            <a:avLst/>
-          </a:prstGeom>
-          <a:solidFill>
-            <a:srgbClr val="FFD23F"/>
+          <a:prstGeom prst="moon">
+            <a:avLst/>
+          </a:prstGeom>
+          <a:solidFill>
+            <a:srgbClr val="FFD6F6"/>
           </a:solidFill>
           <a:ln w="12700">
             <a:solidFill>
-              <a:srgbClr val="FFD23F"/>
+              <a:srgbClr val="FFD6F6"/>
             </a:solidFill>
             <a:prstDash val="solid"/>
           </a:ln>
@@ -9256,11 +9256,11 @@
             <a:avLst/>
           </a:prstGeom>
           <a:solidFill>
-            <a:srgbClr val="FFFFFF"/>
+            <a:srgbClr val="6B4A8F"/>
           </a:solidFill>
           <a:ln w="12700">
             <a:solidFill>
-              <a:srgbClr val="FFFFFF"/>
+              <a:srgbClr val="6B4A8F"/>
             </a:solidFill>
             <a:prstDash val="solid"/>
           </a:ln>
@@ -9281,19 +9281,19 @@
             <a:avLst/>
           </a:prstGeom>
           <a:solidFill>
-            <a:srgbClr val="F2FAFF"/>
+            <a:srgbClr val="553678"/>
           </a:solidFill>
           <a:ln w="12700">
             <a:solidFill>
-              <a:srgbClr val="F2FAFF"/>
-            </a:solidFill>
-            <a:prstDash val="solid"/>
-          </a:ln>
-        </p:spPr>
-      </p:sp>
-      <p:sp>
-        <p:nvSpPr>
-          <p:cNvPr id="7" name="Deco friend pink"/>
+              <a:srgbClr val="553678"/>
+            </a:solidFill>
+            <a:prstDash val="solid"/>
+          </a:ln>
+        </p:spPr>
+      </p:sp>
+      <p:sp>
+        <p:nvSpPr>
+          <p:cNvPr id="7" name="Deco friend left"/>
           <p:cNvSpPr/>
           <p:nvPr/>
         </p:nvSpPr>
@@ -9306,19 +9306,19 @@
             <a:avLst/>
           </a:prstGeom>
           <a:solidFill>
-            <a:srgbClr val="FF9EC4"/>
+            <a:srgbClr val="FFB703"/>
           </a:solidFill>
           <a:ln w="12700">
             <a:solidFill>
-              <a:srgbClr val="FF9EC4"/>
-            </a:solidFill>
-            <a:prstDash val="solid"/>
-          </a:ln>
-        </p:spPr>
-      </p:sp>
-      <p:sp>
-        <p:nvSpPr>
-          <p:cNvPr id="8" name="Deco friend orange"/>
+              <a:srgbClr val="FFB703"/>
+            </a:solidFill>
+            <a:prstDash val="solid"/>
+          </a:ln>
+        </p:spPr>
+      </p:sp>
+      <p:sp>
+        <p:nvSpPr>
+          <p:cNvPr id="8" name="Deco friend right"/>
           <p:cNvSpPr/>
           <p:nvPr/>
         </p:nvSpPr>
@@ -9331,11 +9331,11 @@
             <a:avLst/>
           </a:prstGeom>
           <a:solidFill>
-            <a:srgbClr val="FFB347"/>
+            <a:srgbClr val="7DF9FF"/>
           </a:solidFill>
           <a:ln w="12700">
             <a:solidFill>
-              <a:srgbClr val="FFB347"/>
+              <a:srgbClr val="7DF9FF"/>
             </a:solidFill>
             <a:prstDash val="solid"/>
           </a:ln>
@@ -9356,11 +9356,11 @@
             <a:avLst/>
           </a:prstGeom>
           <a:solidFill>
-            <a:srgbClr val="FFD23F"/>
+            <a:srgbClr val="FFD6F6"/>
           </a:solidFill>
           <a:ln w="12700">
             <a:solidFill>
-              <a:srgbClr val="FFD23F"/>
+              <a:srgbClr val="FFD6F6"/>
             </a:solidFill>
             <a:prstDash val="solid"/>
           </a:ln>
@@ -9381,11 +9381,11 @@
             <a:avLst/>
           </a:prstGeom>
           <a:solidFill>
-            <a:srgbClr val="FFD23F"/>
+            <a:srgbClr val="FFD6F6"/>
           </a:solidFill>
           <a:ln w="12700">
             <a:solidFill>
-              <a:srgbClr val="FFD23F"/>
+              <a:srgbClr val="FFD6F6"/>
             </a:solidFill>
             <a:prstDash val="solid"/>
           </a:ln>
@@ -9406,11 +9406,11 @@
             <a:avLst/>
           </a:prstGeom>
           <a:solidFill>
-            <a:srgbClr val="FF7A90"/>
+            <a:srgbClr val="FF7AA2"/>
           </a:solidFill>
           <a:ln w="12700">
             <a:solidFill>
-              <a:srgbClr val="FF7A90"/>
+              <a:srgbClr val="FF7AA2"/>
             </a:solidFill>
             <a:prstDash val="solid"/>
           </a:ln>
@@ -9533,11 +9533,11 @@
             <a:avLst/>
           </a:prstGeom>
           <a:solidFill>
-            <a:srgbClr val="F2994A"/>
+            <a:srgbClr val="FFC857"/>
           </a:solidFill>
           <a:ln w="12700">
             <a:solidFill>
-              <a:srgbClr val="F2994A"/>
+              <a:srgbClr val="FFC857"/>
             </a:solidFill>
             <a:prstDash val="solid"/>
           </a:ln>
@@ -9558,11 +9558,11 @@
             <a:avLst/>
           </a:prstGeom>
           <a:solidFill>
-            <a:srgbClr val="F2994A"/>
+            <a:srgbClr val="FFC857"/>
           </a:solidFill>
           <a:ln w="12700">
             <a:solidFill>
-              <a:srgbClr val="F2994A"/>
+              <a:srgbClr val="FFC857"/>
             </a:solidFill>
             <a:prstDash val="solid"/>
           </a:ln>
@@ -9583,11 +9583,11 @@
             <a:avLst/>
           </a:prstGeom>
           <a:solidFill>
-            <a:srgbClr val="8E5BD0"/>
+            <a:srgbClr val="7DF9FF"/>
           </a:solidFill>
           <a:ln w="12700">
             <a:solidFill>
-              <a:srgbClr val="8E5BD0"/>
+              <a:srgbClr val="7DF9FF"/>
             </a:solidFill>
             <a:prstDash val="solid"/>
           </a:ln>
@@ -10452,7 +10452,7 @@
     <p:bg>
       <p:bgPr>
         <a:solidFill>
-          <a:srgbClr val="DDF1FF"/>
+          <a:srgbClr val="2B1B3D"/>
         </a:solidFill>
       </p:bgPr>
     </p:bg>
@@ -10485,11 +10485,11 @@
             <a:avLst/>
           </a:prstGeom>
           <a:solidFill>
-            <a:srgbClr val="8ED98F"/>
+            <a:srgbClr val="5C2A6F"/>
           </a:solidFill>
           <a:ln w="12700">
             <a:solidFill>
-              <a:srgbClr val="8ED98F"/>
+              <a:srgbClr val="5C2A6F"/>
             </a:solidFill>
             <a:prstDash val="solid"/>
           </a:ln>
@@ -10510,19 +10510,19 @@
             <a:avLst/>
           </a:prstGeom>
           <a:solidFill>
-            <a:srgbClr val="6CCB7A"/>
+            <a:srgbClr val="7B3A8F"/>
           </a:solidFill>
           <a:ln w="12700">
             <a:solidFill>
-              <a:srgbClr val="6CCB7A"/>
-            </a:solidFill>
-            <a:prstDash val="solid"/>
-          </a:ln>
-        </p:spPr>
-      </p:sp>
-      <p:sp>
-        <p:nvSpPr>
-          <p:cNvPr id="4" name="Deco sun"/>
+              <a:srgbClr val="7B3A8F"/>
+            </a:solidFill>
+            <a:prstDash val="solid"/>
+          </a:ln>
+        </p:spPr>
+      </p:sp>
+      <p:sp>
+        <p:nvSpPr>
+          <p:cNvPr id="4" name="Deco top left"/>
           <p:cNvSpPr/>
           <p:nvPr/>
         </p:nvSpPr>
@@ -10531,15 +10531,15 @@
             <a:off x="320040" y="228600"/>
             <a:ext cx="914400" cy="914400"/>
           </a:xfrm>
-          <a:prstGeom prst="sun">
-            <a:avLst/>
-          </a:prstGeom>
-          <a:solidFill>
-            <a:srgbClr val="FFD23F"/>
+          <a:prstGeom prst="moon">
+            <a:avLst/>
+          </a:prstGeom>
+          <a:solidFill>
+            <a:srgbClr val="FFD6F6"/>
           </a:solidFill>
           <a:ln w="12700">
             <a:solidFill>
-              <a:srgbClr val="FFD23F"/>
+              <a:srgbClr val="FFD6F6"/>
             </a:solidFill>
             <a:prstDash val="solid"/>
           </a:ln>
@@ -10560,11 +10560,11 @@
             <a:avLst/>
           </a:prstGeom>
           <a:solidFill>
-            <a:srgbClr val="FFFFFF"/>
+            <a:srgbClr val="6B4A8F"/>
           </a:solidFill>
           <a:ln w="12700">
             <a:solidFill>
-              <a:srgbClr val="FFFFFF"/>
+              <a:srgbClr val="6B4A8F"/>
             </a:solidFill>
             <a:prstDash val="solid"/>
           </a:ln>
@@ -10585,19 +10585,19 @@
             <a:avLst/>
           </a:prstGeom>
           <a:solidFill>
-            <a:srgbClr val="F2FAFF"/>
+            <a:srgbClr val="553678"/>
           </a:solidFill>
           <a:ln w="12700">
             <a:solidFill>
-              <a:srgbClr val="F2FAFF"/>
-            </a:solidFill>
-            <a:prstDash val="solid"/>
-          </a:ln>
-        </p:spPr>
-      </p:sp>
-      <p:sp>
-        <p:nvSpPr>
-          <p:cNvPr id="7" name="Deco friend pink"/>
+              <a:srgbClr val="553678"/>
+            </a:solidFill>
+            <a:prstDash val="solid"/>
+          </a:ln>
+        </p:spPr>
+      </p:sp>
+      <p:sp>
+        <p:nvSpPr>
+          <p:cNvPr id="7" name="Deco friend left"/>
           <p:cNvSpPr/>
           <p:nvPr/>
         </p:nvSpPr>
@@ -10610,19 +10610,19 @@
             <a:avLst/>
           </a:prstGeom>
           <a:solidFill>
-            <a:srgbClr val="FF9EC4"/>
+            <a:srgbClr val="FFB703"/>
           </a:solidFill>
           <a:ln w="12700">
             <a:solidFill>
-              <a:srgbClr val="FF9EC4"/>
-            </a:solidFill>
-            <a:prstDash val="solid"/>
-          </a:ln>
-        </p:spPr>
-      </p:sp>
-      <p:sp>
-        <p:nvSpPr>
-          <p:cNvPr id="8" name="Deco friend orange"/>
+              <a:srgbClr val="FFB703"/>
+            </a:solidFill>
+            <a:prstDash val="solid"/>
+          </a:ln>
+        </p:spPr>
+      </p:sp>
+      <p:sp>
+        <p:nvSpPr>
+          <p:cNvPr id="8" name="Deco friend right"/>
           <p:cNvSpPr/>
           <p:nvPr/>
         </p:nvSpPr>
@@ -10635,11 +10635,11 @@
             <a:avLst/>
           </a:prstGeom>
           <a:solidFill>
-            <a:srgbClr val="FFB347"/>
+            <a:srgbClr val="7DF9FF"/>
           </a:solidFill>
           <a:ln w="12700">
             <a:solidFill>
-              <a:srgbClr val="FFB347"/>
+              <a:srgbClr val="7DF9FF"/>
             </a:solidFill>
             <a:prstDash val="solid"/>
           </a:ln>
@@ -10660,11 +10660,11 @@
             <a:avLst/>
           </a:prstGeom>
           <a:solidFill>
-            <a:srgbClr val="FFD23F"/>
+            <a:srgbClr val="FFD6F6"/>
           </a:solidFill>
           <a:ln w="12700">
             <a:solidFill>
-              <a:srgbClr val="FFD23F"/>
+              <a:srgbClr val="FFD6F6"/>
             </a:solidFill>
             <a:prstDash val="solid"/>
           </a:ln>
@@ -10685,11 +10685,11 @@
             <a:avLst/>
           </a:prstGeom>
           <a:solidFill>
-            <a:srgbClr val="FFD23F"/>
+            <a:srgbClr val="FFD6F6"/>
           </a:solidFill>
           <a:ln w="12700">
             <a:solidFill>
-              <a:srgbClr val="FFD23F"/>
+              <a:srgbClr val="FFD6F6"/>
             </a:solidFill>
             <a:prstDash val="solid"/>
           </a:ln>
@@ -10710,11 +10710,11 @@
             <a:avLst/>
           </a:prstGeom>
           <a:solidFill>
-            <a:srgbClr val="FF7A90"/>
+            <a:srgbClr val="FF7AA2"/>
           </a:solidFill>
           <a:ln w="12700">
             <a:solidFill>
-              <a:srgbClr val="FF7A90"/>
+              <a:srgbClr val="FF7AA2"/>
             </a:solidFill>
             <a:prstDash val="solid"/>
           </a:ln>
@@ -10812,11 +10812,11 @@
             <a:avLst/>
           </a:prstGeom>
           <a:solidFill>
-            <a:srgbClr val="F2994A"/>
+            <a:srgbClr val="FFC857"/>
           </a:solidFill>
           <a:ln w="12700">
             <a:solidFill>
-              <a:srgbClr val="F2994A"/>
+              <a:srgbClr val="FFC857"/>
             </a:solidFill>
             <a:prstDash val="solid"/>
           </a:ln>
@@ -10837,11 +10837,11 @@
             <a:avLst/>
           </a:prstGeom>
           <a:solidFill>
-            <a:srgbClr val="8E5BD0"/>
+            <a:srgbClr val="7DF9FF"/>
           </a:solidFill>
           <a:ln w="12700">
             <a:solidFill>
-              <a:srgbClr val="8E5BD0"/>
+              <a:srgbClr val="7DF9FF"/>
             </a:solidFill>
             <a:prstDash val="solid"/>
           </a:ln>
@@ -11466,7 +11466,7 @@
     <p:bg>
       <p:bgPr>
         <a:solidFill>
-          <a:srgbClr val="DDF1FF"/>
+          <a:srgbClr val="2B1B3D"/>
         </a:solidFill>
       </p:bgPr>
     </p:bg>
@@ -11499,11 +11499,11 @@
             <a:avLst/>
           </a:prstGeom>
           <a:solidFill>
-            <a:srgbClr val="8ED98F"/>
+            <a:srgbClr val="5C2A6F"/>
           </a:solidFill>
           <a:ln w="12700">
             <a:solidFill>
-              <a:srgbClr val="8ED98F"/>
+              <a:srgbClr val="5C2A6F"/>
             </a:solidFill>
             <a:prstDash val="solid"/>
           </a:ln>
@@ -11524,19 +11524,19 @@
             <a:avLst/>
           </a:prstGeom>
           <a:solidFill>
-            <a:srgbClr val="6CCB7A"/>
+            <a:srgbClr val="7B3A8F"/>
           </a:solidFill>
           <a:ln w="12700">
             <a:solidFill>
-              <a:srgbClr val="6CCB7A"/>
-            </a:solidFill>
-            <a:prstDash val="solid"/>
-          </a:ln>
-        </p:spPr>
-      </p:sp>
-      <p:sp>
-        <p:nvSpPr>
-          <p:cNvPr id="4" name="Deco sun"/>
+              <a:srgbClr val="7B3A8F"/>
+            </a:solidFill>
+            <a:prstDash val="solid"/>
+          </a:ln>
+        </p:spPr>
+      </p:sp>
+      <p:sp>
+        <p:nvSpPr>
+          <p:cNvPr id="4" name="Deco top left"/>
           <p:cNvSpPr/>
           <p:nvPr/>
         </p:nvSpPr>
@@ -11545,15 +11545,15 @@
             <a:off x="320040" y="228600"/>
             <a:ext cx="914400" cy="914400"/>
           </a:xfrm>
-          <a:prstGeom prst="sun">
-            <a:avLst/>
-          </a:prstGeom>
-          <a:solidFill>
-            <a:srgbClr val="FFD23F"/>
+          <a:prstGeom prst="moon">
+            <a:avLst/>
+          </a:prstGeom>
+          <a:solidFill>
+            <a:srgbClr val="FFD6F6"/>
           </a:solidFill>
           <a:ln w="12700">
             <a:solidFill>
-              <a:srgbClr val="FFD23F"/>
+              <a:srgbClr val="FFD6F6"/>
             </a:solidFill>
             <a:prstDash val="solid"/>
           </a:ln>
@@ -11574,11 +11574,11 @@
             <a:avLst/>
           </a:prstGeom>
           <a:solidFill>
-            <a:srgbClr val="FFFFFF"/>
+            <a:srgbClr val="6B4A8F"/>
           </a:solidFill>
           <a:ln w="12700">
             <a:solidFill>
-              <a:srgbClr val="FFFFFF"/>
+              <a:srgbClr val="6B4A8F"/>
             </a:solidFill>
             <a:prstDash val="solid"/>
           </a:ln>
@@ -11599,19 +11599,19 @@
             <a:avLst/>
           </a:prstGeom>
           <a:solidFill>
-            <a:srgbClr val="F2FAFF"/>
+            <a:srgbClr val="553678"/>
           </a:solidFill>
           <a:ln w="12700">
             <a:solidFill>
-              <a:srgbClr val="F2FAFF"/>
-            </a:solidFill>
-            <a:prstDash val="solid"/>
-          </a:ln>
-        </p:spPr>
-      </p:sp>
-      <p:sp>
-        <p:nvSpPr>
-          <p:cNvPr id="7" name="Deco friend pink"/>
+              <a:srgbClr val="553678"/>
+            </a:solidFill>
+            <a:prstDash val="solid"/>
+          </a:ln>
+        </p:spPr>
+      </p:sp>
+      <p:sp>
+        <p:nvSpPr>
+          <p:cNvPr id="7" name="Deco friend left"/>
           <p:cNvSpPr/>
           <p:nvPr/>
         </p:nvSpPr>
@@ -11624,19 +11624,19 @@
             <a:avLst/>
           </a:prstGeom>
           <a:solidFill>
-            <a:srgbClr val="FF9EC4"/>
+            <a:srgbClr val="FFB703"/>
           </a:solidFill>
           <a:ln w="12700">
             <a:solidFill>
-              <a:srgbClr val="FF9EC4"/>
-            </a:solidFill>
-            <a:prstDash val="solid"/>
-          </a:ln>
-        </p:spPr>
-      </p:sp>
-      <p:sp>
-        <p:nvSpPr>
-          <p:cNvPr id="8" name="Deco friend orange"/>
+              <a:srgbClr val="FFB703"/>
+            </a:solidFill>
+            <a:prstDash val="solid"/>
+          </a:ln>
+        </p:spPr>
+      </p:sp>
+      <p:sp>
+        <p:nvSpPr>
+          <p:cNvPr id="8" name="Deco friend right"/>
           <p:cNvSpPr/>
           <p:nvPr/>
         </p:nvSpPr>
@@ -11649,11 +11649,11 @@
             <a:avLst/>
           </a:prstGeom>
           <a:solidFill>
-            <a:srgbClr val="FFB347"/>
+            <a:srgbClr val="7DF9FF"/>
           </a:solidFill>
           <a:ln w="12700">
             <a:solidFill>
-              <a:srgbClr val="FFB347"/>
+              <a:srgbClr val="7DF9FF"/>
             </a:solidFill>
             <a:prstDash val="solid"/>
           </a:ln>
@@ -11674,11 +11674,11 @@
             <a:avLst/>
           </a:prstGeom>
           <a:solidFill>
-            <a:srgbClr val="FFD23F"/>
+            <a:srgbClr val="FFD6F6"/>
           </a:solidFill>
           <a:ln w="12700">
             <a:solidFill>
-              <a:srgbClr val="FFD23F"/>
+              <a:srgbClr val="FFD6F6"/>
             </a:solidFill>
             <a:prstDash val="solid"/>
           </a:ln>
@@ -11699,11 +11699,11 @@
             <a:avLst/>
           </a:prstGeom>
           <a:solidFill>
-            <a:srgbClr val="FFD23F"/>
+            <a:srgbClr val="FFD6F6"/>
           </a:solidFill>
           <a:ln w="12700">
             <a:solidFill>
-              <a:srgbClr val="FFD23F"/>
+              <a:srgbClr val="FFD6F6"/>
             </a:solidFill>
             <a:prstDash val="solid"/>
           </a:ln>
@@ -11724,11 +11724,11 @@
             <a:avLst/>
           </a:prstGeom>
           <a:solidFill>
-            <a:srgbClr val="FF7A90"/>
+            <a:srgbClr val="FF7AA2"/>
           </a:solidFill>
           <a:ln w="12700">
             <a:solidFill>
-              <a:srgbClr val="FF7A90"/>
+              <a:srgbClr val="FF7AA2"/>
             </a:solidFill>
             <a:prstDash val="solid"/>
           </a:ln>
@@ -11826,11 +11826,11 @@
             <a:avLst/>
           </a:prstGeom>
           <a:solidFill>
-            <a:srgbClr val="F2994A"/>
+            <a:srgbClr val="FFC857"/>
           </a:solidFill>
           <a:ln w="12700">
             <a:solidFill>
-              <a:srgbClr val="F2994A"/>
+              <a:srgbClr val="FFC857"/>
             </a:solidFill>
             <a:prstDash val="solid"/>
           </a:ln>
@@ -11851,11 +11851,11 @@
             <a:avLst/>
           </a:prstGeom>
           <a:solidFill>
-            <a:srgbClr val="8E5BD0"/>
+            <a:srgbClr val="7DF9FF"/>
           </a:solidFill>
           <a:ln w="12700">
             <a:solidFill>
-              <a:srgbClr val="8E5BD0"/>
+              <a:srgbClr val="7DF9FF"/>
             </a:solidFill>
             <a:prstDash val="solid"/>
           </a:ln>
@@ -12480,7 +12480,7 @@
     <p:bg>
       <p:bgPr>
         <a:solidFill>
-          <a:srgbClr val="DDF1FF"/>
+          <a:srgbClr val="2B1B3D"/>
         </a:solidFill>
       </p:bgPr>
     </p:bg>
@@ -12513,11 +12513,11 @@
             <a:avLst/>
           </a:prstGeom>
           <a:solidFill>
-            <a:srgbClr val="8ED98F"/>
+            <a:srgbClr val="5C2A6F"/>
           </a:solidFill>
           <a:ln w="12700">
             <a:solidFill>
-              <a:srgbClr val="8ED98F"/>
+              <a:srgbClr val="5C2A6F"/>
             </a:solidFill>
             <a:prstDash val="solid"/>
           </a:ln>
@@ -12538,19 +12538,19 @@
             <a:avLst/>
           </a:prstGeom>
           <a:solidFill>
-            <a:srgbClr val="6CCB7A"/>
+            <a:srgbClr val="7B3A8F"/>
           </a:solidFill>
           <a:ln w="12700">
             <a:solidFill>
-              <a:srgbClr val="6CCB7A"/>
-            </a:solidFill>
-            <a:prstDash val="solid"/>
-          </a:ln>
-        </p:spPr>
-      </p:sp>
-      <p:sp>
-        <p:nvSpPr>
-          <p:cNvPr id="4" name="Deco sun"/>
+              <a:srgbClr val="7B3A8F"/>
+            </a:solidFill>
+            <a:prstDash val="solid"/>
+          </a:ln>
+        </p:spPr>
+      </p:sp>
+      <p:sp>
+        <p:nvSpPr>
+          <p:cNvPr id="4" name="Deco top left"/>
           <p:cNvSpPr/>
           <p:nvPr/>
         </p:nvSpPr>
@@ -12559,15 +12559,15 @@
             <a:off x="320040" y="228600"/>
             <a:ext cx="914400" cy="914400"/>
           </a:xfrm>
-          <a:prstGeom prst="sun">
-            <a:avLst/>
-          </a:prstGeom>
-          <a:solidFill>
-            <a:srgbClr val="FFD23F"/>
+          <a:prstGeom prst="moon">
+            <a:avLst/>
+          </a:prstGeom>
+          <a:solidFill>
+            <a:srgbClr val="FFD6F6"/>
           </a:solidFill>
           <a:ln w="12700">
             <a:solidFill>
-              <a:srgbClr val="FFD23F"/>
+              <a:srgbClr val="FFD6F6"/>
             </a:solidFill>
             <a:prstDash val="solid"/>
           </a:ln>
@@ -12588,11 +12588,11 @@
             <a:avLst/>
           </a:prstGeom>
           <a:solidFill>
-            <a:srgbClr val="FFFFFF"/>
+            <a:srgbClr val="6B4A8F"/>
           </a:solidFill>
           <a:ln w="12700">
             <a:solidFill>
-              <a:srgbClr val="FFFFFF"/>
+              <a:srgbClr val="6B4A8F"/>
             </a:solidFill>
             <a:prstDash val="solid"/>
           </a:ln>
@@ -12613,19 +12613,19 @@
             <a:avLst/>
           </a:prstGeom>
           <a:solidFill>
-            <a:srgbClr val="F2FAFF"/>
+            <a:srgbClr val="553678"/>
           </a:solidFill>
           <a:ln w="12700">
             <a:solidFill>
-              <a:srgbClr val="F2FAFF"/>
-            </a:solidFill>
-            <a:prstDash val="solid"/>
-          </a:ln>
-        </p:spPr>
-      </p:sp>
-      <p:sp>
-        <p:nvSpPr>
-          <p:cNvPr id="7" name="Deco friend pink"/>
+              <a:srgbClr val="553678"/>
+            </a:solidFill>
+            <a:prstDash val="solid"/>
+          </a:ln>
+        </p:spPr>
+      </p:sp>
+      <p:sp>
+        <p:nvSpPr>
+          <p:cNvPr id="7" name="Deco friend left"/>
           <p:cNvSpPr/>
           <p:nvPr/>
         </p:nvSpPr>
@@ -12638,19 +12638,19 @@
             <a:avLst/>
           </a:prstGeom>
           <a:solidFill>
-            <a:srgbClr val="FF9EC4"/>
+            <a:srgbClr val="FFB703"/>
           </a:solidFill>
           <a:ln w="12700">
             <a:solidFill>
-              <a:srgbClr val="FF9EC4"/>
-            </a:solidFill>
-            <a:prstDash val="solid"/>
-          </a:ln>
-        </p:spPr>
-      </p:sp>
-      <p:sp>
-        <p:nvSpPr>
-          <p:cNvPr id="8" name="Deco friend orange"/>
+              <a:srgbClr val="FFB703"/>
+            </a:solidFill>
+            <a:prstDash val="solid"/>
+          </a:ln>
+        </p:spPr>
+      </p:sp>
+      <p:sp>
+        <p:nvSpPr>
+          <p:cNvPr id="8" name="Deco friend right"/>
           <p:cNvSpPr/>
           <p:nvPr/>
         </p:nvSpPr>
@@ -12663,11 +12663,11 @@
             <a:avLst/>
           </a:prstGeom>
           <a:solidFill>
-            <a:srgbClr val="FFB347"/>
+            <a:srgbClr val="7DF9FF"/>
           </a:solidFill>
           <a:ln w="12700">
             <a:solidFill>
-              <a:srgbClr val="FFB347"/>
+              <a:srgbClr val="7DF9FF"/>
             </a:solidFill>
             <a:prstDash val="solid"/>
           </a:ln>
@@ -12688,11 +12688,11 @@
             <a:avLst/>
           </a:prstGeom>
           <a:solidFill>
-            <a:srgbClr val="FFD23F"/>
+            <a:srgbClr val="FFD6F6"/>
           </a:solidFill>
           <a:ln w="12700">
             <a:solidFill>
-              <a:srgbClr val="FFD23F"/>
+              <a:srgbClr val="FFD6F6"/>
             </a:solidFill>
             <a:prstDash val="solid"/>
           </a:ln>
@@ -12713,11 +12713,11 @@
             <a:avLst/>
           </a:prstGeom>
           <a:solidFill>
-            <a:srgbClr val="FFD23F"/>
+            <a:srgbClr val="FFD6F6"/>
           </a:solidFill>
           <a:ln w="12700">
             <a:solidFill>
-              <a:srgbClr val="FFD23F"/>
+              <a:srgbClr val="FFD6F6"/>
             </a:solidFill>
             <a:prstDash val="solid"/>
           </a:ln>
@@ -12738,11 +12738,11 @@
             <a:avLst/>
           </a:prstGeom>
           <a:solidFill>
-            <a:srgbClr val="FF7A90"/>
+            <a:srgbClr val="FF7AA2"/>
           </a:solidFill>
           <a:ln w="12700">
             <a:solidFill>
-              <a:srgbClr val="FF7A90"/>
+              <a:srgbClr val="FF7AA2"/>
             </a:solidFill>
             <a:prstDash val="solid"/>
           </a:ln>
@@ -12840,11 +12840,11 @@
             <a:avLst/>
           </a:prstGeom>
           <a:solidFill>
-            <a:srgbClr val="F2994A"/>
+            <a:srgbClr val="FFC857"/>
           </a:solidFill>
           <a:ln w="12700">
             <a:solidFill>
-              <a:srgbClr val="F2994A"/>
+              <a:srgbClr val="FFC857"/>
             </a:solidFill>
             <a:prstDash val="solid"/>
           </a:ln>
@@ -12865,11 +12865,11 @@
             <a:avLst/>
           </a:prstGeom>
           <a:solidFill>
-            <a:srgbClr val="8E5BD0"/>
+            <a:srgbClr val="7DF9FF"/>
           </a:solidFill>
           <a:ln w="12700">
             <a:solidFill>
-              <a:srgbClr val="8E5BD0"/>
+              <a:srgbClr val="7DF9FF"/>
             </a:solidFill>
             <a:prstDash val="solid"/>
           </a:ln>
@@ -13494,7 +13494,7 @@
     <p:bg>
       <p:bgPr>
         <a:solidFill>
-          <a:srgbClr val="DDF1FF"/>
+          <a:srgbClr val="2B1B3D"/>
         </a:solidFill>
       </p:bgPr>
     </p:bg>
@@ -13527,11 +13527,11 @@
             <a:avLst/>
           </a:prstGeom>
           <a:solidFill>
-            <a:srgbClr val="8ED98F"/>
+            <a:srgbClr val="5C2A6F"/>
           </a:solidFill>
           <a:ln w="12700">
             <a:solidFill>
-              <a:srgbClr val="8ED98F"/>
+              <a:srgbClr val="5C2A6F"/>
             </a:solidFill>
             <a:prstDash val="solid"/>
           </a:ln>
@@ -13552,19 +13552,19 @@
             <a:avLst/>
           </a:prstGeom>
           <a:solidFill>
-            <a:srgbClr val="6CCB7A"/>
+            <a:srgbClr val="7B3A8F"/>
           </a:solidFill>
           <a:ln w="12700">
             <a:solidFill>
-              <a:srgbClr val="6CCB7A"/>
-            </a:solidFill>
-            <a:prstDash val="solid"/>
-          </a:ln>
-        </p:spPr>
-      </p:sp>
-      <p:sp>
-        <p:nvSpPr>
-          <p:cNvPr id="4" name="Deco sun"/>
+              <a:srgbClr val="7B3A8F"/>
+            </a:solidFill>
+            <a:prstDash val="solid"/>
+          </a:ln>
+        </p:spPr>
+      </p:sp>
+      <p:sp>
+        <p:nvSpPr>
+          <p:cNvPr id="4" name="Deco top left"/>
           <p:cNvSpPr/>
           <p:nvPr/>
         </p:nvSpPr>
@@ -13573,15 +13573,15 @@
             <a:off x="320040" y="228600"/>
             <a:ext cx="914400" cy="914400"/>
           </a:xfrm>
-          <a:prstGeom prst="sun">
-            <a:avLst/>
-          </a:prstGeom>
-          <a:solidFill>
-            <a:srgbClr val="FFD23F"/>
+          <a:prstGeom prst="moon">
+            <a:avLst/>
+          </a:prstGeom>
+          <a:solidFill>
+            <a:srgbClr val="FFD6F6"/>
           </a:solidFill>
           <a:ln w="12700">
             <a:solidFill>
-              <a:srgbClr val="FFD23F"/>
+              <a:srgbClr val="FFD6F6"/>
             </a:solidFill>
             <a:prstDash val="solid"/>
           </a:ln>
@@ -13602,11 +13602,11 @@
             <a:avLst/>
           </a:prstGeom>
           <a:solidFill>
-            <a:srgbClr val="FFFFFF"/>
+            <a:srgbClr val="6B4A8F"/>
           </a:solidFill>
           <a:ln w="12700">
             <a:solidFill>
-              <a:srgbClr val="FFFFFF"/>
+              <a:srgbClr val="6B4A8F"/>
             </a:solidFill>
             <a:prstDash val="solid"/>
           </a:ln>
@@ -13627,19 +13627,19 @@
             <a:avLst/>
           </a:prstGeom>
           <a:solidFill>
-            <a:srgbClr val="F2FAFF"/>
+            <a:srgbClr val="553678"/>
           </a:solidFill>
           <a:ln w="12700">
             <a:solidFill>
-              <a:srgbClr val="F2FAFF"/>
-            </a:solidFill>
-            <a:prstDash val="solid"/>
-          </a:ln>
-        </p:spPr>
-      </p:sp>
-      <p:sp>
-        <p:nvSpPr>
-          <p:cNvPr id="7" name="Deco friend pink"/>
+              <a:srgbClr val="553678"/>
+            </a:solidFill>
+            <a:prstDash val="solid"/>
+          </a:ln>
+        </p:spPr>
+      </p:sp>
+      <p:sp>
+        <p:nvSpPr>
+          <p:cNvPr id="7" name="Deco friend left"/>
           <p:cNvSpPr/>
           <p:nvPr/>
         </p:nvSpPr>
@@ -13652,19 +13652,19 @@
             <a:avLst/>
           </a:prstGeom>
           <a:solidFill>
-            <a:srgbClr val="FF9EC4"/>
+            <a:srgbClr val="FFB703"/>
           </a:solidFill>
           <a:ln w="12700">
             <a:solidFill>
-              <a:srgbClr val="FF9EC4"/>
-            </a:solidFill>
-            <a:prstDash val="solid"/>
-          </a:ln>
-        </p:spPr>
-      </p:sp>
-      <p:sp>
-        <p:nvSpPr>
-          <p:cNvPr id="8" name="Deco friend orange"/>
+              <a:srgbClr val="FFB703"/>
+            </a:solidFill>
+            <a:prstDash val="solid"/>
+          </a:ln>
+        </p:spPr>
+      </p:sp>
+      <p:sp>
+        <p:nvSpPr>
+          <p:cNvPr id="8" name="Deco friend right"/>
           <p:cNvSpPr/>
           <p:nvPr/>
         </p:nvSpPr>
@@ -13677,11 +13677,11 @@
             <a:avLst/>
           </a:prstGeom>
           <a:solidFill>
-            <a:srgbClr val="FFB347"/>
+            <a:srgbClr val="7DF9FF"/>
           </a:solidFill>
           <a:ln w="12700">
             <a:solidFill>
-              <a:srgbClr val="FFB347"/>
+              <a:srgbClr val="7DF9FF"/>
             </a:solidFill>
             <a:prstDash val="solid"/>
           </a:ln>
@@ -13702,11 +13702,11 @@
             <a:avLst/>
           </a:prstGeom>
           <a:solidFill>
-            <a:srgbClr val="FFD23F"/>
+            <a:srgbClr val="FFD6F6"/>
           </a:solidFill>
           <a:ln w="12700">
             <a:solidFill>
-              <a:srgbClr val="FFD23F"/>
+              <a:srgbClr val="FFD6F6"/>
             </a:solidFill>
             <a:prstDash val="solid"/>
           </a:ln>
@@ -13727,11 +13727,11 @@
             <a:avLst/>
           </a:prstGeom>
           <a:solidFill>
-            <a:srgbClr val="FFD23F"/>
+            <a:srgbClr val="FFD6F6"/>
           </a:solidFill>
           <a:ln w="12700">
             <a:solidFill>
-              <a:srgbClr val="FFD23F"/>
+              <a:srgbClr val="FFD6F6"/>
             </a:solidFill>
             <a:prstDash val="solid"/>
           </a:ln>
@@ -13752,11 +13752,11 @@
             <a:avLst/>
           </a:prstGeom>
           <a:solidFill>
-            <a:srgbClr val="FF7A90"/>
+            <a:srgbClr val="FF7AA2"/>
           </a:solidFill>
           <a:ln w="12700">
             <a:solidFill>
-              <a:srgbClr val="FF7A90"/>
+              <a:srgbClr val="FF7AA2"/>
             </a:solidFill>
             <a:prstDash val="solid"/>
           </a:ln>
@@ -13854,11 +13854,11 @@
             <a:avLst/>
           </a:prstGeom>
           <a:solidFill>
-            <a:srgbClr val="F2994A"/>
+            <a:srgbClr val="FFC857"/>
           </a:solidFill>
           <a:ln w="12700">
             <a:solidFill>
-              <a:srgbClr val="F2994A"/>
+              <a:srgbClr val="FFC857"/>
             </a:solidFill>
             <a:prstDash val="solid"/>
           </a:ln>
@@ -13879,11 +13879,11 @@
             <a:avLst/>
           </a:prstGeom>
           <a:solidFill>
-            <a:srgbClr val="8E5BD0"/>
+            <a:srgbClr val="7DF9FF"/>
           </a:solidFill>
           <a:ln w="12700">
             <a:solidFill>
-              <a:srgbClr val="8E5BD0"/>
+              <a:srgbClr val="7DF9FF"/>
             </a:solidFill>
             <a:prstDash val="solid"/>
           </a:ln>
@@ -14508,7 +14508,7 @@
     <p:bg>
       <p:bgPr>
         <a:solidFill>
-          <a:srgbClr val="DDF1FF"/>
+          <a:srgbClr val="2B1B3D"/>
         </a:solidFill>
       </p:bgPr>
     </p:bg>
@@ -14541,11 +14541,11 @@
             <a:avLst/>
           </a:prstGeom>
           <a:solidFill>
-            <a:srgbClr val="8ED98F"/>
+            <a:srgbClr val="5C2A6F"/>
           </a:solidFill>
           <a:ln w="12700">
             <a:solidFill>
-              <a:srgbClr val="8ED98F"/>
+              <a:srgbClr val="5C2A6F"/>
             </a:solidFill>
             <a:prstDash val="solid"/>
           </a:ln>
@@ -14566,19 +14566,19 @@
             <a:avLst/>
           </a:prstGeom>
           <a:solidFill>
-            <a:srgbClr val="6CCB7A"/>
+            <a:srgbClr val="7B3A8F"/>
           </a:solidFill>
           <a:ln w="12700">
             <a:solidFill>
-              <a:srgbClr val="6CCB7A"/>
-            </a:solidFill>
-            <a:prstDash val="solid"/>
-          </a:ln>
-        </p:spPr>
-      </p:sp>
-      <p:sp>
-        <p:nvSpPr>
-          <p:cNvPr id="4" name="Deco sun"/>
+              <a:srgbClr val="7B3A8F"/>
+            </a:solidFill>
+            <a:prstDash val="solid"/>
+          </a:ln>
+        </p:spPr>
+      </p:sp>
+      <p:sp>
+        <p:nvSpPr>
+          <p:cNvPr id="4" name="Deco top left"/>
           <p:cNvSpPr/>
           <p:nvPr/>
         </p:nvSpPr>
@@ -14587,15 +14587,15 @@
             <a:off x="320040" y="228600"/>
             <a:ext cx="914400" cy="914400"/>
           </a:xfrm>
-          <a:prstGeom prst="sun">
-            <a:avLst/>
-          </a:prstGeom>
-          <a:solidFill>
-            <a:srgbClr val="FFD23F"/>
+          <a:prstGeom prst="moon">
+            <a:avLst/>
+          </a:prstGeom>
+          <a:solidFill>
+            <a:srgbClr val="FFD6F6"/>
           </a:solidFill>
           <a:ln w="12700">
             <a:solidFill>
-              <a:srgbClr val="FFD23F"/>
+              <a:srgbClr val="FFD6F6"/>
             </a:solidFill>
             <a:prstDash val="solid"/>
           </a:ln>
@@ -14616,11 +14616,11 @@
             <a:avLst/>
           </a:prstGeom>
           <a:solidFill>
-            <a:srgbClr val="FFFFFF"/>
+            <a:srgbClr val="6B4A8F"/>
           </a:solidFill>
           <a:ln w="12700">
             <a:solidFill>
-              <a:srgbClr val="FFFFFF"/>
+              <a:srgbClr val="6B4A8F"/>
             </a:solidFill>
             <a:prstDash val="solid"/>
           </a:ln>
@@ -14641,19 +14641,19 @@
             <a:avLst/>
           </a:prstGeom>
           <a:solidFill>
-            <a:srgbClr val="F2FAFF"/>
+            <a:srgbClr val="553678"/>
           </a:solidFill>
           <a:ln w="12700">
             <a:solidFill>
-              <a:srgbClr val="F2FAFF"/>
-            </a:solidFill>
-            <a:prstDash val="solid"/>
-          </a:ln>
-        </p:spPr>
-      </p:sp>
-      <p:sp>
-        <p:nvSpPr>
-          <p:cNvPr id="7" name="Deco friend pink"/>
+              <a:srgbClr val="553678"/>
+            </a:solidFill>
+            <a:prstDash val="solid"/>
+          </a:ln>
+        </p:spPr>
+      </p:sp>
+      <p:sp>
+        <p:nvSpPr>
+          <p:cNvPr id="7" name="Deco friend left"/>
           <p:cNvSpPr/>
           <p:nvPr/>
         </p:nvSpPr>
@@ -14666,19 +14666,19 @@
             <a:avLst/>
           </a:prstGeom>
           <a:solidFill>
-            <a:srgbClr val="FF9EC4"/>
+            <a:srgbClr val="FFB703"/>
           </a:solidFill>
           <a:ln w="12700">
             <a:solidFill>
-              <a:srgbClr val="FF9EC4"/>
-            </a:solidFill>
-            <a:prstDash val="solid"/>
-          </a:ln>
-        </p:spPr>
-      </p:sp>
-      <p:sp>
-        <p:nvSpPr>
-          <p:cNvPr id="8" name="Deco friend orange"/>
+              <a:srgbClr val="FFB703"/>
+            </a:solidFill>
+            <a:prstDash val="solid"/>
+          </a:ln>
+        </p:spPr>
+      </p:sp>
+      <p:sp>
+        <p:nvSpPr>
+          <p:cNvPr id="8" name="Deco friend right"/>
           <p:cNvSpPr/>
           <p:nvPr/>
         </p:nvSpPr>
@@ -14691,11 +14691,11 @@
             <a:avLst/>
           </a:prstGeom>
           <a:solidFill>
-            <a:srgbClr val="FFB347"/>
+            <a:srgbClr val="7DF9FF"/>
           </a:solidFill>
           <a:ln w="12700">
             <a:solidFill>
-              <a:srgbClr val="FFB347"/>
+              <a:srgbClr val="7DF9FF"/>
             </a:solidFill>
             <a:prstDash val="solid"/>
           </a:ln>
@@ -14716,11 +14716,11 @@
             <a:avLst/>
           </a:prstGeom>
           <a:solidFill>
-            <a:srgbClr val="FFD23F"/>
+            <a:srgbClr val="FFD6F6"/>
           </a:solidFill>
           <a:ln w="12700">
             <a:solidFill>
-              <a:srgbClr val="FFD23F"/>
+              <a:srgbClr val="FFD6F6"/>
             </a:solidFill>
             <a:prstDash val="solid"/>
           </a:ln>
@@ -14741,11 +14741,11 @@
             <a:avLst/>
           </a:prstGeom>
           <a:solidFill>
-            <a:srgbClr val="FFD23F"/>
+            <a:srgbClr val="FFD6F6"/>
           </a:solidFill>
           <a:ln w="12700">
             <a:solidFill>
-              <a:srgbClr val="FFD23F"/>
+              <a:srgbClr val="FFD6F6"/>
             </a:solidFill>
             <a:prstDash val="solid"/>
           </a:ln>
@@ -14766,11 +14766,11 @@
             <a:avLst/>
           </a:prstGeom>
           <a:solidFill>
-            <a:srgbClr val="FF7A90"/>
+            <a:srgbClr val="FF7AA2"/>
           </a:solidFill>
           <a:ln w="12700">
             <a:solidFill>
-              <a:srgbClr val="FF7A90"/>
+              <a:srgbClr val="FF7AA2"/>
             </a:solidFill>
             <a:prstDash val="solid"/>
           </a:ln>
@@ -14868,11 +14868,11 @@
             <a:avLst/>
           </a:prstGeom>
           <a:solidFill>
-            <a:srgbClr val="F2994A"/>
+            <a:srgbClr val="FFC857"/>
           </a:solidFill>
           <a:ln w="12700">
             <a:solidFill>
-              <a:srgbClr val="F2994A"/>
+              <a:srgbClr val="FFC857"/>
             </a:solidFill>
             <a:prstDash val="solid"/>
           </a:ln>
@@ -14893,11 +14893,11 @@
             <a:avLst/>
           </a:prstGeom>
           <a:solidFill>
-            <a:srgbClr val="8E5BD0"/>
+            <a:srgbClr val="7DF9FF"/>
           </a:solidFill>
           <a:ln w="12700">
             <a:solidFill>
-              <a:srgbClr val="8E5BD0"/>
+              <a:srgbClr val="7DF9FF"/>
             </a:solidFill>
             <a:prstDash val="solid"/>
           </a:ln>
@@ -15522,7 +15522,7 @@
     <p:bg>
       <p:bgPr>
         <a:solidFill>
-          <a:srgbClr val="DDF1FF"/>
+          <a:srgbClr val="2B1B3D"/>
         </a:solidFill>
       </p:bgPr>
     </p:bg>
@@ -15555,11 +15555,11 @@
             <a:avLst/>
           </a:prstGeom>
           <a:solidFill>
-            <a:srgbClr val="8ED98F"/>
+            <a:srgbClr val="5C2A6F"/>
           </a:solidFill>
           <a:ln w="12700">
             <a:solidFill>
-              <a:srgbClr val="8ED98F"/>
+              <a:srgbClr val="5C2A6F"/>
             </a:solidFill>
             <a:prstDash val="solid"/>
           </a:ln>
@@ -15580,19 +15580,19 @@
             <a:avLst/>
           </a:prstGeom>
           <a:solidFill>
-            <a:srgbClr val="6CCB7A"/>
+            <a:srgbClr val="7B3A8F"/>
           </a:solidFill>
           <a:ln w="12700">
             <a:solidFill>
-              <a:srgbClr val="6CCB7A"/>
-            </a:solidFill>
-            <a:prstDash val="solid"/>
-          </a:ln>
-        </p:spPr>
-      </p:sp>
-      <p:sp>
-        <p:nvSpPr>
-          <p:cNvPr id="4" name="Deco sun"/>
+              <a:srgbClr val="7B3A8F"/>
+            </a:solidFill>
+            <a:prstDash val="solid"/>
+          </a:ln>
+        </p:spPr>
+      </p:sp>
+      <p:sp>
+        <p:nvSpPr>
+          <p:cNvPr id="4" name="Deco top left"/>
           <p:cNvSpPr/>
           <p:nvPr/>
         </p:nvSpPr>
@@ -15601,15 +15601,15 @@
             <a:off x="320040" y="228600"/>
             <a:ext cx="914400" cy="914400"/>
           </a:xfrm>
-          <a:prstGeom prst="sun">
-            <a:avLst/>
-          </a:prstGeom>
-          <a:solidFill>
-            <a:srgbClr val="FFD23F"/>
+          <a:prstGeom prst="moon">
+            <a:avLst/>
+          </a:prstGeom>
+          <a:solidFill>
+            <a:srgbClr val="FFD6F6"/>
           </a:solidFill>
           <a:ln w="12700">
             <a:solidFill>
-              <a:srgbClr val="FFD23F"/>
+              <a:srgbClr val="FFD6F6"/>
             </a:solidFill>
             <a:prstDash val="solid"/>
           </a:ln>
@@ -15630,11 +15630,11 @@
             <a:avLst/>
           </a:prstGeom>
           <a:solidFill>
-            <a:srgbClr val="FFFFFF"/>
+            <a:srgbClr val="6B4A8F"/>
           </a:solidFill>
           <a:ln w="12700">
             <a:solidFill>
-              <a:srgbClr val="FFFFFF"/>
+              <a:srgbClr val="6B4A8F"/>
             </a:solidFill>
             <a:prstDash val="solid"/>
           </a:ln>
@@ -15655,19 +15655,19 @@
             <a:avLst/>
           </a:prstGeom>
           <a:solidFill>
-            <a:srgbClr val="F2FAFF"/>
+            <a:srgbClr val="553678"/>
           </a:solidFill>
           <a:ln w="12700">
             <a:solidFill>
-              <a:srgbClr val="F2FAFF"/>
-            </a:solidFill>
-            <a:prstDash val="solid"/>
-          </a:ln>
-        </p:spPr>
-      </p:sp>
-      <p:sp>
-        <p:nvSpPr>
-          <p:cNvPr id="7" name="Deco friend pink"/>
+              <a:srgbClr val="553678"/>
+            </a:solidFill>
+            <a:prstDash val="solid"/>
+          </a:ln>
+        </p:spPr>
+      </p:sp>
+      <p:sp>
+        <p:nvSpPr>
+          <p:cNvPr id="7" name="Deco friend left"/>
           <p:cNvSpPr/>
           <p:nvPr/>
         </p:nvSpPr>
@@ -15680,19 +15680,19 @@
             <a:avLst/>
           </a:prstGeom>
           <a:solidFill>
-            <a:srgbClr val="FF9EC4"/>
+            <a:srgbClr val="FFB703"/>
           </a:solidFill>
           <a:ln w="12700">
             <a:solidFill>
-              <a:srgbClr val="FF9EC4"/>
-            </a:solidFill>
-            <a:prstDash val="solid"/>
-          </a:ln>
-        </p:spPr>
-      </p:sp>
-      <p:sp>
-        <p:nvSpPr>
-          <p:cNvPr id="8" name="Deco friend orange"/>
+              <a:srgbClr val="FFB703"/>
+            </a:solidFill>
+            <a:prstDash val="solid"/>
+          </a:ln>
+        </p:spPr>
+      </p:sp>
+      <p:sp>
+        <p:nvSpPr>
+          <p:cNvPr id="8" name="Deco friend right"/>
           <p:cNvSpPr/>
           <p:nvPr/>
         </p:nvSpPr>
@@ -15705,11 +15705,11 @@
             <a:avLst/>
           </a:prstGeom>
           <a:solidFill>
-            <a:srgbClr val="FFB347"/>
+            <a:srgbClr val="7DF9FF"/>
           </a:solidFill>
           <a:ln w="12700">
             <a:solidFill>
-              <a:srgbClr val="FFB347"/>
+              <a:srgbClr val="7DF9FF"/>
             </a:solidFill>
             <a:prstDash val="solid"/>
           </a:ln>
@@ -15730,11 +15730,11 @@
             <a:avLst/>
           </a:prstGeom>
           <a:solidFill>
-            <a:srgbClr val="FFD23F"/>
+            <a:srgbClr val="FFD6F6"/>
           </a:solidFill>
           <a:ln w="12700">
             <a:solidFill>
-              <a:srgbClr val="FFD23F"/>
+              <a:srgbClr val="FFD6F6"/>
             </a:solidFill>
             <a:prstDash val="solid"/>
           </a:ln>
@@ -15755,11 +15755,11 @@
             <a:avLst/>
           </a:prstGeom>
           <a:solidFill>
-            <a:srgbClr val="FFD23F"/>
+            <a:srgbClr val="FFD6F6"/>
           </a:solidFill>
           <a:ln w="12700">
             <a:solidFill>
-              <a:srgbClr val="FFD23F"/>
+              <a:srgbClr val="FFD6F6"/>
             </a:solidFill>
             <a:prstDash val="solid"/>
           </a:ln>
@@ -15780,11 +15780,11 @@
             <a:avLst/>
           </a:prstGeom>
           <a:solidFill>
-            <a:srgbClr val="FF7A90"/>
+            <a:srgbClr val="FF7AA2"/>
           </a:solidFill>
           <a:ln w="12700">
             <a:solidFill>
-              <a:srgbClr val="FF7A90"/>
+              <a:srgbClr val="FF7AA2"/>
             </a:solidFill>
             <a:prstDash val="solid"/>
           </a:ln>
@@ -15882,11 +15882,11 @@
             <a:avLst/>
           </a:prstGeom>
           <a:solidFill>
-            <a:srgbClr val="F2994A"/>
+            <a:srgbClr val="FFC857"/>
           </a:solidFill>
           <a:ln w="12700">
             <a:solidFill>
-              <a:srgbClr val="F2994A"/>
+              <a:srgbClr val="FFC857"/>
             </a:solidFill>
             <a:prstDash val="solid"/>
           </a:ln>
@@ -15907,11 +15907,11 @@
             <a:avLst/>
           </a:prstGeom>
           <a:solidFill>
-            <a:srgbClr val="8E5BD0"/>
+            <a:srgbClr val="7DF9FF"/>
           </a:solidFill>
           <a:ln w="12700">
             <a:solidFill>
-              <a:srgbClr val="8E5BD0"/>
+              <a:srgbClr val="7DF9FF"/>
             </a:solidFill>
             <a:prstDash val="solid"/>
           </a:ln>
@@ -16536,7 +16536,7 @@
     <p:bg>
       <p:bgPr>
         <a:solidFill>
-          <a:srgbClr val="DDF1FF"/>
+          <a:srgbClr val="2B1B3D"/>
         </a:solidFill>
       </p:bgPr>
     </p:bg>
@@ -16569,11 +16569,11 @@
             <a:avLst/>
           </a:prstGeom>
           <a:solidFill>
-            <a:srgbClr val="8ED98F"/>
+            <a:srgbClr val="5C2A6F"/>
           </a:solidFill>
           <a:ln w="12700">
             <a:solidFill>
-              <a:srgbClr val="8ED98F"/>
+              <a:srgbClr val="5C2A6F"/>
             </a:solidFill>
             <a:prstDash val="solid"/>
           </a:ln>
@@ -16594,19 +16594,19 @@
             <a:avLst/>
           </a:prstGeom>
           <a:solidFill>
-            <a:srgbClr val="6CCB7A"/>
+            <a:srgbClr val="7B3A8F"/>
           </a:solidFill>
           <a:ln w="12700">
             <a:solidFill>
-              <a:srgbClr val="6CCB7A"/>
-            </a:solidFill>
-            <a:prstDash val="solid"/>
-          </a:ln>
-        </p:spPr>
-      </p:sp>
-      <p:sp>
-        <p:nvSpPr>
-          <p:cNvPr id="4" name="Deco sun"/>
+              <a:srgbClr val="7B3A8F"/>
+            </a:solidFill>
+            <a:prstDash val="solid"/>
+          </a:ln>
+        </p:spPr>
+      </p:sp>
+      <p:sp>
+        <p:nvSpPr>
+          <p:cNvPr id="4" name="Deco top left"/>
           <p:cNvSpPr/>
           <p:nvPr/>
         </p:nvSpPr>
@@ -16615,15 +16615,15 @@
             <a:off x="320040" y="228600"/>
             <a:ext cx="914400" cy="914400"/>
           </a:xfrm>
-          <a:prstGeom prst="sun">
-            <a:avLst/>
-          </a:prstGeom>
-          <a:solidFill>
-            <a:srgbClr val="FFD23F"/>
+          <a:prstGeom prst="moon">
+            <a:avLst/>
+          </a:prstGeom>
+          <a:solidFill>
+            <a:srgbClr val="FFD6F6"/>
           </a:solidFill>
           <a:ln w="12700">
             <a:solidFill>
-              <a:srgbClr val="FFD23F"/>
+              <a:srgbClr val="FFD6F6"/>
             </a:solidFill>
             <a:prstDash val="solid"/>
           </a:ln>
@@ -16644,11 +16644,11 @@
             <a:avLst/>
           </a:prstGeom>
           <a:solidFill>
-            <a:srgbClr val="FFFFFF"/>
+            <a:srgbClr val="6B4A8F"/>
           </a:solidFill>
           <a:ln w="12700">
             <a:solidFill>
-              <a:srgbClr val="FFFFFF"/>
+              <a:srgbClr val="6B4A8F"/>
             </a:solidFill>
             <a:prstDash val="solid"/>
           </a:ln>
@@ -16669,19 +16669,19 @@
             <a:avLst/>
           </a:prstGeom>
           <a:solidFill>
-            <a:srgbClr val="F2FAFF"/>
+            <a:srgbClr val="553678"/>
           </a:solidFill>
           <a:ln w="12700">
             <a:solidFill>
-              <a:srgbClr val="F2FAFF"/>
-            </a:solidFill>
-            <a:prstDash val="solid"/>
-          </a:ln>
-        </p:spPr>
-      </p:sp>
-      <p:sp>
-        <p:nvSpPr>
-          <p:cNvPr id="7" name="Deco friend pink"/>
+              <a:srgbClr val="553678"/>
+            </a:solidFill>
+            <a:prstDash val="solid"/>
+          </a:ln>
+        </p:spPr>
+      </p:sp>
+      <p:sp>
+        <p:nvSpPr>
+          <p:cNvPr id="7" name="Deco friend left"/>
           <p:cNvSpPr/>
           <p:nvPr/>
         </p:nvSpPr>
@@ -16694,19 +16694,19 @@
             <a:avLst/>
           </a:prstGeom>
           <a:solidFill>
-            <a:srgbClr val="FF9EC4"/>
+            <a:srgbClr val="FFB703"/>
           </a:solidFill>
           <a:ln w="12700">
             <a:solidFill>
-              <a:srgbClr val="FF9EC4"/>
-            </a:solidFill>
-            <a:prstDash val="solid"/>
-          </a:ln>
-        </p:spPr>
-      </p:sp>
-      <p:sp>
-        <p:nvSpPr>
-          <p:cNvPr id="8" name="Deco friend orange"/>
+              <a:srgbClr val="FFB703"/>
+            </a:solidFill>
+            <a:prstDash val="solid"/>
+          </a:ln>
+        </p:spPr>
+      </p:sp>
+      <p:sp>
+        <p:nvSpPr>
+          <p:cNvPr id="8" name="Deco friend right"/>
           <p:cNvSpPr/>
           <p:nvPr/>
         </p:nvSpPr>
@@ -16719,11 +16719,11 @@
             <a:avLst/>
           </a:prstGeom>
           <a:solidFill>
-            <a:srgbClr val="FFB347"/>
+            <a:srgbClr val="7DF9FF"/>
           </a:solidFill>
           <a:ln w="12700">
             <a:solidFill>
-              <a:srgbClr val="FFB347"/>
+              <a:srgbClr val="7DF9FF"/>
             </a:solidFill>
             <a:prstDash val="solid"/>
           </a:ln>
@@ -16744,11 +16744,11 @@
             <a:avLst/>
           </a:prstGeom>
           <a:solidFill>
-            <a:srgbClr val="FFD23F"/>
+            <a:srgbClr val="FFD6F6"/>
           </a:solidFill>
           <a:ln w="12700">
             <a:solidFill>
-              <a:srgbClr val="FFD23F"/>
+              <a:srgbClr val="FFD6F6"/>
             </a:solidFill>
             <a:prstDash val="solid"/>
           </a:ln>
@@ -16769,11 +16769,11 @@
             <a:avLst/>
           </a:prstGeom>
           <a:solidFill>
-            <a:srgbClr val="FFD23F"/>
+            <a:srgbClr val="FFD6F6"/>
           </a:solidFill>
           <a:ln w="12700">
             <a:solidFill>
-              <a:srgbClr val="FFD23F"/>
+              <a:srgbClr val="FFD6F6"/>
             </a:solidFill>
             <a:prstDash val="solid"/>
           </a:ln>
@@ -16794,11 +16794,11 @@
             <a:avLst/>
           </a:prstGeom>
           <a:solidFill>
-            <a:srgbClr val="FF7A90"/>
+            <a:srgbClr val="FF7AA2"/>
           </a:solidFill>
           <a:ln w="12700">
             <a:solidFill>
-              <a:srgbClr val="FF7A90"/>
+              <a:srgbClr val="FF7AA2"/>
             </a:solidFill>
             <a:prstDash val="solid"/>
           </a:ln>
@@ -16896,11 +16896,11 @@
             <a:avLst/>
           </a:prstGeom>
           <a:solidFill>
-            <a:srgbClr val="F2994A"/>
+            <a:srgbClr val="FFC857"/>
           </a:solidFill>
           <a:ln w="12700">
             <a:solidFill>
-              <a:srgbClr val="F2994A"/>
+              <a:srgbClr val="FFC857"/>
             </a:solidFill>
             <a:prstDash val="solid"/>
           </a:ln>
@@ -16921,11 +16921,11 @@
             <a:avLst/>
           </a:prstGeom>
           <a:solidFill>
-            <a:srgbClr val="8E5BD0"/>
+            <a:srgbClr val="7DF9FF"/>
           </a:solidFill>
           <a:ln w="12700">
             <a:solidFill>
-              <a:srgbClr val="8E5BD0"/>
+              <a:srgbClr val="7DF9FF"/>
             </a:solidFill>
             <a:prstDash val="solid"/>
           </a:ln>
@@ -17550,7 +17550,7 @@
     <p:bg>
       <p:bgPr>
         <a:solidFill>
-          <a:srgbClr val="DDF1FF"/>
+          <a:srgbClr val="2B1B3D"/>
         </a:solidFill>
       </p:bgPr>
     </p:bg>
@@ -17583,11 +17583,11 @@
             <a:avLst/>
           </a:prstGeom>
           <a:solidFill>
-            <a:srgbClr val="8ED98F"/>
+            <a:srgbClr val="5C2A6F"/>
           </a:solidFill>
           <a:ln w="12700">
             <a:solidFill>
-              <a:srgbClr val="8ED98F"/>
+              <a:srgbClr val="5C2A6F"/>
             </a:solidFill>
             <a:prstDash val="solid"/>
           </a:ln>
@@ -17608,19 +17608,19 @@
             <a:avLst/>
           </a:prstGeom>
           <a:solidFill>
-            <a:srgbClr val="6CCB7A"/>
+            <a:srgbClr val="7B3A8F"/>
           </a:solidFill>
           <a:ln w="12700">
             <a:solidFill>
-              <a:srgbClr val="6CCB7A"/>
-            </a:solidFill>
-            <a:prstDash val="solid"/>
-          </a:ln>
-        </p:spPr>
-      </p:sp>
-      <p:sp>
-        <p:nvSpPr>
-          <p:cNvPr id="4" name="Deco sun"/>
+              <a:srgbClr val="7B3A8F"/>
+            </a:solidFill>
+            <a:prstDash val="solid"/>
+          </a:ln>
+        </p:spPr>
+      </p:sp>
+      <p:sp>
+        <p:nvSpPr>
+          <p:cNvPr id="4" name="Deco top left"/>
           <p:cNvSpPr/>
           <p:nvPr/>
         </p:nvSpPr>
@@ -17629,15 +17629,15 @@
             <a:off x="320040" y="228600"/>
             <a:ext cx="914400" cy="914400"/>
           </a:xfrm>
-          <a:prstGeom prst="sun">
-            <a:avLst/>
-          </a:prstGeom>
-          <a:solidFill>
-            <a:srgbClr val="FFD23F"/>
+          <a:prstGeom prst="moon">
+            <a:avLst/>
+          </a:prstGeom>
+          <a:solidFill>
+            <a:srgbClr val="FFD6F6"/>
           </a:solidFill>
           <a:ln w="12700">
             <a:solidFill>
-              <a:srgbClr val="FFD23F"/>
+              <a:srgbClr val="FFD6F6"/>
             </a:solidFill>
             <a:prstDash val="solid"/>
           </a:ln>
@@ -17658,11 +17658,11 @@
             <a:avLst/>
           </a:prstGeom>
           <a:solidFill>
-            <a:srgbClr val="FFFFFF"/>
+            <a:srgbClr val="6B4A8F"/>
           </a:solidFill>
           <a:ln w="12700">
             <a:solidFill>
-              <a:srgbClr val="FFFFFF"/>
+              <a:srgbClr val="6B4A8F"/>
             </a:solidFill>
             <a:prstDash val="solid"/>
           </a:ln>
@@ -17683,19 +17683,19 @@
             <a:avLst/>
           </a:prstGeom>
           <a:solidFill>
-            <a:srgbClr val="F2FAFF"/>
+            <a:srgbClr val="553678"/>
           </a:solidFill>
           <a:ln w="12700">
             <a:solidFill>
-              <a:srgbClr val="F2FAFF"/>
-            </a:solidFill>
-            <a:prstDash val="solid"/>
-          </a:ln>
-        </p:spPr>
-      </p:sp>
-      <p:sp>
-        <p:nvSpPr>
-          <p:cNvPr id="7" name="Deco friend pink"/>
+              <a:srgbClr val="553678"/>
+            </a:solidFill>
+            <a:prstDash val="solid"/>
+          </a:ln>
+        </p:spPr>
+      </p:sp>
+      <p:sp>
+        <p:nvSpPr>
+          <p:cNvPr id="7" name="Deco friend left"/>
           <p:cNvSpPr/>
           <p:nvPr/>
         </p:nvSpPr>
@@ -17708,19 +17708,19 @@
             <a:avLst/>
           </a:prstGeom>
           <a:solidFill>
-            <a:srgbClr val="FF9EC4"/>
+            <a:srgbClr val="FFB703"/>
           </a:solidFill>
           <a:ln w="12700">
             <a:solidFill>
-              <a:srgbClr val="FF9EC4"/>
-            </a:solidFill>
-            <a:prstDash val="solid"/>
-          </a:ln>
-        </p:spPr>
-      </p:sp>
-      <p:sp>
-        <p:nvSpPr>
-          <p:cNvPr id="8" name="Deco friend orange"/>
+              <a:srgbClr val="FFB703"/>
+            </a:solidFill>
+            <a:prstDash val="solid"/>
+          </a:ln>
+        </p:spPr>
+      </p:sp>
+      <p:sp>
+        <p:nvSpPr>
+          <p:cNvPr id="8" name="Deco friend right"/>
           <p:cNvSpPr/>
           <p:nvPr/>
         </p:nvSpPr>
@@ -17733,11 +17733,11 @@
             <a:avLst/>
           </a:prstGeom>
           <a:solidFill>
-            <a:srgbClr val="FFB347"/>
+            <a:srgbClr val="7DF9FF"/>
           </a:solidFill>
           <a:ln w="12700">
             <a:solidFill>
-              <a:srgbClr val="FFB347"/>
+              <a:srgbClr val="7DF9FF"/>
             </a:solidFill>
             <a:prstDash val="solid"/>
           </a:ln>
@@ -17758,11 +17758,11 @@
             <a:avLst/>
           </a:prstGeom>
           <a:solidFill>
-            <a:srgbClr val="FFD23F"/>
+            <a:srgbClr val="FFD6F6"/>
           </a:solidFill>
           <a:ln w="12700">
             <a:solidFill>
-              <a:srgbClr val="FFD23F"/>
+              <a:srgbClr val="FFD6F6"/>
             </a:solidFill>
             <a:prstDash val="solid"/>
           </a:ln>
@@ -17783,11 +17783,11 @@
             <a:avLst/>
           </a:prstGeom>
           <a:solidFill>
-            <a:srgbClr val="FFD23F"/>
+            <a:srgbClr val="FFD6F6"/>
           </a:solidFill>
           <a:ln w="12700">
             <a:solidFill>
-              <a:srgbClr val="FFD23F"/>
+              <a:srgbClr val="FFD6F6"/>
             </a:solidFill>
             <a:prstDash val="solid"/>
           </a:ln>
@@ -17808,11 +17808,11 @@
             <a:avLst/>
           </a:prstGeom>
           <a:solidFill>
-            <a:srgbClr val="FF7A90"/>
+            <a:srgbClr val="FF7AA2"/>
           </a:solidFill>
           <a:ln w="12700">
             <a:solidFill>
-              <a:srgbClr val="FF7A90"/>
+              <a:srgbClr val="FF7AA2"/>
             </a:solidFill>
             <a:prstDash val="solid"/>
           </a:ln>
@@ -17935,11 +17935,11 @@
             <a:avLst/>
           </a:prstGeom>
           <a:solidFill>
-            <a:srgbClr val="F2994A"/>
+            <a:srgbClr val="FFC857"/>
           </a:solidFill>
           <a:ln w="12700">
             <a:solidFill>
-              <a:srgbClr val="F2994A"/>
+              <a:srgbClr val="FFC857"/>
             </a:solidFill>
             <a:prstDash val="solid"/>
           </a:ln>
@@ -17960,11 +17960,11 @@
             <a:avLst/>
           </a:prstGeom>
           <a:solidFill>
-            <a:srgbClr val="F2994A"/>
+            <a:srgbClr val="FFC857"/>
           </a:solidFill>
           <a:ln w="12700">
             <a:solidFill>
-              <a:srgbClr val="F2994A"/>
+              <a:srgbClr val="FFC857"/>
             </a:solidFill>
             <a:prstDash val="solid"/>
           </a:ln>
@@ -17985,11 +17985,11 @@
             <a:avLst/>
           </a:prstGeom>
           <a:solidFill>
-            <a:srgbClr val="8E5BD0"/>
+            <a:srgbClr val="7DF9FF"/>
           </a:solidFill>
           <a:ln w="12700">
             <a:solidFill>
-              <a:srgbClr val="8E5BD0"/>
+              <a:srgbClr val="7DF9FF"/>
             </a:solidFill>
             <a:prstDash val="solid"/>
           </a:ln>

--- a/all-letters/16-waw.pptx
+++ b/all-letters/16-waw.pptx
@@ -3154,6 +3154,25 @@
                                         </p:tgtEl>
                                       </p:cBhvr>
                                     </p:animEffect>
+                                    <p:audio>
+                                      <p:cMediaNode vol="80000">
+                                        <p:cTn id="1001" display="0">
+                                          <p:stCondLst>
+                                            <p:cond delay="0"/>
+                                          </p:stCondLst>
+                                          <p:endCondLst>
+                                            <p:cond evt="onStopAudio" delay="0">
+                                              <p:tgtEl>
+                                                <p:sldTgt/>
+                                              </p:tgtEl>
+                                            </p:cond>
+                                          </p:endCondLst>
+                                        </p:cTn>
+                                        <p:tgtEl>
+                                          <p:sndTgt r:embed="rIdSnd1" name="pop.wav"/>
+                                        </p:tgtEl>
+                                      </p:cMediaNode>
+                                    </p:audio>
                                   </p:childTnLst>
                                 </p:cTn>
                               </p:par>
@@ -3207,6 +3226,25 @@
                                         </p:tgtEl>
                                       </p:cBhvr>
                                     </p:animEffect>
+                                    <p:audio>
+                                      <p:cMediaNode vol="80000">
+                                        <p:cTn id="1002" display="0">
+                                          <p:stCondLst>
+                                            <p:cond delay="0"/>
+                                          </p:stCondLst>
+                                          <p:endCondLst>
+                                            <p:cond evt="onStopAudio" delay="0">
+                                              <p:tgtEl>
+                                                <p:sldTgt/>
+                                              </p:tgtEl>
+                                            </p:cond>
+                                          </p:endCondLst>
+                                        </p:cTn>
+                                        <p:tgtEl>
+                                          <p:sndTgt r:embed="rIdSnd2" name="ding.wav"/>
+                                        </p:tgtEl>
+                                      </p:cMediaNode>
+                                    </p:audio>
                                   </p:childTnLst>
                                 </p:cTn>
                               </p:par>
@@ -4026,6 +4064,25 @@
                                         </p:tgtEl>
                                       </p:cBhvr>
                                     </p:animEffect>
+                                    <p:audio>
+                                      <p:cMediaNode vol="80000">
+                                        <p:cTn id="1001" display="0">
+                                          <p:stCondLst>
+                                            <p:cond delay="0"/>
+                                          </p:stCondLst>
+                                          <p:endCondLst>
+                                            <p:cond evt="onStopAudio" delay="0">
+                                              <p:tgtEl>
+                                                <p:sldTgt/>
+                                              </p:tgtEl>
+                                            </p:cond>
+                                          </p:endCondLst>
+                                        </p:cTn>
+                                        <p:tgtEl>
+                                          <p:sndTgt r:embed="rIdSnd1" name="pop.wav"/>
+                                        </p:tgtEl>
+                                      </p:cMediaNode>
+                                    </p:audio>
                                   </p:childTnLst>
                                 </p:cTn>
                               </p:par>
@@ -4079,6 +4136,25 @@
                                         </p:tgtEl>
                                       </p:cBhvr>
                                     </p:animEffect>
+                                    <p:audio>
+                                      <p:cMediaNode vol="80000">
+                                        <p:cTn id="1002" display="0">
+                                          <p:stCondLst>
+                                            <p:cond delay="0"/>
+                                          </p:stCondLst>
+                                          <p:endCondLst>
+                                            <p:cond evt="onStopAudio" delay="0">
+                                              <p:tgtEl>
+                                                <p:sldTgt/>
+                                              </p:tgtEl>
+                                            </p:cond>
+                                          </p:endCondLst>
+                                        </p:cTn>
+                                        <p:tgtEl>
+                                          <p:sndTgt r:embed="rIdSnd2" name="ding.wav"/>
+                                        </p:tgtEl>
+                                      </p:cMediaNode>
+                                    </p:audio>
                                   </p:childTnLst>
                                 </p:cTn>
                               </p:par>
@@ -4132,6 +4208,25 @@
                                         </p:tgtEl>
                                       </p:cBhvr>
                                     </p:animEffect>
+                                    <p:audio>
+                                      <p:cMediaNode vol="80000">
+                                        <p:cTn id="1003" display="0">
+                                          <p:stCondLst>
+                                            <p:cond delay="0"/>
+                                          </p:stCondLst>
+                                          <p:endCondLst>
+                                            <p:cond evt="onStopAudio" delay="0">
+                                              <p:tgtEl>
+                                                <p:sldTgt/>
+                                              </p:tgtEl>
+                                            </p:cond>
+                                          </p:endCondLst>
+                                        </p:cTn>
+                                        <p:tgtEl>
+                                          <p:sndTgt r:embed="rIdSnd3" name="tick.wav"/>
+                                        </p:tgtEl>
+                                      </p:cMediaNode>
+                                    </p:audio>
                                   </p:childTnLst>
                                 </p:cTn>
                               </p:par>
@@ -4185,6 +4280,25 @@
                                         </p:tgtEl>
                                       </p:cBhvr>
                                     </p:animEffect>
+                                    <p:audio>
+                                      <p:cMediaNode vol="80000">
+                                        <p:cTn id="1004" display="0">
+                                          <p:stCondLst>
+                                            <p:cond delay="0"/>
+                                          </p:stCondLst>
+                                          <p:endCondLst>
+                                            <p:cond evt="onStopAudio" delay="0">
+                                              <p:tgtEl>
+                                                <p:sldTgt/>
+                                              </p:tgtEl>
+                                            </p:cond>
+                                          </p:endCondLst>
+                                        </p:cTn>
+                                        <p:tgtEl>
+                                          <p:sndTgt r:embed="rIdSnd1" name="pop.wav"/>
+                                        </p:tgtEl>
+                                      </p:cMediaNode>
+                                    </p:audio>
                                   </p:childTnLst>
                                 </p:cTn>
                               </p:par>
@@ -4238,6 +4352,25 @@
                                         </p:tgtEl>
                                       </p:cBhvr>
                                     </p:animEffect>
+                                    <p:audio>
+                                      <p:cMediaNode vol="80000">
+                                        <p:cTn id="1005" display="0">
+                                          <p:stCondLst>
+                                            <p:cond delay="0"/>
+                                          </p:stCondLst>
+                                          <p:endCondLst>
+                                            <p:cond evt="onStopAudio" delay="0">
+                                              <p:tgtEl>
+                                                <p:sldTgt/>
+                                              </p:tgtEl>
+                                            </p:cond>
+                                          </p:endCondLst>
+                                        </p:cTn>
+                                        <p:tgtEl>
+                                          <p:sndTgt r:embed="rIdSnd2" name="ding.wav"/>
+                                        </p:tgtEl>
+                                      </p:cMediaNode>
+                                    </p:audio>
                                   </p:childTnLst>
                                 </p:cTn>
                               </p:par>
@@ -4291,6 +4424,25 @@
                                         </p:tgtEl>
                                       </p:cBhvr>
                                     </p:animEffect>
+                                    <p:audio>
+                                      <p:cMediaNode vol="80000">
+                                        <p:cTn id="1006" display="0">
+                                          <p:stCondLst>
+                                            <p:cond delay="0"/>
+                                          </p:stCondLst>
+                                          <p:endCondLst>
+                                            <p:cond evt="onStopAudio" delay="0">
+                                              <p:tgtEl>
+                                                <p:sldTgt/>
+                                              </p:tgtEl>
+                                            </p:cond>
+                                          </p:endCondLst>
+                                        </p:cTn>
+                                        <p:tgtEl>
+                                          <p:sndTgt r:embed="rIdSnd3" name="tick.wav"/>
+                                        </p:tgtEl>
+                                      </p:cMediaNode>
+                                    </p:audio>
                                   </p:childTnLst>
                                 </p:cTn>
                               </p:par>
@@ -4344,6 +4496,25 @@
                                         </p:tgtEl>
                                       </p:cBhvr>
                                     </p:animEffect>
+                                    <p:audio>
+                                      <p:cMediaNode vol="80000">
+                                        <p:cTn id="1007" display="0">
+                                          <p:stCondLst>
+                                            <p:cond delay="0"/>
+                                          </p:stCondLst>
+                                          <p:endCondLst>
+                                            <p:cond evt="onStopAudio" delay="0">
+                                              <p:tgtEl>
+                                                <p:sldTgt/>
+                                              </p:tgtEl>
+                                            </p:cond>
+                                          </p:endCondLst>
+                                        </p:cTn>
+                                        <p:tgtEl>
+                                          <p:sndTgt r:embed="rIdSnd1" name="pop.wav"/>
+                                        </p:tgtEl>
+                                      </p:cMediaNode>
+                                    </p:audio>
                                   </p:childTnLst>
                                 </p:cTn>
                               </p:par>
@@ -4397,6 +4568,25 @@
                                         </p:tgtEl>
                                       </p:cBhvr>
                                     </p:animEffect>
+                                    <p:audio>
+                                      <p:cMediaNode vol="80000">
+                                        <p:cTn id="1008" display="0">
+                                          <p:stCondLst>
+                                            <p:cond delay="0"/>
+                                          </p:stCondLst>
+                                          <p:endCondLst>
+                                            <p:cond evt="onStopAudio" delay="0">
+                                              <p:tgtEl>
+                                                <p:sldTgt/>
+                                              </p:tgtEl>
+                                            </p:cond>
+                                          </p:endCondLst>
+                                        </p:cTn>
+                                        <p:tgtEl>
+                                          <p:sndTgt r:embed="rIdSnd2" name="ding.wav"/>
+                                        </p:tgtEl>
+                                      </p:cMediaNode>
+                                    </p:audio>
                                   </p:childTnLst>
                                 </p:cTn>
                               </p:par>
@@ -4450,6 +4640,25 @@
                                         </p:tgtEl>
                                       </p:cBhvr>
                                     </p:animEffect>
+                                    <p:audio>
+                                      <p:cMediaNode vol="80000">
+                                        <p:cTn id="1009" display="0">
+                                          <p:stCondLst>
+                                            <p:cond delay="0"/>
+                                          </p:stCondLst>
+                                          <p:endCondLst>
+                                            <p:cond evt="onStopAudio" delay="0">
+                                              <p:tgtEl>
+                                                <p:sldTgt/>
+                                              </p:tgtEl>
+                                            </p:cond>
+                                          </p:endCondLst>
+                                        </p:cTn>
+                                        <p:tgtEl>
+                                          <p:sndTgt r:embed="rIdSnd3" name="tick.wav"/>
+                                        </p:tgtEl>
+                                      </p:cMediaNode>
+                                    </p:audio>
                                   </p:childTnLst>
                                 </p:cTn>
                               </p:par>
@@ -4503,6 +4712,25 @@
                                         </p:tgtEl>
                                       </p:cBhvr>
                                     </p:animEffect>
+                                    <p:audio>
+                                      <p:cMediaNode vol="80000">
+                                        <p:cTn id="1010" display="0">
+                                          <p:stCondLst>
+                                            <p:cond delay="0"/>
+                                          </p:stCondLst>
+                                          <p:endCondLst>
+                                            <p:cond evt="onStopAudio" delay="0">
+                                              <p:tgtEl>
+                                                <p:sldTgt/>
+                                              </p:tgtEl>
+                                            </p:cond>
+                                          </p:endCondLst>
+                                        </p:cTn>
+                                        <p:tgtEl>
+                                          <p:sndTgt r:embed="rIdSnd4" name="win.wav"/>
+                                        </p:tgtEl>
+                                      </p:cMediaNode>
+                                    </p:audio>
                                   </p:childTnLst>
                                 </p:cTn>
                               </p:par>
@@ -5330,6 +5558,25 @@
                                         </p:tgtEl>
                                       </p:cBhvr>
                                     </p:animEffect>
+                                    <p:audio>
+                                      <p:cMediaNode vol="80000">
+                                        <p:cTn id="1001" display="0">
+                                          <p:stCondLst>
+                                            <p:cond delay="0"/>
+                                          </p:stCondLst>
+                                          <p:endCondLst>
+                                            <p:cond evt="onStopAudio" delay="0">
+                                              <p:tgtEl>
+                                                <p:sldTgt/>
+                                              </p:tgtEl>
+                                            </p:cond>
+                                          </p:endCondLst>
+                                        </p:cTn>
+                                        <p:tgtEl>
+                                          <p:sndTgt r:embed="rIdSnd1" name="pop.wav"/>
+                                        </p:tgtEl>
+                                      </p:cMediaNode>
+                                    </p:audio>
                                   </p:childTnLst>
                                 </p:cTn>
                               </p:par>
@@ -5383,6 +5630,25 @@
                                         </p:tgtEl>
                                       </p:cBhvr>
                                     </p:animEffect>
+                                    <p:audio>
+                                      <p:cMediaNode vol="80000">
+                                        <p:cTn id="1002" display="0">
+                                          <p:stCondLst>
+                                            <p:cond delay="0"/>
+                                          </p:stCondLst>
+                                          <p:endCondLst>
+                                            <p:cond evt="onStopAudio" delay="0">
+                                              <p:tgtEl>
+                                                <p:sldTgt/>
+                                              </p:tgtEl>
+                                            </p:cond>
+                                          </p:endCondLst>
+                                        </p:cTn>
+                                        <p:tgtEl>
+                                          <p:sndTgt r:embed="rIdSnd2" name="ding.wav"/>
+                                        </p:tgtEl>
+                                      </p:cMediaNode>
+                                    </p:audio>
                                   </p:childTnLst>
                                 </p:cTn>
                               </p:par>
@@ -5436,6 +5702,25 @@
                                         </p:tgtEl>
                                       </p:cBhvr>
                                     </p:animEffect>
+                                    <p:audio>
+                                      <p:cMediaNode vol="80000">
+                                        <p:cTn id="1003" display="0">
+                                          <p:stCondLst>
+                                            <p:cond delay="0"/>
+                                          </p:stCondLst>
+                                          <p:endCondLst>
+                                            <p:cond evt="onStopAudio" delay="0">
+                                              <p:tgtEl>
+                                                <p:sldTgt/>
+                                              </p:tgtEl>
+                                            </p:cond>
+                                          </p:endCondLst>
+                                        </p:cTn>
+                                        <p:tgtEl>
+                                          <p:sndTgt r:embed="rIdSnd3" name="tick.wav"/>
+                                        </p:tgtEl>
+                                      </p:cMediaNode>
+                                    </p:audio>
                                   </p:childTnLst>
                                 </p:cTn>
                               </p:par>
@@ -5489,6 +5774,25 @@
                                         </p:tgtEl>
                                       </p:cBhvr>
                                     </p:animEffect>
+                                    <p:audio>
+                                      <p:cMediaNode vol="80000">
+                                        <p:cTn id="1004" display="0">
+                                          <p:stCondLst>
+                                            <p:cond delay="0"/>
+                                          </p:stCondLst>
+                                          <p:endCondLst>
+                                            <p:cond evt="onStopAudio" delay="0">
+                                              <p:tgtEl>
+                                                <p:sldTgt/>
+                                              </p:tgtEl>
+                                            </p:cond>
+                                          </p:endCondLst>
+                                        </p:cTn>
+                                        <p:tgtEl>
+                                          <p:sndTgt r:embed="rIdSnd1" name="pop.wav"/>
+                                        </p:tgtEl>
+                                      </p:cMediaNode>
+                                    </p:audio>
                                   </p:childTnLst>
                                 </p:cTn>
                               </p:par>
@@ -5542,6 +5846,25 @@
                                         </p:tgtEl>
                                       </p:cBhvr>
                                     </p:animEffect>
+                                    <p:audio>
+                                      <p:cMediaNode vol="80000">
+                                        <p:cTn id="1005" display="0">
+                                          <p:stCondLst>
+                                            <p:cond delay="0"/>
+                                          </p:stCondLst>
+                                          <p:endCondLst>
+                                            <p:cond evt="onStopAudio" delay="0">
+                                              <p:tgtEl>
+                                                <p:sldTgt/>
+                                              </p:tgtEl>
+                                            </p:cond>
+                                          </p:endCondLst>
+                                        </p:cTn>
+                                        <p:tgtEl>
+                                          <p:sndTgt r:embed="rIdSnd2" name="ding.wav"/>
+                                        </p:tgtEl>
+                                      </p:cMediaNode>
+                                    </p:audio>
                                   </p:childTnLst>
                                 </p:cTn>
                               </p:par>
@@ -5595,6 +5918,25 @@
                                         </p:tgtEl>
                                       </p:cBhvr>
                                     </p:animEffect>
+                                    <p:audio>
+                                      <p:cMediaNode vol="80000">
+                                        <p:cTn id="1006" display="0">
+                                          <p:stCondLst>
+                                            <p:cond delay="0"/>
+                                          </p:stCondLst>
+                                          <p:endCondLst>
+                                            <p:cond evt="onStopAudio" delay="0">
+                                              <p:tgtEl>
+                                                <p:sldTgt/>
+                                              </p:tgtEl>
+                                            </p:cond>
+                                          </p:endCondLst>
+                                        </p:cTn>
+                                        <p:tgtEl>
+                                          <p:sndTgt r:embed="rIdSnd3" name="tick.wav"/>
+                                        </p:tgtEl>
+                                      </p:cMediaNode>
+                                    </p:audio>
                                   </p:childTnLst>
                                 </p:cTn>
                               </p:par>
@@ -5648,6 +5990,25 @@
                                         </p:tgtEl>
                                       </p:cBhvr>
                                     </p:animEffect>
+                                    <p:audio>
+                                      <p:cMediaNode vol="80000">
+                                        <p:cTn id="1007" display="0">
+                                          <p:stCondLst>
+                                            <p:cond delay="0"/>
+                                          </p:stCondLst>
+                                          <p:endCondLst>
+                                            <p:cond evt="onStopAudio" delay="0">
+                                              <p:tgtEl>
+                                                <p:sldTgt/>
+                                              </p:tgtEl>
+                                            </p:cond>
+                                          </p:endCondLst>
+                                        </p:cTn>
+                                        <p:tgtEl>
+                                          <p:sndTgt r:embed="rIdSnd1" name="pop.wav"/>
+                                        </p:tgtEl>
+                                      </p:cMediaNode>
+                                    </p:audio>
                                   </p:childTnLst>
                                 </p:cTn>
                               </p:par>
@@ -5701,6 +6062,25 @@
                                         </p:tgtEl>
                                       </p:cBhvr>
                                     </p:animEffect>
+                                    <p:audio>
+                                      <p:cMediaNode vol="80000">
+                                        <p:cTn id="1008" display="0">
+                                          <p:stCondLst>
+                                            <p:cond delay="0"/>
+                                          </p:stCondLst>
+                                          <p:endCondLst>
+                                            <p:cond evt="onStopAudio" delay="0">
+                                              <p:tgtEl>
+                                                <p:sldTgt/>
+                                              </p:tgtEl>
+                                            </p:cond>
+                                          </p:endCondLst>
+                                        </p:cTn>
+                                        <p:tgtEl>
+                                          <p:sndTgt r:embed="rIdSnd2" name="ding.wav"/>
+                                        </p:tgtEl>
+                                      </p:cMediaNode>
+                                    </p:audio>
                                   </p:childTnLst>
                                 </p:cTn>
                               </p:par>
@@ -5754,6 +6134,25 @@
                                         </p:tgtEl>
                                       </p:cBhvr>
                                     </p:animEffect>
+                                    <p:audio>
+                                      <p:cMediaNode vol="80000">
+                                        <p:cTn id="1009" display="0">
+                                          <p:stCondLst>
+                                            <p:cond delay="0"/>
+                                          </p:stCondLst>
+                                          <p:endCondLst>
+                                            <p:cond evt="onStopAudio" delay="0">
+                                              <p:tgtEl>
+                                                <p:sldTgt/>
+                                              </p:tgtEl>
+                                            </p:cond>
+                                          </p:endCondLst>
+                                        </p:cTn>
+                                        <p:tgtEl>
+                                          <p:sndTgt r:embed="rIdSnd3" name="tick.wav"/>
+                                        </p:tgtEl>
+                                      </p:cMediaNode>
+                                    </p:audio>
                                   </p:childTnLst>
                                 </p:cTn>
                               </p:par>
@@ -5807,6 +6206,25 @@
                                         </p:tgtEl>
                                       </p:cBhvr>
                                     </p:animEffect>
+                                    <p:audio>
+                                      <p:cMediaNode vol="80000">
+                                        <p:cTn id="1010" display="0">
+                                          <p:stCondLst>
+                                            <p:cond delay="0"/>
+                                          </p:stCondLst>
+                                          <p:endCondLst>
+                                            <p:cond evt="onStopAudio" delay="0">
+                                              <p:tgtEl>
+                                                <p:sldTgt/>
+                                              </p:tgtEl>
+                                            </p:cond>
+                                          </p:endCondLst>
+                                        </p:cTn>
+                                        <p:tgtEl>
+                                          <p:sndTgt r:embed="rIdSnd4" name="win.wav"/>
+                                        </p:tgtEl>
+                                      </p:cMediaNode>
+                                    </p:audio>
                                   </p:childTnLst>
                                 </p:cTn>
                               </p:par>
@@ -6634,6 +7052,25 @@
                                         </p:tgtEl>
                                       </p:cBhvr>
                                     </p:animEffect>
+                                    <p:audio>
+                                      <p:cMediaNode vol="80000">
+                                        <p:cTn id="1001" display="0">
+                                          <p:stCondLst>
+                                            <p:cond delay="0"/>
+                                          </p:stCondLst>
+                                          <p:endCondLst>
+                                            <p:cond evt="onStopAudio" delay="0">
+                                              <p:tgtEl>
+                                                <p:sldTgt/>
+                                              </p:tgtEl>
+                                            </p:cond>
+                                          </p:endCondLst>
+                                        </p:cTn>
+                                        <p:tgtEl>
+                                          <p:sndTgt r:embed="rIdSnd1" name="pop.wav"/>
+                                        </p:tgtEl>
+                                      </p:cMediaNode>
+                                    </p:audio>
                                   </p:childTnLst>
                                 </p:cTn>
                               </p:par>
@@ -6687,6 +7124,25 @@
                                         </p:tgtEl>
                                       </p:cBhvr>
                                     </p:animEffect>
+                                    <p:audio>
+                                      <p:cMediaNode vol="80000">
+                                        <p:cTn id="1002" display="0">
+                                          <p:stCondLst>
+                                            <p:cond delay="0"/>
+                                          </p:stCondLst>
+                                          <p:endCondLst>
+                                            <p:cond evt="onStopAudio" delay="0">
+                                              <p:tgtEl>
+                                                <p:sldTgt/>
+                                              </p:tgtEl>
+                                            </p:cond>
+                                          </p:endCondLst>
+                                        </p:cTn>
+                                        <p:tgtEl>
+                                          <p:sndTgt r:embed="rIdSnd2" name="ding.wav"/>
+                                        </p:tgtEl>
+                                      </p:cMediaNode>
+                                    </p:audio>
                                   </p:childTnLst>
                                 </p:cTn>
                               </p:par>
@@ -6740,6 +7196,25 @@
                                         </p:tgtEl>
                                       </p:cBhvr>
                                     </p:animEffect>
+                                    <p:audio>
+                                      <p:cMediaNode vol="80000">
+                                        <p:cTn id="1003" display="0">
+                                          <p:stCondLst>
+                                            <p:cond delay="0"/>
+                                          </p:stCondLst>
+                                          <p:endCondLst>
+                                            <p:cond evt="onStopAudio" delay="0">
+                                              <p:tgtEl>
+                                                <p:sldTgt/>
+                                              </p:tgtEl>
+                                            </p:cond>
+                                          </p:endCondLst>
+                                        </p:cTn>
+                                        <p:tgtEl>
+                                          <p:sndTgt r:embed="rIdSnd3" name="tick.wav"/>
+                                        </p:tgtEl>
+                                      </p:cMediaNode>
+                                    </p:audio>
                                   </p:childTnLst>
                                 </p:cTn>
                               </p:par>
@@ -6793,6 +7268,25 @@
                                         </p:tgtEl>
                                       </p:cBhvr>
                                     </p:animEffect>
+                                    <p:audio>
+                                      <p:cMediaNode vol="80000">
+                                        <p:cTn id="1004" display="0">
+                                          <p:stCondLst>
+                                            <p:cond delay="0"/>
+                                          </p:stCondLst>
+                                          <p:endCondLst>
+                                            <p:cond evt="onStopAudio" delay="0">
+                                              <p:tgtEl>
+                                                <p:sldTgt/>
+                                              </p:tgtEl>
+                                            </p:cond>
+                                          </p:endCondLst>
+                                        </p:cTn>
+                                        <p:tgtEl>
+                                          <p:sndTgt r:embed="rIdSnd1" name="pop.wav"/>
+                                        </p:tgtEl>
+                                      </p:cMediaNode>
+                                    </p:audio>
                                   </p:childTnLst>
                                 </p:cTn>
                               </p:par>
@@ -6846,6 +7340,25 @@
                                         </p:tgtEl>
                                       </p:cBhvr>
                                     </p:animEffect>
+                                    <p:audio>
+                                      <p:cMediaNode vol="80000">
+                                        <p:cTn id="1005" display="0">
+                                          <p:stCondLst>
+                                            <p:cond delay="0"/>
+                                          </p:stCondLst>
+                                          <p:endCondLst>
+                                            <p:cond evt="onStopAudio" delay="0">
+                                              <p:tgtEl>
+                                                <p:sldTgt/>
+                                              </p:tgtEl>
+                                            </p:cond>
+                                          </p:endCondLst>
+                                        </p:cTn>
+                                        <p:tgtEl>
+                                          <p:sndTgt r:embed="rIdSnd2" name="ding.wav"/>
+                                        </p:tgtEl>
+                                      </p:cMediaNode>
+                                    </p:audio>
                                   </p:childTnLst>
                                 </p:cTn>
                               </p:par>
@@ -6899,6 +7412,25 @@
                                         </p:tgtEl>
                                       </p:cBhvr>
                                     </p:animEffect>
+                                    <p:audio>
+                                      <p:cMediaNode vol="80000">
+                                        <p:cTn id="1006" display="0">
+                                          <p:stCondLst>
+                                            <p:cond delay="0"/>
+                                          </p:stCondLst>
+                                          <p:endCondLst>
+                                            <p:cond evt="onStopAudio" delay="0">
+                                              <p:tgtEl>
+                                                <p:sldTgt/>
+                                              </p:tgtEl>
+                                            </p:cond>
+                                          </p:endCondLst>
+                                        </p:cTn>
+                                        <p:tgtEl>
+                                          <p:sndTgt r:embed="rIdSnd3" name="tick.wav"/>
+                                        </p:tgtEl>
+                                      </p:cMediaNode>
+                                    </p:audio>
                                   </p:childTnLst>
                                 </p:cTn>
                               </p:par>
@@ -6952,6 +7484,25 @@
                                         </p:tgtEl>
                                       </p:cBhvr>
                                     </p:animEffect>
+                                    <p:audio>
+                                      <p:cMediaNode vol="80000">
+                                        <p:cTn id="1007" display="0">
+                                          <p:stCondLst>
+                                            <p:cond delay="0"/>
+                                          </p:stCondLst>
+                                          <p:endCondLst>
+                                            <p:cond evt="onStopAudio" delay="0">
+                                              <p:tgtEl>
+                                                <p:sldTgt/>
+                                              </p:tgtEl>
+                                            </p:cond>
+                                          </p:endCondLst>
+                                        </p:cTn>
+                                        <p:tgtEl>
+                                          <p:sndTgt r:embed="rIdSnd1" name="pop.wav"/>
+                                        </p:tgtEl>
+                                      </p:cMediaNode>
+                                    </p:audio>
                                   </p:childTnLst>
                                 </p:cTn>
                               </p:par>
@@ -7005,6 +7556,25 @@
                                         </p:tgtEl>
                                       </p:cBhvr>
                                     </p:animEffect>
+                                    <p:audio>
+                                      <p:cMediaNode vol="80000">
+                                        <p:cTn id="1008" display="0">
+                                          <p:stCondLst>
+                                            <p:cond delay="0"/>
+                                          </p:stCondLst>
+                                          <p:endCondLst>
+                                            <p:cond evt="onStopAudio" delay="0">
+                                              <p:tgtEl>
+                                                <p:sldTgt/>
+                                              </p:tgtEl>
+                                            </p:cond>
+                                          </p:endCondLst>
+                                        </p:cTn>
+                                        <p:tgtEl>
+                                          <p:sndTgt r:embed="rIdSnd2" name="ding.wav"/>
+                                        </p:tgtEl>
+                                      </p:cMediaNode>
+                                    </p:audio>
                                   </p:childTnLst>
                                 </p:cTn>
                               </p:par>
@@ -7058,6 +7628,25 @@
                                         </p:tgtEl>
                                       </p:cBhvr>
                                     </p:animEffect>
+                                    <p:audio>
+                                      <p:cMediaNode vol="80000">
+                                        <p:cTn id="1009" display="0">
+                                          <p:stCondLst>
+                                            <p:cond delay="0"/>
+                                          </p:stCondLst>
+                                          <p:endCondLst>
+                                            <p:cond evt="onStopAudio" delay="0">
+                                              <p:tgtEl>
+                                                <p:sldTgt/>
+                                              </p:tgtEl>
+                                            </p:cond>
+                                          </p:endCondLst>
+                                        </p:cTn>
+                                        <p:tgtEl>
+                                          <p:sndTgt r:embed="rIdSnd3" name="tick.wav"/>
+                                        </p:tgtEl>
+                                      </p:cMediaNode>
+                                    </p:audio>
                                   </p:childTnLst>
                                 </p:cTn>
                               </p:par>
@@ -7111,6 +7700,25 @@
                                         </p:tgtEl>
                                       </p:cBhvr>
                                     </p:animEffect>
+                                    <p:audio>
+                                      <p:cMediaNode vol="80000">
+                                        <p:cTn id="1010" display="0">
+                                          <p:stCondLst>
+                                            <p:cond delay="0"/>
+                                          </p:stCondLst>
+                                          <p:endCondLst>
+                                            <p:cond evt="onStopAudio" delay="0">
+                                              <p:tgtEl>
+                                                <p:sldTgt/>
+                                              </p:tgtEl>
+                                            </p:cond>
+                                          </p:endCondLst>
+                                        </p:cTn>
+                                        <p:tgtEl>
+                                          <p:sndTgt r:embed="rIdSnd4" name="win.wav"/>
+                                        </p:tgtEl>
+                                      </p:cMediaNode>
+                                    </p:audio>
                                   </p:childTnLst>
                                 </p:cTn>
                               </p:par>
@@ -7938,6 +8546,25 @@
                                         </p:tgtEl>
                                       </p:cBhvr>
                                     </p:animEffect>
+                                    <p:audio>
+                                      <p:cMediaNode vol="80000">
+                                        <p:cTn id="1001" display="0">
+                                          <p:stCondLst>
+                                            <p:cond delay="0"/>
+                                          </p:stCondLst>
+                                          <p:endCondLst>
+                                            <p:cond evt="onStopAudio" delay="0">
+                                              <p:tgtEl>
+                                                <p:sldTgt/>
+                                              </p:tgtEl>
+                                            </p:cond>
+                                          </p:endCondLst>
+                                        </p:cTn>
+                                        <p:tgtEl>
+                                          <p:sndTgt r:embed="rIdSnd1" name="pop.wav"/>
+                                        </p:tgtEl>
+                                      </p:cMediaNode>
+                                    </p:audio>
                                   </p:childTnLst>
                                 </p:cTn>
                               </p:par>
@@ -7991,6 +8618,25 @@
                                         </p:tgtEl>
                                       </p:cBhvr>
                                     </p:animEffect>
+                                    <p:audio>
+                                      <p:cMediaNode vol="80000">
+                                        <p:cTn id="1002" display="0">
+                                          <p:stCondLst>
+                                            <p:cond delay="0"/>
+                                          </p:stCondLst>
+                                          <p:endCondLst>
+                                            <p:cond evt="onStopAudio" delay="0">
+                                              <p:tgtEl>
+                                                <p:sldTgt/>
+                                              </p:tgtEl>
+                                            </p:cond>
+                                          </p:endCondLst>
+                                        </p:cTn>
+                                        <p:tgtEl>
+                                          <p:sndTgt r:embed="rIdSnd2" name="ding.wav"/>
+                                        </p:tgtEl>
+                                      </p:cMediaNode>
+                                    </p:audio>
                                   </p:childTnLst>
                                 </p:cTn>
                               </p:par>
@@ -8044,6 +8690,25 @@
                                         </p:tgtEl>
                                       </p:cBhvr>
                                     </p:animEffect>
+                                    <p:audio>
+                                      <p:cMediaNode vol="80000">
+                                        <p:cTn id="1003" display="0">
+                                          <p:stCondLst>
+                                            <p:cond delay="0"/>
+                                          </p:stCondLst>
+                                          <p:endCondLst>
+                                            <p:cond evt="onStopAudio" delay="0">
+                                              <p:tgtEl>
+                                                <p:sldTgt/>
+                                              </p:tgtEl>
+                                            </p:cond>
+                                          </p:endCondLst>
+                                        </p:cTn>
+                                        <p:tgtEl>
+                                          <p:sndTgt r:embed="rIdSnd3" name="tick.wav"/>
+                                        </p:tgtEl>
+                                      </p:cMediaNode>
+                                    </p:audio>
                                   </p:childTnLst>
                                 </p:cTn>
                               </p:par>
@@ -8097,6 +8762,25 @@
                                         </p:tgtEl>
                                       </p:cBhvr>
                                     </p:animEffect>
+                                    <p:audio>
+                                      <p:cMediaNode vol="80000">
+                                        <p:cTn id="1004" display="0">
+                                          <p:stCondLst>
+                                            <p:cond delay="0"/>
+                                          </p:stCondLst>
+                                          <p:endCondLst>
+                                            <p:cond evt="onStopAudio" delay="0">
+                                              <p:tgtEl>
+                                                <p:sldTgt/>
+                                              </p:tgtEl>
+                                            </p:cond>
+                                          </p:endCondLst>
+                                        </p:cTn>
+                                        <p:tgtEl>
+                                          <p:sndTgt r:embed="rIdSnd1" name="pop.wav"/>
+                                        </p:tgtEl>
+                                      </p:cMediaNode>
+                                    </p:audio>
                                   </p:childTnLst>
                                 </p:cTn>
                               </p:par>
@@ -8150,6 +8834,25 @@
                                         </p:tgtEl>
                                       </p:cBhvr>
                                     </p:animEffect>
+                                    <p:audio>
+                                      <p:cMediaNode vol="80000">
+                                        <p:cTn id="1005" display="0">
+                                          <p:stCondLst>
+                                            <p:cond delay="0"/>
+                                          </p:stCondLst>
+                                          <p:endCondLst>
+                                            <p:cond evt="onStopAudio" delay="0">
+                                              <p:tgtEl>
+                                                <p:sldTgt/>
+                                              </p:tgtEl>
+                                            </p:cond>
+                                          </p:endCondLst>
+                                        </p:cTn>
+                                        <p:tgtEl>
+                                          <p:sndTgt r:embed="rIdSnd2" name="ding.wav"/>
+                                        </p:tgtEl>
+                                      </p:cMediaNode>
+                                    </p:audio>
                                   </p:childTnLst>
                                 </p:cTn>
                               </p:par>
@@ -8203,6 +8906,25 @@
                                         </p:tgtEl>
                                       </p:cBhvr>
                                     </p:animEffect>
+                                    <p:audio>
+                                      <p:cMediaNode vol="80000">
+                                        <p:cTn id="1006" display="0">
+                                          <p:stCondLst>
+                                            <p:cond delay="0"/>
+                                          </p:stCondLst>
+                                          <p:endCondLst>
+                                            <p:cond evt="onStopAudio" delay="0">
+                                              <p:tgtEl>
+                                                <p:sldTgt/>
+                                              </p:tgtEl>
+                                            </p:cond>
+                                          </p:endCondLst>
+                                        </p:cTn>
+                                        <p:tgtEl>
+                                          <p:sndTgt r:embed="rIdSnd3" name="tick.wav"/>
+                                        </p:tgtEl>
+                                      </p:cMediaNode>
+                                    </p:audio>
                                   </p:childTnLst>
                                 </p:cTn>
                               </p:par>
@@ -8256,6 +8978,25 @@
                                         </p:tgtEl>
                                       </p:cBhvr>
                                     </p:animEffect>
+                                    <p:audio>
+                                      <p:cMediaNode vol="80000">
+                                        <p:cTn id="1007" display="0">
+                                          <p:stCondLst>
+                                            <p:cond delay="0"/>
+                                          </p:stCondLst>
+                                          <p:endCondLst>
+                                            <p:cond evt="onStopAudio" delay="0">
+                                              <p:tgtEl>
+                                                <p:sldTgt/>
+                                              </p:tgtEl>
+                                            </p:cond>
+                                          </p:endCondLst>
+                                        </p:cTn>
+                                        <p:tgtEl>
+                                          <p:sndTgt r:embed="rIdSnd1" name="pop.wav"/>
+                                        </p:tgtEl>
+                                      </p:cMediaNode>
+                                    </p:audio>
                                   </p:childTnLst>
                                 </p:cTn>
                               </p:par>
@@ -8309,6 +9050,25 @@
                                         </p:tgtEl>
                                       </p:cBhvr>
                                     </p:animEffect>
+                                    <p:audio>
+                                      <p:cMediaNode vol="80000">
+                                        <p:cTn id="1008" display="0">
+                                          <p:stCondLst>
+                                            <p:cond delay="0"/>
+                                          </p:stCondLst>
+                                          <p:endCondLst>
+                                            <p:cond evt="onStopAudio" delay="0">
+                                              <p:tgtEl>
+                                                <p:sldTgt/>
+                                              </p:tgtEl>
+                                            </p:cond>
+                                          </p:endCondLst>
+                                        </p:cTn>
+                                        <p:tgtEl>
+                                          <p:sndTgt r:embed="rIdSnd2" name="ding.wav"/>
+                                        </p:tgtEl>
+                                      </p:cMediaNode>
+                                    </p:audio>
                                   </p:childTnLst>
                                 </p:cTn>
                               </p:par>
@@ -8362,6 +9122,25 @@
                                         </p:tgtEl>
                                       </p:cBhvr>
                                     </p:animEffect>
+                                    <p:audio>
+                                      <p:cMediaNode vol="80000">
+                                        <p:cTn id="1009" display="0">
+                                          <p:stCondLst>
+                                            <p:cond delay="0"/>
+                                          </p:stCondLst>
+                                          <p:endCondLst>
+                                            <p:cond evt="onStopAudio" delay="0">
+                                              <p:tgtEl>
+                                                <p:sldTgt/>
+                                              </p:tgtEl>
+                                            </p:cond>
+                                          </p:endCondLst>
+                                        </p:cTn>
+                                        <p:tgtEl>
+                                          <p:sndTgt r:embed="rIdSnd3" name="tick.wav"/>
+                                        </p:tgtEl>
+                                      </p:cMediaNode>
+                                    </p:audio>
                                   </p:childTnLst>
                                 </p:cTn>
                               </p:par>
@@ -8415,6 +9194,25 @@
                                         </p:tgtEl>
                                       </p:cBhvr>
                                     </p:animEffect>
+                                    <p:audio>
+                                      <p:cMediaNode vol="80000">
+                                        <p:cTn id="1010" display="0">
+                                          <p:stCondLst>
+                                            <p:cond delay="0"/>
+                                          </p:stCondLst>
+                                          <p:endCondLst>
+                                            <p:cond evt="onStopAudio" delay="0">
+                                              <p:tgtEl>
+                                                <p:sldTgt/>
+                                              </p:tgtEl>
+                                            </p:cond>
+                                          </p:endCondLst>
+                                        </p:cTn>
+                                        <p:tgtEl>
+                                          <p:sndTgt r:embed="rIdSnd4" name="win.wav"/>
+                                        </p:tgtEl>
+                                      </p:cMediaNode>
+                                    </p:audio>
                                   </p:childTnLst>
                                 </p:cTn>
                               </p:par>
@@ -9242,6 +10040,25 @@
                                         </p:tgtEl>
                                       </p:cBhvr>
                                     </p:animEffect>
+                                    <p:audio>
+                                      <p:cMediaNode vol="80000">
+                                        <p:cTn id="1001" display="0">
+                                          <p:stCondLst>
+                                            <p:cond delay="0"/>
+                                          </p:stCondLst>
+                                          <p:endCondLst>
+                                            <p:cond evt="onStopAudio" delay="0">
+                                              <p:tgtEl>
+                                                <p:sldTgt/>
+                                              </p:tgtEl>
+                                            </p:cond>
+                                          </p:endCondLst>
+                                        </p:cTn>
+                                        <p:tgtEl>
+                                          <p:sndTgt r:embed="rIdSnd1" name="pop.wav"/>
+                                        </p:tgtEl>
+                                      </p:cMediaNode>
+                                    </p:audio>
                                   </p:childTnLst>
                                 </p:cTn>
                               </p:par>
@@ -9295,6 +10112,25 @@
                                         </p:tgtEl>
                                       </p:cBhvr>
                                     </p:animEffect>
+                                    <p:audio>
+                                      <p:cMediaNode vol="80000">
+                                        <p:cTn id="1002" display="0">
+                                          <p:stCondLst>
+                                            <p:cond delay="0"/>
+                                          </p:stCondLst>
+                                          <p:endCondLst>
+                                            <p:cond evt="onStopAudio" delay="0">
+                                              <p:tgtEl>
+                                                <p:sldTgt/>
+                                              </p:tgtEl>
+                                            </p:cond>
+                                          </p:endCondLst>
+                                        </p:cTn>
+                                        <p:tgtEl>
+                                          <p:sndTgt r:embed="rIdSnd2" name="ding.wav"/>
+                                        </p:tgtEl>
+                                      </p:cMediaNode>
+                                    </p:audio>
                                   </p:childTnLst>
                                 </p:cTn>
                               </p:par>
@@ -9348,6 +10184,25 @@
                                         </p:tgtEl>
                                       </p:cBhvr>
                                     </p:animEffect>
+                                    <p:audio>
+                                      <p:cMediaNode vol="80000">
+                                        <p:cTn id="1003" display="0">
+                                          <p:stCondLst>
+                                            <p:cond delay="0"/>
+                                          </p:stCondLst>
+                                          <p:endCondLst>
+                                            <p:cond evt="onStopAudio" delay="0">
+                                              <p:tgtEl>
+                                                <p:sldTgt/>
+                                              </p:tgtEl>
+                                            </p:cond>
+                                          </p:endCondLst>
+                                        </p:cTn>
+                                        <p:tgtEl>
+                                          <p:sndTgt r:embed="rIdSnd3" name="tick.wav"/>
+                                        </p:tgtEl>
+                                      </p:cMediaNode>
+                                    </p:audio>
                                   </p:childTnLst>
                                 </p:cTn>
                               </p:par>
@@ -9401,6 +10256,25 @@
                                         </p:tgtEl>
                                       </p:cBhvr>
                                     </p:animEffect>
+                                    <p:audio>
+                                      <p:cMediaNode vol="80000">
+                                        <p:cTn id="1004" display="0">
+                                          <p:stCondLst>
+                                            <p:cond delay="0"/>
+                                          </p:stCondLst>
+                                          <p:endCondLst>
+                                            <p:cond evt="onStopAudio" delay="0">
+                                              <p:tgtEl>
+                                                <p:sldTgt/>
+                                              </p:tgtEl>
+                                            </p:cond>
+                                          </p:endCondLst>
+                                        </p:cTn>
+                                        <p:tgtEl>
+                                          <p:sndTgt r:embed="rIdSnd1" name="pop.wav"/>
+                                        </p:tgtEl>
+                                      </p:cMediaNode>
+                                    </p:audio>
                                   </p:childTnLst>
                                 </p:cTn>
                               </p:par>
@@ -9454,6 +10328,25 @@
                                         </p:tgtEl>
                                       </p:cBhvr>
                                     </p:animEffect>
+                                    <p:audio>
+                                      <p:cMediaNode vol="80000">
+                                        <p:cTn id="1005" display="0">
+                                          <p:stCondLst>
+                                            <p:cond delay="0"/>
+                                          </p:stCondLst>
+                                          <p:endCondLst>
+                                            <p:cond evt="onStopAudio" delay="0">
+                                              <p:tgtEl>
+                                                <p:sldTgt/>
+                                              </p:tgtEl>
+                                            </p:cond>
+                                          </p:endCondLst>
+                                        </p:cTn>
+                                        <p:tgtEl>
+                                          <p:sndTgt r:embed="rIdSnd2" name="ding.wav"/>
+                                        </p:tgtEl>
+                                      </p:cMediaNode>
+                                    </p:audio>
                                   </p:childTnLst>
                                 </p:cTn>
                               </p:par>
@@ -9507,6 +10400,25 @@
                                         </p:tgtEl>
                                       </p:cBhvr>
                                     </p:animEffect>
+                                    <p:audio>
+                                      <p:cMediaNode vol="80000">
+                                        <p:cTn id="1006" display="0">
+                                          <p:stCondLst>
+                                            <p:cond delay="0"/>
+                                          </p:stCondLst>
+                                          <p:endCondLst>
+                                            <p:cond evt="onStopAudio" delay="0">
+                                              <p:tgtEl>
+                                                <p:sldTgt/>
+                                              </p:tgtEl>
+                                            </p:cond>
+                                          </p:endCondLst>
+                                        </p:cTn>
+                                        <p:tgtEl>
+                                          <p:sndTgt r:embed="rIdSnd3" name="tick.wav"/>
+                                        </p:tgtEl>
+                                      </p:cMediaNode>
+                                    </p:audio>
                                   </p:childTnLst>
                                 </p:cTn>
                               </p:par>
@@ -9560,6 +10472,25 @@
                                         </p:tgtEl>
                                       </p:cBhvr>
                                     </p:animEffect>
+                                    <p:audio>
+                                      <p:cMediaNode vol="80000">
+                                        <p:cTn id="1007" display="0">
+                                          <p:stCondLst>
+                                            <p:cond delay="0"/>
+                                          </p:stCondLst>
+                                          <p:endCondLst>
+                                            <p:cond evt="onStopAudio" delay="0">
+                                              <p:tgtEl>
+                                                <p:sldTgt/>
+                                              </p:tgtEl>
+                                            </p:cond>
+                                          </p:endCondLst>
+                                        </p:cTn>
+                                        <p:tgtEl>
+                                          <p:sndTgt r:embed="rIdSnd1" name="pop.wav"/>
+                                        </p:tgtEl>
+                                      </p:cMediaNode>
+                                    </p:audio>
                                   </p:childTnLst>
                                 </p:cTn>
                               </p:par>
@@ -9613,6 +10544,25 @@
                                         </p:tgtEl>
                                       </p:cBhvr>
                                     </p:animEffect>
+                                    <p:audio>
+                                      <p:cMediaNode vol="80000">
+                                        <p:cTn id="1008" display="0">
+                                          <p:stCondLst>
+                                            <p:cond delay="0"/>
+                                          </p:stCondLst>
+                                          <p:endCondLst>
+                                            <p:cond evt="onStopAudio" delay="0">
+                                              <p:tgtEl>
+                                                <p:sldTgt/>
+                                              </p:tgtEl>
+                                            </p:cond>
+                                          </p:endCondLst>
+                                        </p:cTn>
+                                        <p:tgtEl>
+                                          <p:sndTgt r:embed="rIdSnd2" name="ding.wav"/>
+                                        </p:tgtEl>
+                                      </p:cMediaNode>
+                                    </p:audio>
                                   </p:childTnLst>
                                 </p:cTn>
                               </p:par>
@@ -9666,6 +10616,25 @@
                                         </p:tgtEl>
                                       </p:cBhvr>
                                     </p:animEffect>
+                                    <p:audio>
+                                      <p:cMediaNode vol="80000">
+                                        <p:cTn id="1009" display="0">
+                                          <p:stCondLst>
+                                            <p:cond delay="0"/>
+                                          </p:stCondLst>
+                                          <p:endCondLst>
+                                            <p:cond evt="onStopAudio" delay="0">
+                                              <p:tgtEl>
+                                                <p:sldTgt/>
+                                              </p:tgtEl>
+                                            </p:cond>
+                                          </p:endCondLst>
+                                        </p:cTn>
+                                        <p:tgtEl>
+                                          <p:sndTgt r:embed="rIdSnd3" name="tick.wav"/>
+                                        </p:tgtEl>
+                                      </p:cMediaNode>
+                                    </p:audio>
                                   </p:childTnLst>
                                 </p:cTn>
                               </p:par>
@@ -9719,6 +10688,25 @@
                                         </p:tgtEl>
                                       </p:cBhvr>
                                     </p:animEffect>
+                                    <p:audio>
+                                      <p:cMediaNode vol="80000">
+                                        <p:cTn id="1010" display="0">
+                                          <p:stCondLst>
+                                            <p:cond delay="0"/>
+                                          </p:stCondLst>
+                                          <p:endCondLst>
+                                            <p:cond evt="onStopAudio" delay="0">
+                                              <p:tgtEl>
+                                                <p:sldTgt/>
+                                              </p:tgtEl>
+                                            </p:cond>
+                                          </p:endCondLst>
+                                        </p:cTn>
+                                        <p:tgtEl>
+                                          <p:sndTgt r:embed="rIdSnd4" name="win.wav"/>
+                                        </p:tgtEl>
+                                      </p:cMediaNode>
+                                    </p:audio>
                                   </p:childTnLst>
                                 </p:cTn>
                               </p:par>
@@ -10546,6 +11534,25 @@
                                         </p:tgtEl>
                                       </p:cBhvr>
                                     </p:animEffect>
+                                    <p:audio>
+                                      <p:cMediaNode vol="80000">
+                                        <p:cTn id="1001" display="0">
+                                          <p:stCondLst>
+                                            <p:cond delay="0"/>
+                                          </p:stCondLst>
+                                          <p:endCondLst>
+                                            <p:cond evt="onStopAudio" delay="0">
+                                              <p:tgtEl>
+                                                <p:sldTgt/>
+                                              </p:tgtEl>
+                                            </p:cond>
+                                          </p:endCondLst>
+                                        </p:cTn>
+                                        <p:tgtEl>
+                                          <p:sndTgt r:embed="rIdSnd1" name="pop.wav"/>
+                                        </p:tgtEl>
+                                      </p:cMediaNode>
+                                    </p:audio>
                                   </p:childTnLst>
                                 </p:cTn>
                               </p:par>
@@ -10599,6 +11606,25 @@
                                         </p:tgtEl>
                                       </p:cBhvr>
                                     </p:animEffect>
+                                    <p:audio>
+                                      <p:cMediaNode vol="80000">
+                                        <p:cTn id="1002" display="0">
+                                          <p:stCondLst>
+                                            <p:cond delay="0"/>
+                                          </p:stCondLst>
+                                          <p:endCondLst>
+                                            <p:cond evt="onStopAudio" delay="0">
+                                              <p:tgtEl>
+                                                <p:sldTgt/>
+                                              </p:tgtEl>
+                                            </p:cond>
+                                          </p:endCondLst>
+                                        </p:cTn>
+                                        <p:tgtEl>
+                                          <p:sndTgt r:embed="rIdSnd2" name="ding.wav"/>
+                                        </p:tgtEl>
+                                      </p:cMediaNode>
+                                    </p:audio>
                                   </p:childTnLst>
                                 </p:cTn>
                               </p:par>
@@ -10652,6 +11678,25 @@
                                         </p:tgtEl>
                                       </p:cBhvr>
                                     </p:animEffect>
+                                    <p:audio>
+                                      <p:cMediaNode vol="80000">
+                                        <p:cTn id="1003" display="0">
+                                          <p:stCondLst>
+                                            <p:cond delay="0"/>
+                                          </p:stCondLst>
+                                          <p:endCondLst>
+                                            <p:cond evt="onStopAudio" delay="0">
+                                              <p:tgtEl>
+                                                <p:sldTgt/>
+                                              </p:tgtEl>
+                                            </p:cond>
+                                          </p:endCondLst>
+                                        </p:cTn>
+                                        <p:tgtEl>
+                                          <p:sndTgt r:embed="rIdSnd3" name="tick.wav"/>
+                                        </p:tgtEl>
+                                      </p:cMediaNode>
+                                    </p:audio>
                                   </p:childTnLst>
                                 </p:cTn>
                               </p:par>
@@ -10705,6 +11750,25 @@
                                         </p:tgtEl>
                                       </p:cBhvr>
                                     </p:animEffect>
+                                    <p:audio>
+                                      <p:cMediaNode vol="80000">
+                                        <p:cTn id="1004" display="0">
+                                          <p:stCondLst>
+                                            <p:cond delay="0"/>
+                                          </p:stCondLst>
+                                          <p:endCondLst>
+                                            <p:cond evt="onStopAudio" delay="0">
+                                              <p:tgtEl>
+                                                <p:sldTgt/>
+                                              </p:tgtEl>
+                                            </p:cond>
+                                          </p:endCondLst>
+                                        </p:cTn>
+                                        <p:tgtEl>
+                                          <p:sndTgt r:embed="rIdSnd1" name="pop.wav"/>
+                                        </p:tgtEl>
+                                      </p:cMediaNode>
+                                    </p:audio>
                                   </p:childTnLst>
                                 </p:cTn>
                               </p:par>
@@ -10758,6 +11822,25 @@
                                         </p:tgtEl>
                                       </p:cBhvr>
                                     </p:animEffect>
+                                    <p:audio>
+                                      <p:cMediaNode vol="80000">
+                                        <p:cTn id="1005" display="0">
+                                          <p:stCondLst>
+                                            <p:cond delay="0"/>
+                                          </p:stCondLst>
+                                          <p:endCondLst>
+                                            <p:cond evt="onStopAudio" delay="0">
+                                              <p:tgtEl>
+                                                <p:sldTgt/>
+                                              </p:tgtEl>
+                                            </p:cond>
+                                          </p:endCondLst>
+                                        </p:cTn>
+                                        <p:tgtEl>
+                                          <p:sndTgt r:embed="rIdSnd2" name="ding.wav"/>
+                                        </p:tgtEl>
+                                      </p:cMediaNode>
+                                    </p:audio>
                                   </p:childTnLst>
                                 </p:cTn>
                               </p:par>
@@ -10811,6 +11894,25 @@
                                         </p:tgtEl>
                                       </p:cBhvr>
                                     </p:animEffect>
+                                    <p:audio>
+                                      <p:cMediaNode vol="80000">
+                                        <p:cTn id="1006" display="0">
+                                          <p:stCondLst>
+                                            <p:cond delay="0"/>
+                                          </p:stCondLst>
+                                          <p:endCondLst>
+                                            <p:cond evt="onStopAudio" delay="0">
+                                              <p:tgtEl>
+                                                <p:sldTgt/>
+                                              </p:tgtEl>
+                                            </p:cond>
+                                          </p:endCondLst>
+                                        </p:cTn>
+                                        <p:tgtEl>
+                                          <p:sndTgt r:embed="rIdSnd3" name="tick.wav"/>
+                                        </p:tgtEl>
+                                      </p:cMediaNode>
+                                    </p:audio>
                                   </p:childTnLst>
                                 </p:cTn>
                               </p:par>
@@ -10864,6 +11966,25 @@
                                         </p:tgtEl>
                                       </p:cBhvr>
                                     </p:animEffect>
+                                    <p:audio>
+                                      <p:cMediaNode vol="80000">
+                                        <p:cTn id="1007" display="0">
+                                          <p:stCondLst>
+                                            <p:cond delay="0"/>
+                                          </p:stCondLst>
+                                          <p:endCondLst>
+                                            <p:cond evt="onStopAudio" delay="0">
+                                              <p:tgtEl>
+                                                <p:sldTgt/>
+                                              </p:tgtEl>
+                                            </p:cond>
+                                          </p:endCondLst>
+                                        </p:cTn>
+                                        <p:tgtEl>
+                                          <p:sndTgt r:embed="rIdSnd1" name="pop.wav"/>
+                                        </p:tgtEl>
+                                      </p:cMediaNode>
+                                    </p:audio>
                                   </p:childTnLst>
                                 </p:cTn>
                               </p:par>
@@ -10917,6 +12038,25 @@
                                         </p:tgtEl>
                                       </p:cBhvr>
                                     </p:animEffect>
+                                    <p:audio>
+                                      <p:cMediaNode vol="80000">
+                                        <p:cTn id="1008" display="0">
+                                          <p:stCondLst>
+                                            <p:cond delay="0"/>
+                                          </p:stCondLst>
+                                          <p:endCondLst>
+                                            <p:cond evt="onStopAudio" delay="0">
+                                              <p:tgtEl>
+                                                <p:sldTgt/>
+                                              </p:tgtEl>
+                                            </p:cond>
+                                          </p:endCondLst>
+                                        </p:cTn>
+                                        <p:tgtEl>
+                                          <p:sndTgt r:embed="rIdSnd2" name="ding.wav"/>
+                                        </p:tgtEl>
+                                      </p:cMediaNode>
+                                    </p:audio>
                                   </p:childTnLst>
                                 </p:cTn>
                               </p:par>
@@ -10970,6 +12110,25 @@
                                         </p:tgtEl>
                                       </p:cBhvr>
                                     </p:animEffect>
+                                    <p:audio>
+                                      <p:cMediaNode vol="80000">
+                                        <p:cTn id="1009" display="0">
+                                          <p:stCondLst>
+                                            <p:cond delay="0"/>
+                                          </p:stCondLst>
+                                          <p:endCondLst>
+                                            <p:cond evt="onStopAudio" delay="0">
+                                              <p:tgtEl>
+                                                <p:sldTgt/>
+                                              </p:tgtEl>
+                                            </p:cond>
+                                          </p:endCondLst>
+                                        </p:cTn>
+                                        <p:tgtEl>
+                                          <p:sndTgt r:embed="rIdSnd3" name="tick.wav"/>
+                                        </p:tgtEl>
+                                      </p:cMediaNode>
+                                    </p:audio>
                                   </p:childTnLst>
                                 </p:cTn>
                               </p:par>
@@ -11023,6 +12182,25 @@
                                         </p:tgtEl>
                                       </p:cBhvr>
                                     </p:animEffect>
+                                    <p:audio>
+                                      <p:cMediaNode vol="80000">
+                                        <p:cTn id="1010" display="0">
+                                          <p:stCondLst>
+                                            <p:cond delay="0"/>
+                                          </p:stCondLst>
+                                          <p:endCondLst>
+                                            <p:cond evt="onStopAudio" delay="0">
+                                              <p:tgtEl>
+                                                <p:sldTgt/>
+                                              </p:tgtEl>
+                                            </p:cond>
+                                          </p:endCondLst>
+                                        </p:cTn>
+                                        <p:tgtEl>
+                                          <p:sndTgt r:embed="rIdSnd4" name="win.wav"/>
+                                        </p:tgtEl>
+                                      </p:cMediaNode>
+                                    </p:audio>
                                   </p:childTnLst>
                                 </p:cTn>
                               </p:par>
@@ -11722,6 +12900,25 @@
                                         </p:tgtEl>
                                       </p:cBhvr>
                                     </p:animEffect>
+                                    <p:audio>
+                                      <p:cMediaNode vol="80000">
+                                        <p:cTn id="1001" display="0">
+                                          <p:stCondLst>
+                                            <p:cond delay="0"/>
+                                          </p:stCondLst>
+                                          <p:endCondLst>
+                                            <p:cond evt="onStopAudio" delay="0">
+                                              <p:tgtEl>
+                                                <p:sldTgt/>
+                                              </p:tgtEl>
+                                            </p:cond>
+                                          </p:endCondLst>
+                                        </p:cTn>
+                                        <p:tgtEl>
+                                          <p:sndTgt r:embed="rIdSnd1" name="pop.wav"/>
+                                        </p:tgtEl>
+                                      </p:cMediaNode>
+                                    </p:audio>
                                   </p:childTnLst>
                                 </p:cTn>
                               </p:par>
@@ -11775,6 +12972,25 @@
                                         </p:tgtEl>
                                       </p:cBhvr>
                                     </p:animEffect>
+                                    <p:audio>
+                                      <p:cMediaNode vol="80000">
+                                        <p:cTn id="1002" display="0">
+                                          <p:stCondLst>
+                                            <p:cond delay="0"/>
+                                          </p:stCondLst>
+                                          <p:endCondLst>
+                                            <p:cond evt="onStopAudio" delay="0">
+                                              <p:tgtEl>
+                                                <p:sldTgt/>
+                                              </p:tgtEl>
+                                            </p:cond>
+                                          </p:endCondLst>
+                                        </p:cTn>
+                                        <p:tgtEl>
+                                          <p:sndTgt r:embed="rIdSnd2" name="ding.wav"/>
+                                        </p:tgtEl>
+                                      </p:cMediaNode>
+                                    </p:audio>
                                   </p:childTnLst>
                                 </p:cTn>
                               </p:par>
@@ -11828,6 +13044,25 @@
                                         </p:tgtEl>
                                       </p:cBhvr>
                                     </p:animEffect>
+                                    <p:audio>
+                                      <p:cMediaNode vol="80000">
+                                        <p:cTn id="1003" display="0">
+                                          <p:stCondLst>
+                                            <p:cond delay="0"/>
+                                          </p:stCondLst>
+                                          <p:endCondLst>
+                                            <p:cond evt="onStopAudio" delay="0">
+                                              <p:tgtEl>
+                                                <p:sldTgt/>
+                                              </p:tgtEl>
+                                            </p:cond>
+                                          </p:endCondLst>
+                                        </p:cTn>
+                                        <p:tgtEl>
+                                          <p:sndTgt r:embed="rIdSnd3" name="tick.wav"/>
+                                        </p:tgtEl>
+                                      </p:cMediaNode>
+                                    </p:audio>
                                   </p:childTnLst>
                                 </p:cTn>
                               </p:par>
@@ -11881,6 +13116,25 @@
                                         </p:tgtEl>
                                       </p:cBhvr>
                                     </p:animEffect>
+                                    <p:audio>
+                                      <p:cMediaNode vol="80000">
+                                        <p:cTn id="1004" display="0">
+                                          <p:stCondLst>
+                                            <p:cond delay="0"/>
+                                          </p:stCondLst>
+                                          <p:endCondLst>
+                                            <p:cond evt="onStopAudio" delay="0">
+                                              <p:tgtEl>
+                                                <p:sldTgt/>
+                                              </p:tgtEl>
+                                            </p:cond>
+                                          </p:endCondLst>
+                                        </p:cTn>
+                                        <p:tgtEl>
+                                          <p:sndTgt r:embed="rIdSnd1" name="pop.wav"/>
+                                        </p:tgtEl>
+                                      </p:cMediaNode>
+                                    </p:audio>
                                   </p:childTnLst>
                                 </p:cTn>
                               </p:par>
@@ -11934,6 +13188,25 @@
                                         </p:tgtEl>
                                       </p:cBhvr>
                                     </p:animEffect>
+                                    <p:audio>
+                                      <p:cMediaNode vol="80000">
+                                        <p:cTn id="1005" display="0">
+                                          <p:stCondLst>
+                                            <p:cond delay="0"/>
+                                          </p:stCondLst>
+                                          <p:endCondLst>
+                                            <p:cond evt="onStopAudio" delay="0">
+                                              <p:tgtEl>
+                                                <p:sldTgt/>
+                                              </p:tgtEl>
+                                            </p:cond>
+                                          </p:endCondLst>
+                                        </p:cTn>
+                                        <p:tgtEl>
+                                          <p:sndTgt r:embed="rIdSnd2" name="ding.wav"/>
+                                        </p:tgtEl>
+                                      </p:cMediaNode>
+                                    </p:audio>
                                   </p:childTnLst>
                                 </p:cTn>
                               </p:par>
@@ -11987,6 +13260,25 @@
                                         </p:tgtEl>
                                       </p:cBhvr>
                                     </p:animEffect>
+                                    <p:audio>
+                                      <p:cMediaNode vol="80000">
+                                        <p:cTn id="1006" display="0">
+                                          <p:stCondLst>
+                                            <p:cond delay="0"/>
+                                          </p:stCondLst>
+                                          <p:endCondLst>
+                                            <p:cond evt="onStopAudio" delay="0">
+                                              <p:tgtEl>
+                                                <p:sldTgt/>
+                                              </p:tgtEl>
+                                            </p:cond>
+                                          </p:endCondLst>
+                                        </p:cTn>
+                                        <p:tgtEl>
+                                          <p:sndTgt r:embed="rIdSnd3" name="tick.wav"/>
+                                        </p:tgtEl>
+                                      </p:cMediaNode>
+                                    </p:audio>
                                   </p:childTnLst>
                                 </p:cTn>
                               </p:par>
@@ -12040,6 +13332,25 @@
                                         </p:tgtEl>
                                       </p:cBhvr>
                                     </p:animEffect>
+                                    <p:audio>
+                                      <p:cMediaNode vol="80000">
+                                        <p:cTn id="1007" display="0">
+                                          <p:stCondLst>
+                                            <p:cond delay="0"/>
+                                          </p:stCondLst>
+                                          <p:endCondLst>
+                                            <p:cond evt="onStopAudio" delay="0">
+                                              <p:tgtEl>
+                                                <p:sldTgt/>
+                                              </p:tgtEl>
+                                            </p:cond>
+                                          </p:endCondLst>
+                                        </p:cTn>
+                                        <p:tgtEl>
+                                          <p:sndTgt r:embed="rIdSnd4" name="win.wav"/>
+                                        </p:tgtEl>
+                                      </p:cMediaNode>
+                                    </p:audio>
                                   </p:childTnLst>
                                 </p:cTn>
                               </p:par>
@@ -12736,6 +14047,25 @@
                                         </p:tgtEl>
                                       </p:cBhvr>
                                     </p:animEffect>
+                                    <p:audio>
+                                      <p:cMediaNode vol="80000">
+                                        <p:cTn id="1001" display="0">
+                                          <p:stCondLst>
+                                            <p:cond delay="0"/>
+                                          </p:stCondLst>
+                                          <p:endCondLst>
+                                            <p:cond evt="onStopAudio" delay="0">
+                                              <p:tgtEl>
+                                                <p:sldTgt/>
+                                              </p:tgtEl>
+                                            </p:cond>
+                                          </p:endCondLst>
+                                        </p:cTn>
+                                        <p:tgtEl>
+                                          <p:sndTgt r:embed="rIdSnd1" name="pop.wav"/>
+                                        </p:tgtEl>
+                                      </p:cMediaNode>
+                                    </p:audio>
                                   </p:childTnLst>
                                 </p:cTn>
                               </p:par>
@@ -12789,6 +14119,25 @@
                                         </p:tgtEl>
                                       </p:cBhvr>
                                     </p:animEffect>
+                                    <p:audio>
+                                      <p:cMediaNode vol="80000">
+                                        <p:cTn id="1002" display="0">
+                                          <p:stCondLst>
+                                            <p:cond delay="0"/>
+                                          </p:stCondLst>
+                                          <p:endCondLst>
+                                            <p:cond evt="onStopAudio" delay="0">
+                                              <p:tgtEl>
+                                                <p:sldTgt/>
+                                              </p:tgtEl>
+                                            </p:cond>
+                                          </p:endCondLst>
+                                        </p:cTn>
+                                        <p:tgtEl>
+                                          <p:sndTgt r:embed="rIdSnd2" name="ding.wav"/>
+                                        </p:tgtEl>
+                                      </p:cMediaNode>
+                                    </p:audio>
                                   </p:childTnLst>
                                 </p:cTn>
                               </p:par>
@@ -12842,6 +14191,25 @@
                                         </p:tgtEl>
                                       </p:cBhvr>
                                     </p:animEffect>
+                                    <p:audio>
+                                      <p:cMediaNode vol="80000">
+                                        <p:cTn id="1003" display="0">
+                                          <p:stCondLst>
+                                            <p:cond delay="0"/>
+                                          </p:stCondLst>
+                                          <p:endCondLst>
+                                            <p:cond evt="onStopAudio" delay="0">
+                                              <p:tgtEl>
+                                                <p:sldTgt/>
+                                              </p:tgtEl>
+                                            </p:cond>
+                                          </p:endCondLst>
+                                        </p:cTn>
+                                        <p:tgtEl>
+                                          <p:sndTgt r:embed="rIdSnd3" name="tick.wav"/>
+                                        </p:tgtEl>
+                                      </p:cMediaNode>
+                                    </p:audio>
                                   </p:childTnLst>
                                 </p:cTn>
                               </p:par>
@@ -12895,6 +14263,25 @@
                                         </p:tgtEl>
                                       </p:cBhvr>
                                     </p:animEffect>
+                                    <p:audio>
+                                      <p:cMediaNode vol="80000">
+                                        <p:cTn id="1004" display="0">
+                                          <p:stCondLst>
+                                            <p:cond delay="0"/>
+                                          </p:stCondLst>
+                                          <p:endCondLst>
+                                            <p:cond evt="onStopAudio" delay="0">
+                                              <p:tgtEl>
+                                                <p:sldTgt/>
+                                              </p:tgtEl>
+                                            </p:cond>
+                                          </p:endCondLst>
+                                        </p:cTn>
+                                        <p:tgtEl>
+                                          <p:sndTgt r:embed="rIdSnd1" name="pop.wav"/>
+                                        </p:tgtEl>
+                                      </p:cMediaNode>
+                                    </p:audio>
                                   </p:childTnLst>
                                 </p:cTn>
                               </p:par>
@@ -12948,6 +14335,25 @@
                                         </p:tgtEl>
                                       </p:cBhvr>
                                     </p:animEffect>
+                                    <p:audio>
+                                      <p:cMediaNode vol="80000">
+                                        <p:cTn id="1005" display="0">
+                                          <p:stCondLst>
+                                            <p:cond delay="0"/>
+                                          </p:stCondLst>
+                                          <p:endCondLst>
+                                            <p:cond evt="onStopAudio" delay="0">
+                                              <p:tgtEl>
+                                                <p:sldTgt/>
+                                              </p:tgtEl>
+                                            </p:cond>
+                                          </p:endCondLst>
+                                        </p:cTn>
+                                        <p:tgtEl>
+                                          <p:sndTgt r:embed="rIdSnd2" name="ding.wav"/>
+                                        </p:tgtEl>
+                                      </p:cMediaNode>
+                                    </p:audio>
                                   </p:childTnLst>
                                 </p:cTn>
                               </p:par>
@@ -13001,6 +14407,25 @@
                                         </p:tgtEl>
                                       </p:cBhvr>
                                     </p:animEffect>
+                                    <p:audio>
+                                      <p:cMediaNode vol="80000">
+                                        <p:cTn id="1006" display="0">
+                                          <p:stCondLst>
+                                            <p:cond delay="0"/>
+                                          </p:stCondLst>
+                                          <p:endCondLst>
+                                            <p:cond evt="onStopAudio" delay="0">
+                                              <p:tgtEl>
+                                                <p:sldTgt/>
+                                              </p:tgtEl>
+                                            </p:cond>
+                                          </p:endCondLst>
+                                        </p:cTn>
+                                        <p:tgtEl>
+                                          <p:sndTgt r:embed="rIdSnd3" name="tick.wav"/>
+                                        </p:tgtEl>
+                                      </p:cMediaNode>
+                                    </p:audio>
                                   </p:childTnLst>
                                 </p:cTn>
                               </p:par>
@@ -13054,6 +14479,25 @@
                                         </p:tgtEl>
                                       </p:cBhvr>
                                     </p:animEffect>
+                                    <p:audio>
+                                      <p:cMediaNode vol="80000">
+                                        <p:cTn id="1007" display="0">
+                                          <p:stCondLst>
+                                            <p:cond delay="0"/>
+                                          </p:stCondLst>
+                                          <p:endCondLst>
+                                            <p:cond evt="onStopAudio" delay="0">
+                                              <p:tgtEl>
+                                                <p:sldTgt/>
+                                              </p:tgtEl>
+                                            </p:cond>
+                                          </p:endCondLst>
+                                        </p:cTn>
+                                        <p:tgtEl>
+                                          <p:sndTgt r:embed="rIdSnd4" name="win.wav"/>
+                                        </p:tgtEl>
+                                      </p:cMediaNode>
+                                    </p:audio>
                                   </p:childTnLst>
                                 </p:cTn>
                               </p:par>
@@ -13750,6 +15194,25 @@
                                         </p:tgtEl>
                                       </p:cBhvr>
                                     </p:animEffect>
+                                    <p:audio>
+                                      <p:cMediaNode vol="80000">
+                                        <p:cTn id="1001" display="0">
+                                          <p:stCondLst>
+                                            <p:cond delay="0"/>
+                                          </p:stCondLst>
+                                          <p:endCondLst>
+                                            <p:cond evt="onStopAudio" delay="0">
+                                              <p:tgtEl>
+                                                <p:sldTgt/>
+                                              </p:tgtEl>
+                                            </p:cond>
+                                          </p:endCondLst>
+                                        </p:cTn>
+                                        <p:tgtEl>
+                                          <p:sndTgt r:embed="rIdSnd1" name="pop.wav"/>
+                                        </p:tgtEl>
+                                      </p:cMediaNode>
+                                    </p:audio>
                                   </p:childTnLst>
                                 </p:cTn>
                               </p:par>
@@ -13803,6 +15266,25 @@
                                         </p:tgtEl>
                                       </p:cBhvr>
                                     </p:animEffect>
+                                    <p:audio>
+                                      <p:cMediaNode vol="80000">
+                                        <p:cTn id="1002" display="0">
+                                          <p:stCondLst>
+                                            <p:cond delay="0"/>
+                                          </p:stCondLst>
+                                          <p:endCondLst>
+                                            <p:cond evt="onStopAudio" delay="0">
+                                              <p:tgtEl>
+                                                <p:sldTgt/>
+                                              </p:tgtEl>
+                                            </p:cond>
+                                          </p:endCondLst>
+                                        </p:cTn>
+                                        <p:tgtEl>
+                                          <p:sndTgt r:embed="rIdSnd2" name="ding.wav"/>
+                                        </p:tgtEl>
+                                      </p:cMediaNode>
+                                    </p:audio>
                                   </p:childTnLst>
                                 </p:cTn>
                               </p:par>
@@ -13856,6 +15338,25 @@
                                         </p:tgtEl>
                                       </p:cBhvr>
                                     </p:animEffect>
+                                    <p:audio>
+                                      <p:cMediaNode vol="80000">
+                                        <p:cTn id="1003" display="0">
+                                          <p:stCondLst>
+                                            <p:cond delay="0"/>
+                                          </p:stCondLst>
+                                          <p:endCondLst>
+                                            <p:cond evt="onStopAudio" delay="0">
+                                              <p:tgtEl>
+                                                <p:sldTgt/>
+                                              </p:tgtEl>
+                                            </p:cond>
+                                          </p:endCondLst>
+                                        </p:cTn>
+                                        <p:tgtEl>
+                                          <p:sndTgt r:embed="rIdSnd3" name="tick.wav"/>
+                                        </p:tgtEl>
+                                      </p:cMediaNode>
+                                    </p:audio>
                                   </p:childTnLst>
                                 </p:cTn>
                               </p:par>
@@ -13909,6 +15410,25 @@
                                         </p:tgtEl>
                                       </p:cBhvr>
                                     </p:animEffect>
+                                    <p:audio>
+                                      <p:cMediaNode vol="80000">
+                                        <p:cTn id="1004" display="0">
+                                          <p:stCondLst>
+                                            <p:cond delay="0"/>
+                                          </p:stCondLst>
+                                          <p:endCondLst>
+                                            <p:cond evt="onStopAudio" delay="0">
+                                              <p:tgtEl>
+                                                <p:sldTgt/>
+                                              </p:tgtEl>
+                                            </p:cond>
+                                          </p:endCondLst>
+                                        </p:cTn>
+                                        <p:tgtEl>
+                                          <p:sndTgt r:embed="rIdSnd1" name="pop.wav"/>
+                                        </p:tgtEl>
+                                      </p:cMediaNode>
+                                    </p:audio>
                                   </p:childTnLst>
                                 </p:cTn>
                               </p:par>
@@ -13962,6 +15482,25 @@
                                         </p:tgtEl>
                                       </p:cBhvr>
                                     </p:animEffect>
+                                    <p:audio>
+                                      <p:cMediaNode vol="80000">
+                                        <p:cTn id="1005" display="0">
+                                          <p:stCondLst>
+                                            <p:cond delay="0"/>
+                                          </p:stCondLst>
+                                          <p:endCondLst>
+                                            <p:cond evt="onStopAudio" delay="0">
+                                              <p:tgtEl>
+                                                <p:sldTgt/>
+                                              </p:tgtEl>
+                                            </p:cond>
+                                          </p:endCondLst>
+                                        </p:cTn>
+                                        <p:tgtEl>
+                                          <p:sndTgt r:embed="rIdSnd2" name="ding.wav"/>
+                                        </p:tgtEl>
+                                      </p:cMediaNode>
+                                    </p:audio>
                                   </p:childTnLst>
                                 </p:cTn>
                               </p:par>
@@ -14015,6 +15554,25 @@
                                         </p:tgtEl>
                                       </p:cBhvr>
                                     </p:animEffect>
+                                    <p:audio>
+                                      <p:cMediaNode vol="80000">
+                                        <p:cTn id="1006" display="0">
+                                          <p:stCondLst>
+                                            <p:cond delay="0"/>
+                                          </p:stCondLst>
+                                          <p:endCondLst>
+                                            <p:cond evt="onStopAudio" delay="0">
+                                              <p:tgtEl>
+                                                <p:sldTgt/>
+                                              </p:tgtEl>
+                                            </p:cond>
+                                          </p:endCondLst>
+                                        </p:cTn>
+                                        <p:tgtEl>
+                                          <p:sndTgt r:embed="rIdSnd3" name="tick.wav"/>
+                                        </p:tgtEl>
+                                      </p:cMediaNode>
+                                    </p:audio>
                                   </p:childTnLst>
                                 </p:cTn>
                               </p:par>
@@ -14068,6 +15626,25 @@
                                         </p:tgtEl>
                                       </p:cBhvr>
                                     </p:animEffect>
+                                    <p:audio>
+                                      <p:cMediaNode vol="80000">
+                                        <p:cTn id="1007" display="0">
+                                          <p:stCondLst>
+                                            <p:cond delay="0"/>
+                                          </p:stCondLst>
+                                          <p:endCondLst>
+                                            <p:cond evt="onStopAudio" delay="0">
+                                              <p:tgtEl>
+                                                <p:sldTgt/>
+                                              </p:tgtEl>
+                                            </p:cond>
+                                          </p:endCondLst>
+                                        </p:cTn>
+                                        <p:tgtEl>
+                                          <p:sndTgt r:embed="rIdSnd4" name="win.wav"/>
+                                        </p:tgtEl>
+                                      </p:cMediaNode>
+                                    </p:audio>
                                   </p:childTnLst>
                                 </p:cTn>
                               </p:par>
@@ -14764,6 +16341,25 @@
                                         </p:tgtEl>
                                       </p:cBhvr>
                                     </p:animEffect>
+                                    <p:audio>
+                                      <p:cMediaNode vol="80000">
+                                        <p:cTn id="1001" display="0">
+                                          <p:stCondLst>
+                                            <p:cond delay="0"/>
+                                          </p:stCondLst>
+                                          <p:endCondLst>
+                                            <p:cond evt="onStopAudio" delay="0">
+                                              <p:tgtEl>
+                                                <p:sldTgt/>
+                                              </p:tgtEl>
+                                            </p:cond>
+                                          </p:endCondLst>
+                                        </p:cTn>
+                                        <p:tgtEl>
+                                          <p:sndTgt r:embed="rIdSnd1" name="pop.wav"/>
+                                        </p:tgtEl>
+                                      </p:cMediaNode>
+                                    </p:audio>
                                   </p:childTnLst>
                                 </p:cTn>
                               </p:par>
@@ -14817,6 +16413,25 @@
                                         </p:tgtEl>
                                       </p:cBhvr>
                                     </p:animEffect>
+                                    <p:audio>
+                                      <p:cMediaNode vol="80000">
+                                        <p:cTn id="1002" display="0">
+                                          <p:stCondLst>
+                                            <p:cond delay="0"/>
+                                          </p:stCondLst>
+                                          <p:endCondLst>
+                                            <p:cond evt="onStopAudio" delay="0">
+                                              <p:tgtEl>
+                                                <p:sldTgt/>
+                                              </p:tgtEl>
+                                            </p:cond>
+                                          </p:endCondLst>
+                                        </p:cTn>
+                                        <p:tgtEl>
+                                          <p:sndTgt r:embed="rIdSnd2" name="ding.wav"/>
+                                        </p:tgtEl>
+                                      </p:cMediaNode>
+                                    </p:audio>
                                   </p:childTnLst>
                                 </p:cTn>
                               </p:par>
@@ -14870,6 +16485,25 @@
                                         </p:tgtEl>
                                       </p:cBhvr>
                                     </p:animEffect>
+                                    <p:audio>
+                                      <p:cMediaNode vol="80000">
+                                        <p:cTn id="1003" display="0">
+                                          <p:stCondLst>
+                                            <p:cond delay="0"/>
+                                          </p:stCondLst>
+                                          <p:endCondLst>
+                                            <p:cond evt="onStopAudio" delay="0">
+                                              <p:tgtEl>
+                                                <p:sldTgt/>
+                                              </p:tgtEl>
+                                            </p:cond>
+                                          </p:endCondLst>
+                                        </p:cTn>
+                                        <p:tgtEl>
+                                          <p:sndTgt r:embed="rIdSnd3" name="tick.wav"/>
+                                        </p:tgtEl>
+                                      </p:cMediaNode>
+                                    </p:audio>
                                   </p:childTnLst>
                                 </p:cTn>
                               </p:par>
@@ -14923,6 +16557,25 @@
                                         </p:tgtEl>
                                       </p:cBhvr>
                                     </p:animEffect>
+                                    <p:audio>
+                                      <p:cMediaNode vol="80000">
+                                        <p:cTn id="1004" display="0">
+                                          <p:stCondLst>
+                                            <p:cond delay="0"/>
+                                          </p:stCondLst>
+                                          <p:endCondLst>
+                                            <p:cond evt="onStopAudio" delay="0">
+                                              <p:tgtEl>
+                                                <p:sldTgt/>
+                                              </p:tgtEl>
+                                            </p:cond>
+                                          </p:endCondLst>
+                                        </p:cTn>
+                                        <p:tgtEl>
+                                          <p:sndTgt r:embed="rIdSnd1" name="pop.wav"/>
+                                        </p:tgtEl>
+                                      </p:cMediaNode>
+                                    </p:audio>
                                   </p:childTnLst>
                                 </p:cTn>
                               </p:par>
@@ -14976,6 +16629,25 @@
                                         </p:tgtEl>
                                       </p:cBhvr>
                                     </p:animEffect>
+                                    <p:audio>
+                                      <p:cMediaNode vol="80000">
+                                        <p:cTn id="1005" display="0">
+                                          <p:stCondLst>
+                                            <p:cond delay="0"/>
+                                          </p:stCondLst>
+                                          <p:endCondLst>
+                                            <p:cond evt="onStopAudio" delay="0">
+                                              <p:tgtEl>
+                                                <p:sldTgt/>
+                                              </p:tgtEl>
+                                            </p:cond>
+                                          </p:endCondLst>
+                                        </p:cTn>
+                                        <p:tgtEl>
+                                          <p:sndTgt r:embed="rIdSnd2" name="ding.wav"/>
+                                        </p:tgtEl>
+                                      </p:cMediaNode>
+                                    </p:audio>
                                   </p:childTnLst>
                                 </p:cTn>
                               </p:par>
@@ -15029,6 +16701,25 @@
                                         </p:tgtEl>
                                       </p:cBhvr>
                                     </p:animEffect>
+                                    <p:audio>
+                                      <p:cMediaNode vol="80000">
+                                        <p:cTn id="1006" display="0">
+                                          <p:stCondLst>
+                                            <p:cond delay="0"/>
+                                          </p:stCondLst>
+                                          <p:endCondLst>
+                                            <p:cond evt="onStopAudio" delay="0">
+                                              <p:tgtEl>
+                                                <p:sldTgt/>
+                                              </p:tgtEl>
+                                            </p:cond>
+                                          </p:endCondLst>
+                                        </p:cTn>
+                                        <p:tgtEl>
+                                          <p:sndTgt r:embed="rIdSnd3" name="tick.wav"/>
+                                        </p:tgtEl>
+                                      </p:cMediaNode>
+                                    </p:audio>
                                   </p:childTnLst>
                                 </p:cTn>
                               </p:par>
@@ -15082,6 +16773,25 @@
                                         </p:tgtEl>
                                       </p:cBhvr>
                                     </p:animEffect>
+                                    <p:audio>
+                                      <p:cMediaNode vol="80000">
+                                        <p:cTn id="1007" display="0">
+                                          <p:stCondLst>
+                                            <p:cond delay="0"/>
+                                          </p:stCondLst>
+                                          <p:endCondLst>
+                                            <p:cond evt="onStopAudio" delay="0">
+                                              <p:tgtEl>
+                                                <p:sldTgt/>
+                                              </p:tgtEl>
+                                            </p:cond>
+                                          </p:endCondLst>
+                                        </p:cTn>
+                                        <p:tgtEl>
+                                          <p:sndTgt r:embed="rIdSnd4" name="win.wav"/>
+                                        </p:tgtEl>
+                                      </p:cMediaNode>
+                                    </p:audio>
                                   </p:childTnLst>
                                 </p:cTn>
                               </p:par>
@@ -15778,6 +17488,25 @@
                                         </p:tgtEl>
                                       </p:cBhvr>
                                     </p:animEffect>
+                                    <p:audio>
+                                      <p:cMediaNode vol="80000">
+                                        <p:cTn id="1001" display="0">
+                                          <p:stCondLst>
+                                            <p:cond delay="0"/>
+                                          </p:stCondLst>
+                                          <p:endCondLst>
+                                            <p:cond evt="onStopAudio" delay="0">
+                                              <p:tgtEl>
+                                                <p:sldTgt/>
+                                              </p:tgtEl>
+                                            </p:cond>
+                                          </p:endCondLst>
+                                        </p:cTn>
+                                        <p:tgtEl>
+                                          <p:sndTgt r:embed="rIdSnd1" name="pop.wav"/>
+                                        </p:tgtEl>
+                                      </p:cMediaNode>
+                                    </p:audio>
                                   </p:childTnLst>
                                 </p:cTn>
                               </p:par>
@@ -15831,6 +17560,25 @@
                                         </p:tgtEl>
                                       </p:cBhvr>
                                     </p:animEffect>
+                                    <p:audio>
+                                      <p:cMediaNode vol="80000">
+                                        <p:cTn id="1002" display="0">
+                                          <p:stCondLst>
+                                            <p:cond delay="0"/>
+                                          </p:stCondLst>
+                                          <p:endCondLst>
+                                            <p:cond evt="onStopAudio" delay="0">
+                                              <p:tgtEl>
+                                                <p:sldTgt/>
+                                              </p:tgtEl>
+                                            </p:cond>
+                                          </p:endCondLst>
+                                        </p:cTn>
+                                        <p:tgtEl>
+                                          <p:sndTgt r:embed="rIdSnd2" name="ding.wav"/>
+                                        </p:tgtEl>
+                                      </p:cMediaNode>
+                                    </p:audio>
                                   </p:childTnLst>
                                 </p:cTn>
                               </p:par>
@@ -15884,6 +17632,25 @@
                                         </p:tgtEl>
                                       </p:cBhvr>
                                     </p:animEffect>
+                                    <p:audio>
+                                      <p:cMediaNode vol="80000">
+                                        <p:cTn id="1003" display="0">
+                                          <p:stCondLst>
+                                            <p:cond delay="0"/>
+                                          </p:stCondLst>
+                                          <p:endCondLst>
+                                            <p:cond evt="onStopAudio" delay="0">
+                                              <p:tgtEl>
+                                                <p:sldTgt/>
+                                              </p:tgtEl>
+                                            </p:cond>
+                                          </p:endCondLst>
+                                        </p:cTn>
+                                        <p:tgtEl>
+                                          <p:sndTgt r:embed="rIdSnd3" name="tick.wav"/>
+                                        </p:tgtEl>
+                                      </p:cMediaNode>
+                                    </p:audio>
                                   </p:childTnLst>
                                 </p:cTn>
                               </p:par>
@@ -15937,6 +17704,25 @@
                                         </p:tgtEl>
                                       </p:cBhvr>
                                     </p:animEffect>
+                                    <p:audio>
+                                      <p:cMediaNode vol="80000">
+                                        <p:cTn id="1004" display="0">
+                                          <p:stCondLst>
+                                            <p:cond delay="0"/>
+                                          </p:stCondLst>
+                                          <p:endCondLst>
+                                            <p:cond evt="onStopAudio" delay="0">
+                                              <p:tgtEl>
+                                                <p:sldTgt/>
+                                              </p:tgtEl>
+                                            </p:cond>
+                                          </p:endCondLst>
+                                        </p:cTn>
+                                        <p:tgtEl>
+                                          <p:sndTgt r:embed="rIdSnd1" name="pop.wav"/>
+                                        </p:tgtEl>
+                                      </p:cMediaNode>
+                                    </p:audio>
                                   </p:childTnLst>
                                 </p:cTn>
                               </p:par>
@@ -15990,6 +17776,25 @@
                                         </p:tgtEl>
                                       </p:cBhvr>
                                     </p:animEffect>
+                                    <p:audio>
+                                      <p:cMediaNode vol="80000">
+                                        <p:cTn id="1005" display="0">
+                                          <p:stCondLst>
+                                            <p:cond delay="0"/>
+                                          </p:stCondLst>
+                                          <p:endCondLst>
+                                            <p:cond evt="onStopAudio" delay="0">
+                                              <p:tgtEl>
+                                                <p:sldTgt/>
+                                              </p:tgtEl>
+                                            </p:cond>
+                                          </p:endCondLst>
+                                        </p:cTn>
+                                        <p:tgtEl>
+                                          <p:sndTgt r:embed="rIdSnd2" name="ding.wav"/>
+                                        </p:tgtEl>
+                                      </p:cMediaNode>
+                                    </p:audio>
                                   </p:childTnLst>
                                 </p:cTn>
                               </p:par>
@@ -16043,6 +17848,25 @@
                                         </p:tgtEl>
                                       </p:cBhvr>
                                     </p:animEffect>
+                                    <p:audio>
+                                      <p:cMediaNode vol="80000">
+                                        <p:cTn id="1006" display="0">
+                                          <p:stCondLst>
+                                            <p:cond delay="0"/>
+                                          </p:stCondLst>
+                                          <p:endCondLst>
+                                            <p:cond evt="onStopAudio" delay="0">
+                                              <p:tgtEl>
+                                                <p:sldTgt/>
+                                              </p:tgtEl>
+                                            </p:cond>
+                                          </p:endCondLst>
+                                        </p:cTn>
+                                        <p:tgtEl>
+                                          <p:sndTgt r:embed="rIdSnd3" name="tick.wav"/>
+                                        </p:tgtEl>
+                                      </p:cMediaNode>
+                                    </p:audio>
                                   </p:childTnLst>
                                 </p:cTn>
                               </p:par>
@@ -16096,6 +17920,25 @@
                                         </p:tgtEl>
                                       </p:cBhvr>
                                     </p:animEffect>
+                                    <p:audio>
+                                      <p:cMediaNode vol="80000">
+                                        <p:cTn id="1007" display="0">
+                                          <p:stCondLst>
+                                            <p:cond delay="0"/>
+                                          </p:stCondLst>
+                                          <p:endCondLst>
+                                            <p:cond evt="onStopAudio" delay="0">
+                                              <p:tgtEl>
+                                                <p:sldTgt/>
+                                              </p:tgtEl>
+                                            </p:cond>
+                                          </p:endCondLst>
+                                        </p:cTn>
+                                        <p:tgtEl>
+                                          <p:sndTgt r:embed="rIdSnd4" name="win.wav"/>
+                                        </p:tgtEl>
+                                      </p:cMediaNode>
+                                    </p:audio>
                                   </p:childTnLst>
                                 </p:cTn>
                               </p:par>
@@ -16792,6 +18635,25 @@
                                         </p:tgtEl>
                                       </p:cBhvr>
                                     </p:animEffect>
+                                    <p:audio>
+                                      <p:cMediaNode vol="80000">
+                                        <p:cTn id="1001" display="0">
+                                          <p:stCondLst>
+                                            <p:cond delay="0"/>
+                                          </p:stCondLst>
+                                          <p:endCondLst>
+                                            <p:cond evt="onStopAudio" delay="0">
+                                              <p:tgtEl>
+                                                <p:sldTgt/>
+                                              </p:tgtEl>
+                                            </p:cond>
+                                          </p:endCondLst>
+                                        </p:cTn>
+                                        <p:tgtEl>
+                                          <p:sndTgt r:embed="rIdSnd1" name="pop.wav"/>
+                                        </p:tgtEl>
+                                      </p:cMediaNode>
+                                    </p:audio>
                                   </p:childTnLst>
                                 </p:cTn>
                               </p:par>
@@ -16845,6 +18707,25 @@
                                         </p:tgtEl>
                                       </p:cBhvr>
                                     </p:animEffect>
+                                    <p:audio>
+                                      <p:cMediaNode vol="80000">
+                                        <p:cTn id="1002" display="0">
+                                          <p:stCondLst>
+                                            <p:cond delay="0"/>
+                                          </p:stCondLst>
+                                          <p:endCondLst>
+                                            <p:cond evt="onStopAudio" delay="0">
+                                              <p:tgtEl>
+                                                <p:sldTgt/>
+                                              </p:tgtEl>
+                                            </p:cond>
+                                          </p:endCondLst>
+                                        </p:cTn>
+                                        <p:tgtEl>
+                                          <p:sndTgt r:embed="rIdSnd2" name="ding.wav"/>
+                                        </p:tgtEl>
+                                      </p:cMediaNode>
+                                    </p:audio>
                                   </p:childTnLst>
                                 </p:cTn>
                               </p:par>
@@ -16898,6 +18779,25 @@
                                         </p:tgtEl>
                                       </p:cBhvr>
                                     </p:animEffect>
+                                    <p:audio>
+                                      <p:cMediaNode vol="80000">
+                                        <p:cTn id="1003" display="0">
+                                          <p:stCondLst>
+                                            <p:cond delay="0"/>
+                                          </p:stCondLst>
+                                          <p:endCondLst>
+                                            <p:cond evt="onStopAudio" delay="0">
+                                              <p:tgtEl>
+                                                <p:sldTgt/>
+                                              </p:tgtEl>
+                                            </p:cond>
+                                          </p:endCondLst>
+                                        </p:cTn>
+                                        <p:tgtEl>
+                                          <p:sndTgt r:embed="rIdSnd3" name="tick.wav"/>
+                                        </p:tgtEl>
+                                      </p:cMediaNode>
+                                    </p:audio>
                                   </p:childTnLst>
                                 </p:cTn>
                               </p:par>
@@ -16951,6 +18851,25 @@
                                         </p:tgtEl>
                                       </p:cBhvr>
                                     </p:animEffect>
+                                    <p:audio>
+                                      <p:cMediaNode vol="80000">
+                                        <p:cTn id="1004" display="0">
+                                          <p:stCondLst>
+                                            <p:cond delay="0"/>
+                                          </p:stCondLst>
+                                          <p:endCondLst>
+                                            <p:cond evt="onStopAudio" delay="0">
+                                              <p:tgtEl>
+                                                <p:sldTgt/>
+                                              </p:tgtEl>
+                                            </p:cond>
+                                          </p:endCondLst>
+                                        </p:cTn>
+                                        <p:tgtEl>
+                                          <p:sndTgt r:embed="rIdSnd1" name="pop.wav"/>
+                                        </p:tgtEl>
+                                      </p:cMediaNode>
+                                    </p:audio>
                                   </p:childTnLst>
                                 </p:cTn>
                               </p:par>
@@ -17004,6 +18923,25 @@
                                         </p:tgtEl>
                                       </p:cBhvr>
                                     </p:animEffect>
+                                    <p:audio>
+                                      <p:cMediaNode vol="80000">
+                                        <p:cTn id="1005" display="0">
+                                          <p:stCondLst>
+                                            <p:cond delay="0"/>
+                                          </p:stCondLst>
+                                          <p:endCondLst>
+                                            <p:cond evt="onStopAudio" delay="0">
+                                              <p:tgtEl>
+                                                <p:sldTgt/>
+                                              </p:tgtEl>
+                                            </p:cond>
+                                          </p:endCondLst>
+                                        </p:cTn>
+                                        <p:tgtEl>
+                                          <p:sndTgt r:embed="rIdSnd2" name="ding.wav"/>
+                                        </p:tgtEl>
+                                      </p:cMediaNode>
+                                    </p:audio>
                                   </p:childTnLst>
                                 </p:cTn>
                               </p:par>
@@ -17057,6 +18995,25 @@
                                         </p:tgtEl>
                                       </p:cBhvr>
                                     </p:animEffect>
+                                    <p:audio>
+                                      <p:cMediaNode vol="80000">
+                                        <p:cTn id="1006" display="0">
+                                          <p:stCondLst>
+                                            <p:cond delay="0"/>
+                                          </p:stCondLst>
+                                          <p:endCondLst>
+                                            <p:cond evt="onStopAudio" delay="0">
+                                              <p:tgtEl>
+                                                <p:sldTgt/>
+                                              </p:tgtEl>
+                                            </p:cond>
+                                          </p:endCondLst>
+                                        </p:cTn>
+                                        <p:tgtEl>
+                                          <p:sndTgt r:embed="rIdSnd3" name="tick.wav"/>
+                                        </p:tgtEl>
+                                      </p:cMediaNode>
+                                    </p:audio>
                                   </p:childTnLst>
                                 </p:cTn>
                               </p:par>
@@ -17110,6 +19067,25 @@
                                         </p:tgtEl>
                                       </p:cBhvr>
                                     </p:animEffect>
+                                    <p:audio>
+                                      <p:cMediaNode vol="80000">
+                                        <p:cTn id="1007" display="0">
+                                          <p:stCondLst>
+                                            <p:cond delay="0"/>
+                                          </p:stCondLst>
+                                          <p:endCondLst>
+                                            <p:cond evt="onStopAudio" delay="0">
+                                              <p:tgtEl>
+                                                <p:sldTgt/>
+                                              </p:tgtEl>
+                                            </p:cond>
+                                          </p:endCondLst>
+                                        </p:cTn>
+                                        <p:tgtEl>
+                                          <p:sndTgt r:embed="rIdSnd4" name="win.wav"/>
+                                        </p:tgtEl>
+                                      </p:cMediaNode>
+                                    </p:audio>
                                   </p:childTnLst>
                                 </p:cTn>
                               </p:par>
@@ -17806,6 +19782,25 @@
                                         </p:tgtEl>
                                       </p:cBhvr>
                                     </p:animEffect>
+                                    <p:audio>
+                                      <p:cMediaNode vol="80000">
+                                        <p:cTn id="1001" display="0">
+                                          <p:stCondLst>
+                                            <p:cond delay="0"/>
+                                          </p:stCondLst>
+                                          <p:endCondLst>
+                                            <p:cond evt="onStopAudio" delay="0">
+                                              <p:tgtEl>
+                                                <p:sldTgt/>
+                                              </p:tgtEl>
+                                            </p:cond>
+                                          </p:endCondLst>
+                                        </p:cTn>
+                                        <p:tgtEl>
+                                          <p:sndTgt r:embed="rIdSnd1" name="pop.wav"/>
+                                        </p:tgtEl>
+                                      </p:cMediaNode>
+                                    </p:audio>
                                   </p:childTnLst>
                                 </p:cTn>
                               </p:par>
@@ -17859,6 +19854,25 @@
                                         </p:tgtEl>
                                       </p:cBhvr>
                                     </p:animEffect>
+                                    <p:audio>
+                                      <p:cMediaNode vol="80000">
+                                        <p:cTn id="1002" display="0">
+                                          <p:stCondLst>
+                                            <p:cond delay="0"/>
+                                          </p:stCondLst>
+                                          <p:endCondLst>
+                                            <p:cond evt="onStopAudio" delay="0">
+                                              <p:tgtEl>
+                                                <p:sldTgt/>
+                                              </p:tgtEl>
+                                            </p:cond>
+                                          </p:endCondLst>
+                                        </p:cTn>
+                                        <p:tgtEl>
+                                          <p:sndTgt r:embed="rIdSnd2" name="ding.wav"/>
+                                        </p:tgtEl>
+                                      </p:cMediaNode>
+                                    </p:audio>
                                   </p:childTnLst>
                                 </p:cTn>
                               </p:par>
@@ -17912,6 +19926,25 @@
                                         </p:tgtEl>
                                       </p:cBhvr>
                                     </p:animEffect>
+                                    <p:audio>
+                                      <p:cMediaNode vol="80000">
+                                        <p:cTn id="1003" display="0">
+                                          <p:stCondLst>
+                                            <p:cond delay="0"/>
+                                          </p:stCondLst>
+                                          <p:endCondLst>
+                                            <p:cond evt="onStopAudio" delay="0">
+                                              <p:tgtEl>
+                                                <p:sldTgt/>
+                                              </p:tgtEl>
+                                            </p:cond>
+                                          </p:endCondLst>
+                                        </p:cTn>
+                                        <p:tgtEl>
+                                          <p:sndTgt r:embed="rIdSnd3" name="tick.wav"/>
+                                        </p:tgtEl>
+                                      </p:cMediaNode>
+                                    </p:audio>
                                   </p:childTnLst>
                                 </p:cTn>
                               </p:par>
@@ -17965,6 +19998,25 @@
                                         </p:tgtEl>
                                       </p:cBhvr>
                                     </p:animEffect>
+                                    <p:audio>
+                                      <p:cMediaNode vol="80000">
+                                        <p:cTn id="1004" display="0">
+                                          <p:stCondLst>
+                                            <p:cond delay="0"/>
+                                          </p:stCondLst>
+                                          <p:endCondLst>
+                                            <p:cond evt="onStopAudio" delay="0">
+                                              <p:tgtEl>
+                                                <p:sldTgt/>
+                                              </p:tgtEl>
+                                            </p:cond>
+                                          </p:endCondLst>
+                                        </p:cTn>
+                                        <p:tgtEl>
+                                          <p:sndTgt r:embed="rIdSnd1" name="pop.wav"/>
+                                        </p:tgtEl>
+                                      </p:cMediaNode>
+                                    </p:audio>
                                   </p:childTnLst>
                                 </p:cTn>
                               </p:par>
@@ -18018,6 +20070,25 @@
                                         </p:tgtEl>
                                       </p:cBhvr>
                                     </p:animEffect>
+                                    <p:audio>
+                                      <p:cMediaNode vol="80000">
+                                        <p:cTn id="1005" display="0">
+                                          <p:stCondLst>
+                                            <p:cond delay="0"/>
+                                          </p:stCondLst>
+                                          <p:endCondLst>
+                                            <p:cond evt="onStopAudio" delay="0">
+                                              <p:tgtEl>
+                                                <p:sldTgt/>
+                                              </p:tgtEl>
+                                            </p:cond>
+                                          </p:endCondLst>
+                                        </p:cTn>
+                                        <p:tgtEl>
+                                          <p:sndTgt r:embed="rIdSnd2" name="ding.wav"/>
+                                        </p:tgtEl>
+                                      </p:cMediaNode>
+                                    </p:audio>
                                   </p:childTnLst>
                                 </p:cTn>
                               </p:par>
@@ -18071,6 +20142,25 @@
                                         </p:tgtEl>
                                       </p:cBhvr>
                                     </p:animEffect>
+                                    <p:audio>
+                                      <p:cMediaNode vol="80000">
+                                        <p:cTn id="1006" display="0">
+                                          <p:stCondLst>
+                                            <p:cond delay="0"/>
+                                          </p:stCondLst>
+                                          <p:endCondLst>
+                                            <p:cond evt="onStopAudio" delay="0">
+                                              <p:tgtEl>
+                                                <p:sldTgt/>
+                                              </p:tgtEl>
+                                            </p:cond>
+                                          </p:endCondLst>
+                                        </p:cTn>
+                                        <p:tgtEl>
+                                          <p:sndTgt r:embed="rIdSnd3" name="tick.wav"/>
+                                        </p:tgtEl>
+                                      </p:cMediaNode>
+                                    </p:audio>
                                   </p:childTnLst>
                                 </p:cTn>
                               </p:par>
@@ -18124,6 +20214,25 @@
                                         </p:tgtEl>
                                       </p:cBhvr>
                                     </p:animEffect>
+                                    <p:audio>
+                                      <p:cMediaNode vol="80000">
+                                        <p:cTn id="1007" display="0">
+                                          <p:stCondLst>
+                                            <p:cond delay="0"/>
+                                          </p:stCondLst>
+                                          <p:endCondLst>
+                                            <p:cond evt="onStopAudio" delay="0">
+                                              <p:tgtEl>
+                                                <p:sldTgt/>
+                                              </p:tgtEl>
+                                            </p:cond>
+                                          </p:endCondLst>
+                                        </p:cTn>
+                                        <p:tgtEl>
+                                          <p:sndTgt r:embed="rIdSnd4" name="win.wav"/>
+                                        </p:tgtEl>
+                                      </p:cMediaNode>
+                                    </p:audio>
                                   </p:childTnLst>
                                 </p:cTn>
                               </p:par>
@@ -18820,6 +20929,25 @@
                                         </p:tgtEl>
                                       </p:cBhvr>
                                     </p:animEffect>
+                                    <p:audio>
+                                      <p:cMediaNode vol="80000">
+                                        <p:cTn id="1001" display="0">
+                                          <p:stCondLst>
+                                            <p:cond delay="0"/>
+                                          </p:stCondLst>
+                                          <p:endCondLst>
+                                            <p:cond evt="onStopAudio" delay="0">
+                                              <p:tgtEl>
+                                                <p:sldTgt/>
+                                              </p:tgtEl>
+                                            </p:cond>
+                                          </p:endCondLst>
+                                        </p:cTn>
+                                        <p:tgtEl>
+                                          <p:sndTgt r:embed="rIdSnd1" name="pop.wav"/>
+                                        </p:tgtEl>
+                                      </p:cMediaNode>
+                                    </p:audio>
                                   </p:childTnLst>
                                 </p:cTn>
                               </p:par>
@@ -18873,6 +21001,25 @@
                                         </p:tgtEl>
                                       </p:cBhvr>
                                     </p:animEffect>
+                                    <p:audio>
+                                      <p:cMediaNode vol="80000">
+                                        <p:cTn id="1002" display="0">
+                                          <p:stCondLst>
+                                            <p:cond delay="0"/>
+                                          </p:stCondLst>
+                                          <p:endCondLst>
+                                            <p:cond evt="onStopAudio" delay="0">
+                                              <p:tgtEl>
+                                                <p:sldTgt/>
+                                              </p:tgtEl>
+                                            </p:cond>
+                                          </p:endCondLst>
+                                        </p:cTn>
+                                        <p:tgtEl>
+                                          <p:sndTgt r:embed="rIdSnd2" name="ding.wav"/>
+                                        </p:tgtEl>
+                                      </p:cMediaNode>
+                                    </p:audio>
                                   </p:childTnLst>
                                 </p:cTn>
                               </p:par>
@@ -18926,6 +21073,25 @@
                                         </p:tgtEl>
                                       </p:cBhvr>
                                     </p:animEffect>
+                                    <p:audio>
+                                      <p:cMediaNode vol="80000">
+                                        <p:cTn id="1003" display="0">
+                                          <p:stCondLst>
+                                            <p:cond delay="0"/>
+                                          </p:stCondLst>
+                                          <p:endCondLst>
+                                            <p:cond evt="onStopAudio" delay="0">
+                                              <p:tgtEl>
+                                                <p:sldTgt/>
+                                              </p:tgtEl>
+                                            </p:cond>
+                                          </p:endCondLst>
+                                        </p:cTn>
+                                        <p:tgtEl>
+                                          <p:sndTgt r:embed="rIdSnd3" name="tick.wav"/>
+                                        </p:tgtEl>
+                                      </p:cMediaNode>
+                                    </p:audio>
                                   </p:childTnLst>
                                 </p:cTn>
                               </p:par>
@@ -18979,6 +21145,25 @@
                                         </p:tgtEl>
                                       </p:cBhvr>
                                     </p:animEffect>
+                                    <p:audio>
+                                      <p:cMediaNode vol="80000">
+                                        <p:cTn id="1004" display="0">
+                                          <p:stCondLst>
+                                            <p:cond delay="0"/>
+                                          </p:stCondLst>
+                                          <p:endCondLst>
+                                            <p:cond evt="onStopAudio" delay="0">
+                                              <p:tgtEl>
+                                                <p:sldTgt/>
+                                              </p:tgtEl>
+                                            </p:cond>
+                                          </p:endCondLst>
+                                        </p:cTn>
+                                        <p:tgtEl>
+                                          <p:sndTgt r:embed="rIdSnd1" name="pop.wav"/>
+                                        </p:tgtEl>
+                                      </p:cMediaNode>
+                                    </p:audio>
                                   </p:childTnLst>
                                 </p:cTn>
                               </p:par>
@@ -19032,6 +21217,25 @@
                                         </p:tgtEl>
                                       </p:cBhvr>
                                     </p:animEffect>
+                                    <p:audio>
+                                      <p:cMediaNode vol="80000">
+                                        <p:cTn id="1005" display="0">
+                                          <p:stCondLst>
+                                            <p:cond delay="0"/>
+                                          </p:stCondLst>
+                                          <p:endCondLst>
+                                            <p:cond evt="onStopAudio" delay="0">
+                                              <p:tgtEl>
+                                                <p:sldTgt/>
+                                              </p:tgtEl>
+                                            </p:cond>
+                                          </p:endCondLst>
+                                        </p:cTn>
+                                        <p:tgtEl>
+                                          <p:sndTgt r:embed="rIdSnd2" name="ding.wav"/>
+                                        </p:tgtEl>
+                                      </p:cMediaNode>
+                                    </p:audio>
                                   </p:childTnLst>
                                 </p:cTn>
                               </p:par>
@@ -19085,6 +21289,25 @@
                                         </p:tgtEl>
                                       </p:cBhvr>
                                     </p:animEffect>
+                                    <p:audio>
+                                      <p:cMediaNode vol="80000">
+                                        <p:cTn id="1006" display="0">
+                                          <p:stCondLst>
+                                            <p:cond delay="0"/>
+                                          </p:stCondLst>
+                                          <p:endCondLst>
+                                            <p:cond evt="onStopAudio" delay="0">
+                                              <p:tgtEl>
+                                                <p:sldTgt/>
+                                              </p:tgtEl>
+                                            </p:cond>
+                                          </p:endCondLst>
+                                        </p:cTn>
+                                        <p:tgtEl>
+                                          <p:sndTgt r:embed="rIdSnd3" name="tick.wav"/>
+                                        </p:tgtEl>
+                                      </p:cMediaNode>
+                                    </p:audio>
                                   </p:childTnLst>
                                 </p:cTn>
                               </p:par>
@@ -19138,6 +21361,25 @@
                                         </p:tgtEl>
                                       </p:cBhvr>
                                     </p:animEffect>
+                                    <p:audio>
+                                      <p:cMediaNode vol="80000">
+                                        <p:cTn id="1007" display="0">
+                                          <p:stCondLst>
+                                            <p:cond delay="0"/>
+                                          </p:stCondLst>
+                                          <p:endCondLst>
+                                            <p:cond evt="onStopAudio" delay="0">
+                                              <p:tgtEl>
+                                                <p:sldTgt/>
+                                              </p:tgtEl>
+                                            </p:cond>
+                                          </p:endCondLst>
+                                        </p:cTn>
+                                        <p:tgtEl>
+                                          <p:sndTgt r:embed="rIdSnd4" name="win.wav"/>
+                                        </p:tgtEl>
+                                      </p:cMediaNode>
+                                    </p:audio>
                                   </p:childTnLst>
                                 </p:cTn>
                               </p:par>
@@ -19834,6 +22076,25 @@
                                         </p:tgtEl>
                                       </p:cBhvr>
                                     </p:animEffect>
+                                    <p:audio>
+                                      <p:cMediaNode vol="80000">
+                                        <p:cTn id="1001" display="0">
+                                          <p:stCondLst>
+                                            <p:cond delay="0"/>
+                                          </p:stCondLst>
+                                          <p:endCondLst>
+                                            <p:cond evt="onStopAudio" delay="0">
+                                              <p:tgtEl>
+                                                <p:sldTgt/>
+                                              </p:tgtEl>
+                                            </p:cond>
+                                          </p:endCondLst>
+                                        </p:cTn>
+                                        <p:tgtEl>
+                                          <p:sndTgt r:embed="rIdSnd1" name="pop.wav"/>
+                                        </p:tgtEl>
+                                      </p:cMediaNode>
+                                    </p:audio>
                                   </p:childTnLst>
                                 </p:cTn>
                               </p:par>
@@ -19887,6 +22148,25 @@
                                         </p:tgtEl>
                                       </p:cBhvr>
                                     </p:animEffect>
+                                    <p:audio>
+                                      <p:cMediaNode vol="80000">
+                                        <p:cTn id="1002" display="0">
+                                          <p:stCondLst>
+                                            <p:cond delay="0"/>
+                                          </p:stCondLst>
+                                          <p:endCondLst>
+                                            <p:cond evt="onStopAudio" delay="0">
+                                              <p:tgtEl>
+                                                <p:sldTgt/>
+                                              </p:tgtEl>
+                                            </p:cond>
+                                          </p:endCondLst>
+                                        </p:cTn>
+                                        <p:tgtEl>
+                                          <p:sndTgt r:embed="rIdSnd2" name="ding.wav"/>
+                                        </p:tgtEl>
+                                      </p:cMediaNode>
+                                    </p:audio>
                                   </p:childTnLst>
                                 </p:cTn>
                               </p:par>
@@ -19940,6 +22220,25 @@
                                         </p:tgtEl>
                                       </p:cBhvr>
                                     </p:animEffect>
+                                    <p:audio>
+                                      <p:cMediaNode vol="80000">
+                                        <p:cTn id="1003" display="0">
+                                          <p:stCondLst>
+                                            <p:cond delay="0"/>
+                                          </p:stCondLst>
+                                          <p:endCondLst>
+                                            <p:cond evt="onStopAudio" delay="0">
+                                              <p:tgtEl>
+                                                <p:sldTgt/>
+                                              </p:tgtEl>
+                                            </p:cond>
+                                          </p:endCondLst>
+                                        </p:cTn>
+                                        <p:tgtEl>
+                                          <p:sndTgt r:embed="rIdSnd3" name="tick.wav"/>
+                                        </p:tgtEl>
+                                      </p:cMediaNode>
+                                    </p:audio>
                                   </p:childTnLst>
                                 </p:cTn>
                               </p:par>
@@ -19993,6 +22292,25 @@
                                         </p:tgtEl>
                                       </p:cBhvr>
                                     </p:animEffect>
+                                    <p:audio>
+                                      <p:cMediaNode vol="80000">
+                                        <p:cTn id="1004" display="0">
+                                          <p:stCondLst>
+                                            <p:cond delay="0"/>
+                                          </p:stCondLst>
+                                          <p:endCondLst>
+                                            <p:cond evt="onStopAudio" delay="0">
+                                              <p:tgtEl>
+                                                <p:sldTgt/>
+                                              </p:tgtEl>
+                                            </p:cond>
+                                          </p:endCondLst>
+                                        </p:cTn>
+                                        <p:tgtEl>
+                                          <p:sndTgt r:embed="rIdSnd1" name="pop.wav"/>
+                                        </p:tgtEl>
+                                      </p:cMediaNode>
+                                    </p:audio>
                                   </p:childTnLst>
                                 </p:cTn>
                               </p:par>
@@ -20046,6 +22364,25 @@
                                         </p:tgtEl>
                                       </p:cBhvr>
                                     </p:animEffect>
+                                    <p:audio>
+                                      <p:cMediaNode vol="80000">
+                                        <p:cTn id="1005" display="0">
+                                          <p:stCondLst>
+                                            <p:cond delay="0"/>
+                                          </p:stCondLst>
+                                          <p:endCondLst>
+                                            <p:cond evt="onStopAudio" delay="0">
+                                              <p:tgtEl>
+                                                <p:sldTgt/>
+                                              </p:tgtEl>
+                                            </p:cond>
+                                          </p:endCondLst>
+                                        </p:cTn>
+                                        <p:tgtEl>
+                                          <p:sndTgt r:embed="rIdSnd2" name="ding.wav"/>
+                                        </p:tgtEl>
+                                      </p:cMediaNode>
+                                    </p:audio>
                                   </p:childTnLst>
                                 </p:cTn>
                               </p:par>
@@ -20099,6 +22436,25 @@
                                         </p:tgtEl>
                                       </p:cBhvr>
                                     </p:animEffect>
+                                    <p:audio>
+                                      <p:cMediaNode vol="80000">
+                                        <p:cTn id="1006" display="0">
+                                          <p:stCondLst>
+                                            <p:cond delay="0"/>
+                                          </p:stCondLst>
+                                          <p:endCondLst>
+                                            <p:cond evt="onStopAudio" delay="0">
+                                              <p:tgtEl>
+                                                <p:sldTgt/>
+                                              </p:tgtEl>
+                                            </p:cond>
+                                          </p:endCondLst>
+                                        </p:cTn>
+                                        <p:tgtEl>
+                                          <p:sndTgt r:embed="rIdSnd3" name="tick.wav"/>
+                                        </p:tgtEl>
+                                      </p:cMediaNode>
+                                    </p:audio>
                                   </p:childTnLst>
                                 </p:cTn>
                               </p:par>
@@ -20152,6 +22508,25 @@
                                         </p:tgtEl>
                                       </p:cBhvr>
                                     </p:animEffect>
+                                    <p:audio>
+                                      <p:cMediaNode vol="80000">
+                                        <p:cTn id="1007" display="0">
+                                          <p:stCondLst>
+                                            <p:cond delay="0"/>
+                                          </p:stCondLst>
+                                          <p:endCondLst>
+                                            <p:cond evt="onStopAudio" delay="0">
+                                              <p:tgtEl>
+                                                <p:sldTgt/>
+                                              </p:tgtEl>
+                                            </p:cond>
+                                          </p:endCondLst>
+                                        </p:cTn>
+                                        <p:tgtEl>
+                                          <p:sndTgt r:embed="rIdSnd4" name="win.wav"/>
+                                        </p:tgtEl>
+                                      </p:cMediaNode>
+                                    </p:audio>
                                   </p:childTnLst>
                                 </p:cTn>
                               </p:par>
@@ -20848,6 +23223,25 @@
                                         </p:tgtEl>
                                       </p:cBhvr>
                                     </p:animEffect>
+                                    <p:audio>
+                                      <p:cMediaNode vol="80000">
+                                        <p:cTn id="1001" display="0">
+                                          <p:stCondLst>
+                                            <p:cond delay="0"/>
+                                          </p:stCondLst>
+                                          <p:endCondLst>
+                                            <p:cond evt="onStopAudio" delay="0">
+                                              <p:tgtEl>
+                                                <p:sldTgt/>
+                                              </p:tgtEl>
+                                            </p:cond>
+                                          </p:endCondLst>
+                                        </p:cTn>
+                                        <p:tgtEl>
+                                          <p:sndTgt r:embed="rIdSnd1" name="pop.wav"/>
+                                        </p:tgtEl>
+                                      </p:cMediaNode>
+                                    </p:audio>
                                   </p:childTnLst>
                                 </p:cTn>
                               </p:par>
@@ -20901,6 +23295,25 @@
                                         </p:tgtEl>
                                       </p:cBhvr>
                                     </p:animEffect>
+                                    <p:audio>
+                                      <p:cMediaNode vol="80000">
+                                        <p:cTn id="1002" display="0">
+                                          <p:stCondLst>
+                                            <p:cond delay="0"/>
+                                          </p:stCondLst>
+                                          <p:endCondLst>
+                                            <p:cond evt="onStopAudio" delay="0">
+                                              <p:tgtEl>
+                                                <p:sldTgt/>
+                                              </p:tgtEl>
+                                            </p:cond>
+                                          </p:endCondLst>
+                                        </p:cTn>
+                                        <p:tgtEl>
+                                          <p:sndTgt r:embed="rIdSnd2" name="ding.wav"/>
+                                        </p:tgtEl>
+                                      </p:cMediaNode>
+                                    </p:audio>
                                   </p:childTnLst>
                                 </p:cTn>
                               </p:par>
@@ -20954,6 +23367,25 @@
                                         </p:tgtEl>
                                       </p:cBhvr>
                                     </p:animEffect>
+                                    <p:audio>
+                                      <p:cMediaNode vol="80000">
+                                        <p:cTn id="1003" display="0">
+                                          <p:stCondLst>
+                                            <p:cond delay="0"/>
+                                          </p:stCondLst>
+                                          <p:endCondLst>
+                                            <p:cond evt="onStopAudio" delay="0">
+                                              <p:tgtEl>
+                                                <p:sldTgt/>
+                                              </p:tgtEl>
+                                            </p:cond>
+                                          </p:endCondLst>
+                                        </p:cTn>
+                                        <p:tgtEl>
+                                          <p:sndTgt r:embed="rIdSnd3" name="tick.wav"/>
+                                        </p:tgtEl>
+                                      </p:cMediaNode>
+                                    </p:audio>
                                   </p:childTnLst>
                                 </p:cTn>
                               </p:par>
@@ -21007,6 +23439,25 @@
                                         </p:tgtEl>
                                       </p:cBhvr>
                                     </p:animEffect>
+                                    <p:audio>
+                                      <p:cMediaNode vol="80000">
+                                        <p:cTn id="1004" display="0">
+                                          <p:stCondLst>
+                                            <p:cond delay="0"/>
+                                          </p:stCondLst>
+                                          <p:endCondLst>
+                                            <p:cond evt="onStopAudio" delay="0">
+                                              <p:tgtEl>
+                                                <p:sldTgt/>
+                                              </p:tgtEl>
+                                            </p:cond>
+                                          </p:endCondLst>
+                                        </p:cTn>
+                                        <p:tgtEl>
+                                          <p:sndTgt r:embed="rIdSnd1" name="pop.wav"/>
+                                        </p:tgtEl>
+                                      </p:cMediaNode>
+                                    </p:audio>
                                   </p:childTnLst>
                                 </p:cTn>
                               </p:par>
@@ -21060,6 +23511,25 @@
                                         </p:tgtEl>
                                       </p:cBhvr>
                                     </p:animEffect>
+                                    <p:audio>
+                                      <p:cMediaNode vol="80000">
+                                        <p:cTn id="1005" display="0">
+                                          <p:stCondLst>
+                                            <p:cond delay="0"/>
+                                          </p:stCondLst>
+                                          <p:endCondLst>
+                                            <p:cond evt="onStopAudio" delay="0">
+                                              <p:tgtEl>
+                                                <p:sldTgt/>
+                                              </p:tgtEl>
+                                            </p:cond>
+                                          </p:endCondLst>
+                                        </p:cTn>
+                                        <p:tgtEl>
+                                          <p:sndTgt r:embed="rIdSnd2" name="ding.wav"/>
+                                        </p:tgtEl>
+                                      </p:cMediaNode>
+                                    </p:audio>
                                   </p:childTnLst>
                                 </p:cTn>
                               </p:par>
@@ -21113,6 +23583,25 @@
                                         </p:tgtEl>
                                       </p:cBhvr>
                                     </p:animEffect>
+                                    <p:audio>
+                                      <p:cMediaNode vol="80000">
+                                        <p:cTn id="1006" display="0">
+                                          <p:stCondLst>
+                                            <p:cond delay="0"/>
+                                          </p:stCondLst>
+                                          <p:endCondLst>
+                                            <p:cond evt="onStopAudio" delay="0">
+                                              <p:tgtEl>
+                                                <p:sldTgt/>
+                                              </p:tgtEl>
+                                            </p:cond>
+                                          </p:endCondLst>
+                                        </p:cTn>
+                                        <p:tgtEl>
+                                          <p:sndTgt r:embed="rIdSnd3" name="tick.wav"/>
+                                        </p:tgtEl>
+                                      </p:cMediaNode>
+                                    </p:audio>
                                   </p:childTnLst>
                                 </p:cTn>
                               </p:par>
@@ -21166,6 +23655,25 @@
                                         </p:tgtEl>
                                       </p:cBhvr>
                                     </p:animEffect>
+                                    <p:audio>
+                                      <p:cMediaNode vol="80000">
+                                        <p:cTn id="1007" display="0">
+                                          <p:stCondLst>
+                                            <p:cond delay="0"/>
+                                          </p:stCondLst>
+                                          <p:endCondLst>
+                                            <p:cond evt="onStopAudio" delay="0">
+                                              <p:tgtEl>
+                                                <p:sldTgt/>
+                                              </p:tgtEl>
+                                            </p:cond>
+                                          </p:endCondLst>
+                                        </p:cTn>
+                                        <p:tgtEl>
+                                          <p:sndTgt r:embed="rIdSnd4" name="win.wav"/>
+                                        </p:tgtEl>
+                                      </p:cMediaNode>
+                                    </p:audio>
                                   </p:childTnLst>
                                 </p:cTn>
                               </p:par>
@@ -21862,6 +24370,25 @@
                                         </p:tgtEl>
                                       </p:cBhvr>
                                     </p:animEffect>
+                                    <p:audio>
+                                      <p:cMediaNode vol="80000">
+                                        <p:cTn id="1001" display="0">
+                                          <p:stCondLst>
+                                            <p:cond delay="0"/>
+                                          </p:stCondLst>
+                                          <p:endCondLst>
+                                            <p:cond evt="onStopAudio" delay="0">
+                                              <p:tgtEl>
+                                                <p:sldTgt/>
+                                              </p:tgtEl>
+                                            </p:cond>
+                                          </p:endCondLst>
+                                        </p:cTn>
+                                        <p:tgtEl>
+                                          <p:sndTgt r:embed="rIdSnd1" name="pop.wav"/>
+                                        </p:tgtEl>
+                                      </p:cMediaNode>
+                                    </p:audio>
                                   </p:childTnLst>
                                 </p:cTn>
                               </p:par>
@@ -21915,6 +24442,25 @@
                                         </p:tgtEl>
                                       </p:cBhvr>
                                     </p:animEffect>
+                                    <p:audio>
+                                      <p:cMediaNode vol="80000">
+                                        <p:cTn id="1002" display="0">
+                                          <p:stCondLst>
+                                            <p:cond delay="0"/>
+                                          </p:stCondLst>
+                                          <p:endCondLst>
+                                            <p:cond evt="onStopAudio" delay="0">
+                                              <p:tgtEl>
+                                                <p:sldTgt/>
+                                              </p:tgtEl>
+                                            </p:cond>
+                                          </p:endCondLst>
+                                        </p:cTn>
+                                        <p:tgtEl>
+                                          <p:sndTgt r:embed="rIdSnd2" name="ding.wav"/>
+                                        </p:tgtEl>
+                                      </p:cMediaNode>
+                                    </p:audio>
                                   </p:childTnLst>
                                 </p:cTn>
                               </p:par>
@@ -21968,6 +24514,25 @@
                                         </p:tgtEl>
                                       </p:cBhvr>
                                     </p:animEffect>
+                                    <p:audio>
+                                      <p:cMediaNode vol="80000">
+                                        <p:cTn id="1003" display="0">
+                                          <p:stCondLst>
+                                            <p:cond delay="0"/>
+                                          </p:stCondLst>
+                                          <p:endCondLst>
+                                            <p:cond evt="onStopAudio" delay="0">
+                                              <p:tgtEl>
+                                                <p:sldTgt/>
+                                              </p:tgtEl>
+                                            </p:cond>
+                                          </p:endCondLst>
+                                        </p:cTn>
+                                        <p:tgtEl>
+                                          <p:sndTgt r:embed="rIdSnd3" name="tick.wav"/>
+                                        </p:tgtEl>
+                                      </p:cMediaNode>
+                                    </p:audio>
                                   </p:childTnLst>
                                 </p:cTn>
                               </p:par>
@@ -22021,6 +24586,25 @@
                                         </p:tgtEl>
                                       </p:cBhvr>
                                     </p:animEffect>
+                                    <p:audio>
+                                      <p:cMediaNode vol="80000">
+                                        <p:cTn id="1004" display="0">
+                                          <p:stCondLst>
+                                            <p:cond delay="0"/>
+                                          </p:stCondLst>
+                                          <p:endCondLst>
+                                            <p:cond evt="onStopAudio" delay="0">
+                                              <p:tgtEl>
+                                                <p:sldTgt/>
+                                              </p:tgtEl>
+                                            </p:cond>
+                                          </p:endCondLst>
+                                        </p:cTn>
+                                        <p:tgtEl>
+                                          <p:sndTgt r:embed="rIdSnd1" name="pop.wav"/>
+                                        </p:tgtEl>
+                                      </p:cMediaNode>
+                                    </p:audio>
                                   </p:childTnLst>
                                 </p:cTn>
                               </p:par>
@@ -22074,6 +24658,25 @@
                                         </p:tgtEl>
                                       </p:cBhvr>
                                     </p:animEffect>
+                                    <p:audio>
+                                      <p:cMediaNode vol="80000">
+                                        <p:cTn id="1005" display="0">
+                                          <p:stCondLst>
+                                            <p:cond delay="0"/>
+                                          </p:stCondLst>
+                                          <p:endCondLst>
+                                            <p:cond evt="onStopAudio" delay="0">
+                                              <p:tgtEl>
+                                                <p:sldTgt/>
+                                              </p:tgtEl>
+                                            </p:cond>
+                                          </p:endCondLst>
+                                        </p:cTn>
+                                        <p:tgtEl>
+                                          <p:sndTgt r:embed="rIdSnd2" name="ding.wav"/>
+                                        </p:tgtEl>
+                                      </p:cMediaNode>
+                                    </p:audio>
                                   </p:childTnLst>
                                 </p:cTn>
                               </p:par>
@@ -22127,6 +24730,25 @@
                                         </p:tgtEl>
                                       </p:cBhvr>
                                     </p:animEffect>
+                                    <p:audio>
+                                      <p:cMediaNode vol="80000">
+                                        <p:cTn id="1006" display="0">
+                                          <p:stCondLst>
+                                            <p:cond delay="0"/>
+                                          </p:stCondLst>
+                                          <p:endCondLst>
+                                            <p:cond evt="onStopAudio" delay="0">
+                                              <p:tgtEl>
+                                                <p:sldTgt/>
+                                              </p:tgtEl>
+                                            </p:cond>
+                                          </p:endCondLst>
+                                        </p:cTn>
+                                        <p:tgtEl>
+                                          <p:sndTgt r:embed="rIdSnd3" name="tick.wav"/>
+                                        </p:tgtEl>
+                                      </p:cMediaNode>
+                                    </p:audio>
                                   </p:childTnLst>
                                 </p:cTn>
                               </p:par>
@@ -22180,6 +24802,25 @@
                                         </p:tgtEl>
                                       </p:cBhvr>
                                     </p:animEffect>
+                                    <p:audio>
+                                      <p:cMediaNode vol="80000">
+                                        <p:cTn id="1007" display="0">
+                                          <p:stCondLst>
+                                            <p:cond delay="0"/>
+                                          </p:stCondLst>
+                                          <p:endCondLst>
+                                            <p:cond evt="onStopAudio" delay="0">
+                                              <p:tgtEl>
+                                                <p:sldTgt/>
+                                              </p:tgtEl>
+                                            </p:cond>
+                                          </p:endCondLst>
+                                        </p:cTn>
+                                        <p:tgtEl>
+                                          <p:sndTgt r:embed="rIdSnd4" name="win.wav"/>
+                                        </p:tgtEl>
+                                      </p:cMediaNode>
+                                    </p:audio>
                                   </p:childTnLst>
                                 </p:cTn>
                               </p:par>
@@ -22876,6 +25517,25 @@
                                         </p:tgtEl>
                                       </p:cBhvr>
                                     </p:animEffect>
+                                    <p:audio>
+                                      <p:cMediaNode vol="80000">
+                                        <p:cTn id="1001" display="0">
+                                          <p:stCondLst>
+                                            <p:cond delay="0"/>
+                                          </p:stCondLst>
+                                          <p:endCondLst>
+                                            <p:cond evt="onStopAudio" delay="0">
+                                              <p:tgtEl>
+                                                <p:sldTgt/>
+                                              </p:tgtEl>
+                                            </p:cond>
+                                          </p:endCondLst>
+                                        </p:cTn>
+                                        <p:tgtEl>
+                                          <p:sndTgt r:embed="rIdSnd1" name="pop.wav"/>
+                                        </p:tgtEl>
+                                      </p:cMediaNode>
+                                    </p:audio>
                                   </p:childTnLst>
                                 </p:cTn>
                               </p:par>
@@ -22929,6 +25589,25 @@
                                         </p:tgtEl>
                                       </p:cBhvr>
                                     </p:animEffect>
+                                    <p:audio>
+                                      <p:cMediaNode vol="80000">
+                                        <p:cTn id="1002" display="0">
+                                          <p:stCondLst>
+                                            <p:cond delay="0"/>
+                                          </p:stCondLst>
+                                          <p:endCondLst>
+                                            <p:cond evt="onStopAudio" delay="0">
+                                              <p:tgtEl>
+                                                <p:sldTgt/>
+                                              </p:tgtEl>
+                                            </p:cond>
+                                          </p:endCondLst>
+                                        </p:cTn>
+                                        <p:tgtEl>
+                                          <p:sndTgt r:embed="rIdSnd2" name="ding.wav"/>
+                                        </p:tgtEl>
+                                      </p:cMediaNode>
+                                    </p:audio>
                                   </p:childTnLst>
                                 </p:cTn>
                               </p:par>
@@ -22982,6 +25661,25 @@
                                         </p:tgtEl>
                                       </p:cBhvr>
                                     </p:animEffect>
+                                    <p:audio>
+                                      <p:cMediaNode vol="80000">
+                                        <p:cTn id="1003" display="0">
+                                          <p:stCondLst>
+                                            <p:cond delay="0"/>
+                                          </p:stCondLst>
+                                          <p:endCondLst>
+                                            <p:cond evt="onStopAudio" delay="0">
+                                              <p:tgtEl>
+                                                <p:sldTgt/>
+                                              </p:tgtEl>
+                                            </p:cond>
+                                          </p:endCondLst>
+                                        </p:cTn>
+                                        <p:tgtEl>
+                                          <p:sndTgt r:embed="rIdSnd3" name="tick.wav"/>
+                                        </p:tgtEl>
+                                      </p:cMediaNode>
+                                    </p:audio>
                                   </p:childTnLst>
                                 </p:cTn>
                               </p:par>
@@ -23035,6 +25733,25 @@
                                         </p:tgtEl>
                                       </p:cBhvr>
                                     </p:animEffect>
+                                    <p:audio>
+                                      <p:cMediaNode vol="80000">
+                                        <p:cTn id="1004" display="0">
+                                          <p:stCondLst>
+                                            <p:cond delay="0"/>
+                                          </p:stCondLst>
+                                          <p:endCondLst>
+                                            <p:cond evt="onStopAudio" delay="0">
+                                              <p:tgtEl>
+                                                <p:sldTgt/>
+                                              </p:tgtEl>
+                                            </p:cond>
+                                          </p:endCondLst>
+                                        </p:cTn>
+                                        <p:tgtEl>
+                                          <p:sndTgt r:embed="rIdSnd1" name="pop.wav"/>
+                                        </p:tgtEl>
+                                      </p:cMediaNode>
+                                    </p:audio>
                                   </p:childTnLst>
                                 </p:cTn>
                               </p:par>
@@ -23088,6 +25805,25 @@
                                         </p:tgtEl>
                                       </p:cBhvr>
                                     </p:animEffect>
+                                    <p:audio>
+                                      <p:cMediaNode vol="80000">
+                                        <p:cTn id="1005" display="0">
+                                          <p:stCondLst>
+                                            <p:cond delay="0"/>
+                                          </p:stCondLst>
+                                          <p:endCondLst>
+                                            <p:cond evt="onStopAudio" delay="0">
+                                              <p:tgtEl>
+                                                <p:sldTgt/>
+                                              </p:tgtEl>
+                                            </p:cond>
+                                          </p:endCondLst>
+                                        </p:cTn>
+                                        <p:tgtEl>
+                                          <p:sndTgt r:embed="rIdSnd2" name="ding.wav"/>
+                                        </p:tgtEl>
+                                      </p:cMediaNode>
+                                    </p:audio>
                                   </p:childTnLst>
                                 </p:cTn>
                               </p:par>
@@ -23141,6 +25877,25 @@
                                         </p:tgtEl>
                                       </p:cBhvr>
                                     </p:animEffect>
+                                    <p:audio>
+                                      <p:cMediaNode vol="80000">
+                                        <p:cTn id="1006" display="0">
+                                          <p:stCondLst>
+                                            <p:cond delay="0"/>
+                                          </p:stCondLst>
+                                          <p:endCondLst>
+                                            <p:cond evt="onStopAudio" delay="0">
+                                              <p:tgtEl>
+                                                <p:sldTgt/>
+                                              </p:tgtEl>
+                                            </p:cond>
+                                          </p:endCondLst>
+                                        </p:cTn>
+                                        <p:tgtEl>
+                                          <p:sndTgt r:embed="rIdSnd3" name="tick.wav"/>
+                                        </p:tgtEl>
+                                      </p:cMediaNode>
+                                    </p:audio>
                                   </p:childTnLst>
                                 </p:cTn>
                               </p:par>
@@ -23194,6 +25949,25 @@
                                         </p:tgtEl>
                                       </p:cBhvr>
                                     </p:animEffect>
+                                    <p:audio>
+                                      <p:cMediaNode vol="80000">
+                                        <p:cTn id="1007" display="0">
+                                          <p:stCondLst>
+                                            <p:cond delay="0"/>
+                                          </p:stCondLst>
+                                          <p:endCondLst>
+                                            <p:cond evt="onStopAudio" delay="0">
+                                              <p:tgtEl>
+                                                <p:sldTgt/>
+                                              </p:tgtEl>
+                                            </p:cond>
+                                          </p:endCondLst>
+                                        </p:cTn>
+                                        <p:tgtEl>
+                                          <p:sndTgt r:embed="rIdSnd4" name="win.wav"/>
+                                        </p:tgtEl>
+                                      </p:cMediaNode>
+                                    </p:audio>
                                   </p:childTnLst>
                                 </p:cTn>
                               </p:par>
@@ -23890,6 +26664,25 @@
                                         </p:tgtEl>
                                       </p:cBhvr>
                                     </p:animEffect>
+                                    <p:audio>
+                                      <p:cMediaNode vol="80000">
+                                        <p:cTn id="1001" display="0">
+                                          <p:stCondLst>
+                                            <p:cond delay="0"/>
+                                          </p:stCondLst>
+                                          <p:endCondLst>
+                                            <p:cond evt="onStopAudio" delay="0">
+                                              <p:tgtEl>
+                                                <p:sldTgt/>
+                                              </p:tgtEl>
+                                            </p:cond>
+                                          </p:endCondLst>
+                                        </p:cTn>
+                                        <p:tgtEl>
+                                          <p:sndTgt r:embed="rIdSnd1" name="pop.wav"/>
+                                        </p:tgtEl>
+                                      </p:cMediaNode>
+                                    </p:audio>
                                   </p:childTnLst>
                                 </p:cTn>
                               </p:par>
@@ -23943,6 +26736,25 @@
                                         </p:tgtEl>
                                       </p:cBhvr>
                                     </p:animEffect>
+                                    <p:audio>
+                                      <p:cMediaNode vol="80000">
+                                        <p:cTn id="1002" display="0">
+                                          <p:stCondLst>
+                                            <p:cond delay="0"/>
+                                          </p:stCondLst>
+                                          <p:endCondLst>
+                                            <p:cond evt="onStopAudio" delay="0">
+                                              <p:tgtEl>
+                                                <p:sldTgt/>
+                                              </p:tgtEl>
+                                            </p:cond>
+                                          </p:endCondLst>
+                                        </p:cTn>
+                                        <p:tgtEl>
+                                          <p:sndTgt r:embed="rIdSnd2" name="ding.wav"/>
+                                        </p:tgtEl>
+                                      </p:cMediaNode>
+                                    </p:audio>
                                   </p:childTnLst>
                                 </p:cTn>
                               </p:par>
@@ -23996,6 +26808,25 @@
                                         </p:tgtEl>
                                       </p:cBhvr>
                                     </p:animEffect>
+                                    <p:audio>
+                                      <p:cMediaNode vol="80000">
+                                        <p:cTn id="1003" display="0">
+                                          <p:stCondLst>
+                                            <p:cond delay="0"/>
+                                          </p:stCondLst>
+                                          <p:endCondLst>
+                                            <p:cond evt="onStopAudio" delay="0">
+                                              <p:tgtEl>
+                                                <p:sldTgt/>
+                                              </p:tgtEl>
+                                            </p:cond>
+                                          </p:endCondLst>
+                                        </p:cTn>
+                                        <p:tgtEl>
+                                          <p:sndTgt r:embed="rIdSnd3" name="tick.wav"/>
+                                        </p:tgtEl>
+                                      </p:cMediaNode>
+                                    </p:audio>
                                   </p:childTnLst>
                                 </p:cTn>
                               </p:par>
@@ -24049,6 +26880,25 @@
                                         </p:tgtEl>
                                       </p:cBhvr>
                                     </p:animEffect>
+                                    <p:audio>
+                                      <p:cMediaNode vol="80000">
+                                        <p:cTn id="1004" display="0">
+                                          <p:stCondLst>
+                                            <p:cond delay="0"/>
+                                          </p:stCondLst>
+                                          <p:endCondLst>
+                                            <p:cond evt="onStopAudio" delay="0">
+                                              <p:tgtEl>
+                                                <p:sldTgt/>
+                                              </p:tgtEl>
+                                            </p:cond>
+                                          </p:endCondLst>
+                                        </p:cTn>
+                                        <p:tgtEl>
+                                          <p:sndTgt r:embed="rIdSnd1" name="pop.wav"/>
+                                        </p:tgtEl>
+                                      </p:cMediaNode>
+                                    </p:audio>
                                   </p:childTnLst>
                                 </p:cTn>
                               </p:par>
@@ -24102,6 +26952,25 @@
                                         </p:tgtEl>
                                       </p:cBhvr>
                                     </p:animEffect>
+                                    <p:audio>
+                                      <p:cMediaNode vol="80000">
+                                        <p:cTn id="1005" display="0">
+                                          <p:stCondLst>
+                                            <p:cond delay="0"/>
+                                          </p:stCondLst>
+                                          <p:endCondLst>
+                                            <p:cond evt="onStopAudio" delay="0">
+                                              <p:tgtEl>
+                                                <p:sldTgt/>
+                                              </p:tgtEl>
+                                            </p:cond>
+                                          </p:endCondLst>
+                                        </p:cTn>
+                                        <p:tgtEl>
+                                          <p:sndTgt r:embed="rIdSnd2" name="ding.wav"/>
+                                        </p:tgtEl>
+                                      </p:cMediaNode>
+                                    </p:audio>
                                   </p:childTnLst>
                                 </p:cTn>
                               </p:par>
@@ -24155,6 +27024,25 @@
                                         </p:tgtEl>
                                       </p:cBhvr>
                                     </p:animEffect>
+                                    <p:audio>
+                                      <p:cMediaNode vol="80000">
+                                        <p:cTn id="1006" display="0">
+                                          <p:stCondLst>
+                                            <p:cond delay="0"/>
+                                          </p:stCondLst>
+                                          <p:endCondLst>
+                                            <p:cond evt="onStopAudio" delay="0">
+                                              <p:tgtEl>
+                                                <p:sldTgt/>
+                                              </p:tgtEl>
+                                            </p:cond>
+                                          </p:endCondLst>
+                                        </p:cTn>
+                                        <p:tgtEl>
+                                          <p:sndTgt r:embed="rIdSnd3" name="tick.wav"/>
+                                        </p:tgtEl>
+                                      </p:cMediaNode>
+                                    </p:audio>
                                   </p:childTnLst>
                                 </p:cTn>
                               </p:par>
@@ -24208,6 +27096,25 @@
                                         </p:tgtEl>
                                       </p:cBhvr>
                                     </p:animEffect>
+                                    <p:audio>
+                                      <p:cMediaNode vol="80000">
+                                        <p:cTn id="1007" display="0">
+                                          <p:stCondLst>
+                                            <p:cond delay="0"/>
+                                          </p:stCondLst>
+                                          <p:endCondLst>
+                                            <p:cond evt="onStopAudio" delay="0">
+                                              <p:tgtEl>
+                                                <p:sldTgt/>
+                                              </p:tgtEl>
+                                            </p:cond>
+                                          </p:endCondLst>
+                                        </p:cTn>
+                                        <p:tgtEl>
+                                          <p:sndTgt r:embed="rIdSnd4" name="win.wav"/>
+                                        </p:tgtEl>
+                                      </p:cMediaNode>
+                                    </p:audio>
                                   </p:childTnLst>
                                 </p:cTn>
                               </p:par>
@@ -24904,6 +27811,25 @@
                                         </p:tgtEl>
                                       </p:cBhvr>
                                     </p:animEffect>
+                                    <p:audio>
+                                      <p:cMediaNode vol="80000">
+                                        <p:cTn id="1001" display="0">
+                                          <p:stCondLst>
+                                            <p:cond delay="0"/>
+                                          </p:stCondLst>
+                                          <p:endCondLst>
+                                            <p:cond evt="onStopAudio" delay="0">
+                                              <p:tgtEl>
+                                                <p:sldTgt/>
+                                              </p:tgtEl>
+                                            </p:cond>
+                                          </p:endCondLst>
+                                        </p:cTn>
+                                        <p:tgtEl>
+                                          <p:sndTgt r:embed="rIdSnd1" name="pop.wav"/>
+                                        </p:tgtEl>
+                                      </p:cMediaNode>
+                                    </p:audio>
                                   </p:childTnLst>
                                 </p:cTn>
                               </p:par>
@@ -24957,6 +27883,25 @@
                                         </p:tgtEl>
                                       </p:cBhvr>
                                     </p:animEffect>
+                                    <p:audio>
+                                      <p:cMediaNode vol="80000">
+                                        <p:cTn id="1002" display="0">
+                                          <p:stCondLst>
+                                            <p:cond delay="0"/>
+                                          </p:stCondLst>
+                                          <p:endCondLst>
+                                            <p:cond evt="onStopAudio" delay="0">
+                                              <p:tgtEl>
+                                                <p:sldTgt/>
+                                              </p:tgtEl>
+                                            </p:cond>
+                                          </p:endCondLst>
+                                        </p:cTn>
+                                        <p:tgtEl>
+                                          <p:sndTgt r:embed="rIdSnd2" name="ding.wav"/>
+                                        </p:tgtEl>
+                                      </p:cMediaNode>
+                                    </p:audio>
                                   </p:childTnLst>
                                 </p:cTn>
                               </p:par>
@@ -25010,6 +27955,25 @@
                                         </p:tgtEl>
                                       </p:cBhvr>
                                     </p:animEffect>
+                                    <p:audio>
+                                      <p:cMediaNode vol="80000">
+                                        <p:cTn id="1003" display="0">
+                                          <p:stCondLst>
+                                            <p:cond delay="0"/>
+                                          </p:stCondLst>
+                                          <p:endCondLst>
+                                            <p:cond evt="onStopAudio" delay="0">
+                                              <p:tgtEl>
+                                                <p:sldTgt/>
+                                              </p:tgtEl>
+                                            </p:cond>
+                                          </p:endCondLst>
+                                        </p:cTn>
+                                        <p:tgtEl>
+                                          <p:sndTgt r:embed="rIdSnd3" name="tick.wav"/>
+                                        </p:tgtEl>
+                                      </p:cMediaNode>
+                                    </p:audio>
                                   </p:childTnLst>
                                 </p:cTn>
                               </p:par>
@@ -25063,6 +28027,25 @@
                                         </p:tgtEl>
                                       </p:cBhvr>
                                     </p:animEffect>
+                                    <p:audio>
+                                      <p:cMediaNode vol="80000">
+                                        <p:cTn id="1004" display="0">
+                                          <p:stCondLst>
+                                            <p:cond delay="0"/>
+                                          </p:stCondLst>
+                                          <p:endCondLst>
+                                            <p:cond evt="onStopAudio" delay="0">
+                                              <p:tgtEl>
+                                                <p:sldTgt/>
+                                              </p:tgtEl>
+                                            </p:cond>
+                                          </p:endCondLst>
+                                        </p:cTn>
+                                        <p:tgtEl>
+                                          <p:sndTgt r:embed="rIdSnd1" name="pop.wav"/>
+                                        </p:tgtEl>
+                                      </p:cMediaNode>
+                                    </p:audio>
                                   </p:childTnLst>
                                 </p:cTn>
                               </p:par>
@@ -25116,6 +28099,25 @@
                                         </p:tgtEl>
                                       </p:cBhvr>
                                     </p:animEffect>
+                                    <p:audio>
+                                      <p:cMediaNode vol="80000">
+                                        <p:cTn id="1005" display="0">
+                                          <p:stCondLst>
+                                            <p:cond delay="0"/>
+                                          </p:stCondLst>
+                                          <p:endCondLst>
+                                            <p:cond evt="onStopAudio" delay="0">
+                                              <p:tgtEl>
+                                                <p:sldTgt/>
+                                              </p:tgtEl>
+                                            </p:cond>
+                                          </p:endCondLst>
+                                        </p:cTn>
+                                        <p:tgtEl>
+                                          <p:sndTgt r:embed="rIdSnd2" name="ding.wav"/>
+                                        </p:tgtEl>
+                                      </p:cMediaNode>
+                                    </p:audio>
                                   </p:childTnLst>
                                 </p:cTn>
                               </p:par>
@@ -25169,6 +28171,25 @@
                                         </p:tgtEl>
                                       </p:cBhvr>
                                     </p:animEffect>
+                                    <p:audio>
+                                      <p:cMediaNode vol="80000">
+                                        <p:cTn id="1006" display="0">
+                                          <p:stCondLst>
+                                            <p:cond delay="0"/>
+                                          </p:stCondLst>
+                                          <p:endCondLst>
+                                            <p:cond evt="onStopAudio" delay="0">
+                                              <p:tgtEl>
+                                                <p:sldTgt/>
+                                              </p:tgtEl>
+                                            </p:cond>
+                                          </p:endCondLst>
+                                        </p:cTn>
+                                        <p:tgtEl>
+                                          <p:sndTgt r:embed="rIdSnd3" name="tick.wav"/>
+                                        </p:tgtEl>
+                                      </p:cMediaNode>
+                                    </p:audio>
                                   </p:childTnLst>
                                 </p:cTn>
                               </p:par>
@@ -25222,6 +28243,25 @@
                                         </p:tgtEl>
                                       </p:cBhvr>
                                     </p:animEffect>
+                                    <p:audio>
+                                      <p:cMediaNode vol="80000">
+                                        <p:cTn id="1007" display="0">
+                                          <p:stCondLst>
+                                            <p:cond delay="0"/>
+                                          </p:stCondLst>
+                                          <p:endCondLst>
+                                            <p:cond evt="onStopAudio" delay="0">
+                                              <p:tgtEl>
+                                                <p:sldTgt/>
+                                              </p:tgtEl>
+                                            </p:cond>
+                                          </p:endCondLst>
+                                        </p:cTn>
+                                        <p:tgtEl>
+                                          <p:sndTgt r:embed="rIdSnd4" name="win.wav"/>
+                                        </p:tgtEl>
+                                      </p:cMediaNode>
+                                    </p:audio>
                                   </p:childTnLst>
                                 </p:cTn>
                               </p:par>
@@ -26046,6 +29086,25 @@
                                         </p:tgtEl>
                                       </p:cBhvr>
                                     </p:animEffect>
+                                    <p:audio>
+                                      <p:cMediaNode vol="80000">
+                                        <p:cTn id="1001" display="0">
+                                          <p:stCondLst>
+                                            <p:cond delay="0"/>
+                                          </p:stCondLst>
+                                          <p:endCondLst>
+                                            <p:cond evt="onStopAudio" delay="0">
+                                              <p:tgtEl>
+                                                <p:sldTgt/>
+                                              </p:tgtEl>
+                                            </p:cond>
+                                          </p:endCondLst>
+                                        </p:cTn>
+                                        <p:tgtEl>
+                                          <p:sndTgt r:embed="rIdSnd1" name="pop.wav"/>
+                                        </p:tgtEl>
+                                      </p:cMediaNode>
+                                    </p:audio>
                                   </p:childTnLst>
                                 </p:cTn>
                               </p:par>
@@ -26099,6 +29158,25 @@
                                         </p:tgtEl>
                                       </p:cBhvr>
                                     </p:animEffect>
+                                    <p:audio>
+                                      <p:cMediaNode vol="80000">
+                                        <p:cTn id="1002" display="0">
+                                          <p:stCondLst>
+                                            <p:cond delay="0"/>
+                                          </p:stCondLst>
+                                          <p:endCondLst>
+                                            <p:cond evt="onStopAudio" delay="0">
+                                              <p:tgtEl>
+                                                <p:sldTgt/>
+                                              </p:tgtEl>
+                                            </p:cond>
+                                          </p:endCondLst>
+                                        </p:cTn>
+                                        <p:tgtEl>
+                                          <p:sndTgt r:embed="rIdSnd2" name="ding.wav"/>
+                                        </p:tgtEl>
+                                      </p:cMediaNode>
+                                    </p:audio>
                                   </p:childTnLst>
                                 </p:cTn>
                               </p:par>
@@ -26152,6 +29230,25 @@
                                         </p:tgtEl>
                                       </p:cBhvr>
                                     </p:animEffect>
+                                    <p:audio>
+                                      <p:cMediaNode vol="80000">
+                                        <p:cTn id="1003" display="0">
+                                          <p:stCondLst>
+                                            <p:cond delay="0"/>
+                                          </p:stCondLst>
+                                          <p:endCondLst>
+                                            <p:cond evt="onStopAudio" delay="0">
+                                              <p:tgtEl>
+                                                <p:sldTgt/>
+                                              </p:tgtEl>
+                                            </p:cond>
+                                          </p:endCondLst>
+                                        </p:cTn>
+                                        <p:tgtEl>
+                                          <p:sndTgt r:embed="rIdSnd3" name="tick.wav"/>
+                                        </p:tgtEl>
+                                      </p:cMediaNode>
+                                    </p:audio>
                                   </p:childTnLst>
                                 </p:cTn>
                               </p:par>
@@ -26205,6 +29302,25 @@
                                         </p:tgtEl>
                                       </p:cBhvr>
                                     </p:animEffect>
+                                    <p:audio>
+                                      <p:cMediaNode vol="80000">
+                                        <p:cTn id="1004" display="0">
+                                          <p:stCondLst>
+                                            <p:cond delay="0"/>
+                                          </p:stCondLst>
+                                          <p:endCondLst>
+                                            <p:cond evt="onStopAudio" delay="0">
+                                              <p:tgtEl>
+                                                <p:sldTgt/>
+                                              </p:tgtEl>
+                                            </p:cond>
+                                          </p:endCondLst>
+                                        </p:cTn>
+                                        <p:tgtEl>
+                                          <p:sndTgt r:embed="rIdSnd1" name="pop.wav"/>
+                                        </p:tgtEl>
+                                      </p:cMediaNode>
+                                    </p:audio>
                                   </p:childTnLst>
                                 </p:cTn>
                               </p:par>
@@ -26258,6 +29374,25 @@
                                         </p:tgtEl>
                                       </p:cBhvr>
                                     </p:animEffect>
+                                    <p:audio>
+                                      <p:cMediaNode vol="80000">
+                                        <p:cTn id="1005" display="0">
+                                          <p:stCondLst>
+                                            <p:cond delay="0"/>
+                                          </p:stCondLst>
+                                          <p:endCondLst>
+                                            <p:cond evt="onStopAudio" delay="0">
+                                              <p:tgtEl>
+                                                <p:sldTgt/>
+                                              </p:tgtEl>
+                                            </p:cond>
+                                          </p:endCondLst>
+                                        </p:cTn>
+                                        <p:tgtEl>
+                                          <p:sndTgt r:embed="rIdSnd2" name="ding.wav"/>
+                                        </p:tgtEl>
+                                      </p:cMediaNode>
+                                    </p:audio>
                                   </p:childTnLst>
                                 </p:cTn>
                               </p:par>
@@ -26311,6 +29446,25 @@
                                         </p:tgtEl>
                                       </p:cBhvr>
                                     </p:animEffect>
+                                    <p:audio>
+                                      <p:cMediaNode vol="80000">
+                                        <p:cTn id="1006" display="0">
+                                          <p:stCondLst>
+                                            <p:cond delay="0"/>
+                                          </p:stCondLst>
+                                          <p:endCondLst>
+                                            <p:cond evt="onStopAudio" delay="0">
+                                              <p:tgtEl>
+                                                <p:sldTgt/>
+                                              </p:tgtEl>
+                                            </p:cond>
+                                          </p:endCondLst>
+                                        </p:cTn>
+                                        <p:tgtEl>
+                                          <p:sndTgt r:embed="rIdSnd3" name="tick.wav"/>
+                                        </p:tgtEl>
+                                      </p:cMediaNode>
+                                    </p:audio>
                                   </p:childTnLst>
                                 </p:cTn>
                               </p:par>
@@ -26364,6 +29518,25 @@
                                         </p:tgtEl>
                                       </p:cBhvr>
                                     </p:animEffect>
+                                    <p:audio>
+                                      <p:cMediaNode vol="80000">
+                                        <p:cTn id="1007" display="0">
+                                          <p:stCondLst>
+                                            <p:cond delay="0"/>
+                                          </p:stCondLst>
+                                          <p:endCondLst>
+                                            <p:cond evt="onStopAudio" delay="0">
+                                              <p:tgtEl>
+                                                <p:sldTgt/>
+                                              </p:tgtEl>
+                                            </p:cond>
+                                          </p:endCondLst>
+                                        </p:cTn>
+                                        <p:tgtEl>
+                                          <p:sndTgt r:embed="rIdSnd1" name="pop.wav"/>
+                                        </p:tgtEl>
+                                      </p:cMediaNode>
+                                    </p:audio>
                                   </p:childTnLst>
                                 </p:cTn>
                               </p:par>
@@ -26417,6 +29590,25 @@
                                         </p:tgtEl>
                                       </p:cBhvr>
                                     </p:animEffect>
+                                    <p:audio>
+                                      <p:cMediaNode vol="80000">
+                                        <p:cTn id="1008" display="0">
+                                          <p:stCondLst>
+                                            <p:cond delay="0"/>
+                                          </p:stCondLst>
+                                          <p:endCondLst>
+                                            <p:cond evt="onStopAudio" delay="0">
+                                              <p:tgtEl>
+                                                <p:sldTgt/>
+                                              </p:tgtEl>
+                                            </p:cond>
+                                          </p:endCondLst>
+                                        </p:cTn>
+                                        <p:tgtEl>
+                                          <p:sndTgt r:embed="rIdSnd2" name="ding.wav"/>
+                                        </p:tgtEl>
+                                      </p:cMediaNode>
+                                    </p:audio>
                                   </p:childTnLst>
                                 </p:cTn>
                               </p:par>
@@ -26470,6 +29662,25 @@
                                         </p:tgtEl>
                                       </p:cBhvr>
                                     </p:animEffect>
+                                    <p:audio>
+                                      <p:cMediaNode vol="80000">
+                                        <p:cTn id="1009" display="0">
+                                          <p:stCondLst>
+                                            <p:cond delay="0"/>
+                                          </p:stCondLst>
+                                          <p:endCondLst>
+                                            <p:cond evt="onStopAudio" delay="0">
+                                              <p:tgtEl>
+                                                <p:sldTgt/>
+                                              </p:tgtEl>
+                                            </p:cond>
+                                          </p:endCondLst>
+                                        </p:cTn>
+                                        <p:tgtEl>
+                                          <p:sndTgt r:embed="rIdSnd3" name="tick.wav"/>
+                                        </p:tgtEl>
+                                      </p:cMediaNode>
+                                    </p:audio>
                                   </p:childTnLst>
                                 </p:cTn>
                               </p:par>
@@ -26523,6 +29734,25 @@
                                         </p:tgtEl>
                                       </p:cBhvr>
                                     </p:animEffect>
+                                    <p:audio>
+                                      <p:cMediaNode vol="80000">
+                                        <p:cTn id="1010" display="0">
+                                          <p:stCondLst>
+                                            <p:cond delay="0"/>
+                                          </p:stCondLst>
+                                          <p:endCondLst>
+                                            <p:cond evt="onStopAudio" delay="0">
+                                              <p:tgtEl>
+                                                <p:sldTgt/>
+                                              </p:tgtEl>
+                                            </p:cond>
+                                          </p:endCondLst>
+                                        </p:cTn>
+                                        <p:tgtEl>
+                                          <p:sndTgt r:embed="rIdSnd4" name="win.wav"/>
+                                        </p:tgtEl>
+                                      </p:cMediaNode>
+                                    </p:audio>
                                   </p:childTnLst>
                                 </p:cTn>
                               </p:par>

--- a/all-letters/16-waw.pptx
+++ b/all-letters/16-waw.pptx
@@ -3169,7 +3169,7 @@
                                           </p:endCondLst>
                                         </p:cTn>
                                         <p:tgtEl>
-                                          <p:sndTgt r:embed="rIdSnd1" name="pop.wav"/>
+                                          <p:sndTgt r:embed="rIdSnd1" name="pluck1.wav"/>
                                         </p:tgtEl>
                                       </p:cMediaNode>
                                     </p:audio>
@@ -3241,7 +3241,7 @@
                                           </p:endCondLst>
                                         </p:cTn>
                                         <p:tgtEl>
-                                          <p:sndTgt r:embed="rIdSnd2" name="ding.wav"/>
+                                          <p:sndTgt r:embed="rIdSnd2" name="bell1.wav"/>
                                         </p:tgtEl>
                                       </p:cMediaNode>
                                     </p:audio>
@@ -4079,7 +4079,7 @@
                                           </p:endCondLst>
                                         </p:cTn>
                                         <p:tgtEl>
-                                          <p:sndTgt r:embed="rIdSnd1" name="pop.wav"/>
+                                          <p:sndTgt r:embed="rIdSnd1" name="pluck1.wav"/>
                                         </p:tgtEl>
                                       </p:cMediaNode>
                                     </p:audio>
@@ -4151,7 +4151,7 @@
                                           </p:endCondLst>
                                         </p:cTn>
                                         <p:tgtEl>
-                                          <p:sndTgt r:embed="rIdSnd2" name="ding.wav"/>
+                                          <p:sndTgt r:embed="rIdSnd2" name="bell1.wav"/>
                                         </p:tgtEl>
                                       </p:cMediaNode>
                                     </p:audio>
@@ -4223,7 +4223,7 @@
                                           </p:endCondLst>
                                         </p:cTn>
                                         <p:tgtEl>
-                                          <p:sndTgt r:embed="rIdSnd3" name="tick.wav"/>
+                                          <p:sndTgt r:embed="rIdSnd3" name="bloop.wav"/>
                                         </p:tgtEl>
                                       </p:cMediaNode>
                                     </p:audio>
@@ -4295,7 +4295,7 @@
                                           </p:endCondLst>
                                         </p:cTn>
                                         <p:tgtEl>
-                                          <p:sndTgt r:embed="rIdSnd1" name="pop.wav"/>
+                                          <p:sndTgt r:embed="rIdSnd4" name="pluck2.wav"/>
                                         </p:tgtEl>
                                       </p:cMediaNode>
                                     </p:audio>
@@ -4367,7 +4367,7 @@
                                           </p:endCondLst>
                                         </p:cTn>
                                         <p:tgtEl>
-                                          <p:sndTgt r:embed="rIdSnd2" name="ding.wav"/>
+                                          <p:sndTgt r:embed="rIdSnd5" name="bell2.wav"/>
                                         </p:tgtEl>
                                       </p:cMediaNode>
                                     </p:audio>
@@ -4439,7 +4439,7 @@
                                           </p:endCondLst>
                                         </p:cTn>
                                         <p:tgtEl>
-                                          <p:sndTgt r:embed="rIdSnd3" name="tick.wav"/>
+                                          <p:sndTgt r:embed="rIdSnd3" name="bloop.wav"/>
                                         </p:tgtEl>
                                       </p:cMediaNode>
                                     </p:audio>
@@ -4511,7 +4511,7 @@
                                           </p:endCondLst>
                                         </p:cTn>
                                         <p:tgtEl>
-                                          <p:sndTgt r:embed="rIdSnd1" name="pop.wav"/>
+                                          <p:sndTgt r:embed="rIdSnd6" name="pluck3.wav"/>
                                         </p:tgtEl>
                                       </p:cMediaNode>
                                     </p:audio>
@@ -4583,7 +4583,7 @@
                                           </p:endCondLst>
                                         </p:cTn>
                                         <p:tgtEl>
-                                          <p:sndTgt r:embed="rIdSnd2" name="ding.wav"/>
+                                          <p:sndTgt r:embed="rIdSnd7" name="bell3.wav"/>
                                         </p:tgtEl>
                                       </p:cMediaNode>
                                     </p:audio>
@@ -4655,7 +4655,7 @@
                                           </p:endCondLst>
                                         </p:cTn>
                                         <p:tgtEl>
-                                          <p:sndTgt r:embed="rIdSnd3" name="tick.wav"/>
+                                          <p:sndTgt r:embed="rIdSnd8" name="whoosh.wav"/>
                                         </p:tgtEl>
                                       </p:cMediaNode>
                                     </p:audio>
@@ -4727,7 +4727,7 @@
                                           </p:endCondLst>
                                         </p:cTn>
                                         <p:tgtEl>
-                                          <p:sndTgt r:embed="rIdSnd4" name="win.wav"/>
+                                          <p:sndTgt r:embed="rIdSnd9" name="win.wav"/>
                                         </p:tgtEl>
                                       </p:cMediaNode>
                                     </p:audio>
@@ -5573,7 +5573,7 @@
                                           </p:endCondLst>
                                         </p:cTn>
                                         <p:tgtEl>
-                                          <p:sndTgt r:embed="rIdSnd1" name="pop.wav"/>
+                                          <p:sndTgt r:embed="rIdSnd1" name="pluck1.wav"/>
                                         </p:tgtEl>
                                       </p:cMediaNode>
                                     </p:audio>
@@ -5645,7 +5645,7 @@
                                           </p:endCondLst>
                                         </p:cTn>
                                         <p:tgtEl>
-                                          <p:sndTgt r:embed="rIdSnd2" name="ding.wav"/>
+                                          <p:sndTgt r:embed="rIdSnd2" name="bell1.wav"/>
                                         </p:tgtEl>
                                       </p:cMediaNode>
                                     </p:audio>
@@ -5717,7 +5717,7 @@
                                           </p:endCondLst>
                                         </p:cTn>
                                         <p:tgtEl>
-                                          <p:sndTgt r:embed="rIdSnd3" name="tick.wav"/>
+                                          <p:sndTgt r:embed="rIdSnd3" name="bloop.wav"/>
                                         </p:tgtEl>
                                       </p:cMediaNode>
                                     </p:audio>
@@ -5789,7 +5789,7 @@
                                           </p:endCondLst>
                                         </p:cTn>
                                         <p:tgtEl>
-                                          <p:sndTgt r:embed="rIdSnd1" name="pop.wav"/>
+                                          <p:sndTgt r:embed="rIdSnd4" name="pluck2.wav"/>
                                         </p:tgtEl>
                                       </p:cMediaNode>
                                     </p:audio>
@@ -5861,7 +5861,7 @@
                                           </p:endCondLst>
                                         </p:cTn>
                                         <p:tgtEl>
-                                          <p:sndTgt r:embed="rIdSnd2" name="ding.wav"/>
+                                          <p:sndTgt r:embed="rIdSnd5" name="bell2.wav"/>
                                         </p:tgtEl>
                                       </p:cMediaNode>
                                     </p:audio>
@@ -5933,7 +5933,7 @@
                                           </p:endCondLst>
                                         </p:cTn>
                                         <p:tgtEl>
-                                          <p:sndTgt r:embed="rIdSnd3" name="tick.wav"/>
+                                          <p:sndTgt r:embed="rIdSnd3" name="bloop.wav"/>
                                         </p:tgtEl>
                                       </p:cMediaNode>
                                     </p:audio>
@@ -6005,7 +6005,7 @@
                                           </p:endCondLst>
                                         </p:cTn>
                                         <p:tgtEl>
-                                          <p:sndTgt r:embed="rIdSnd1" name="pop.wav"/>
+                                          <p:sndTgt r:embed="rIdSnd6" name="pluck3.wav"/>
                                         </p:tgtEl>
                                       </p:cMediaNode>
                                     </p:audio>
@@ -6077,7 +6077,7 @@
                                           </p:endCondLst>
                                         </p:cTn>
                                         <p:tgtEl>
-                                          <p:sndTgt r:embed="rIdSnd2" name="ding.wav"/>
+                                          <p:sndTgt r:embed="rIdSnd7" name="bell3.wav"/>
                                         </p:tgtEl>
                                       </p:cMediaNode>
                                     </p:audio>
@@ -6149,7 +6149,7 @@
                                           </p:endCondLst>
                                         </p:cTn>
                                         <p:tgtEl>
-                                          <p:sndTgt r:embed="rIdSnd3" name="tick.wav"/>
+                                          <p:sndTgt r:embed="rIdSnd8" name="whoosh.wav"/>
                                         </p:tgtEl>
                                       </p:cMediaNode>
                                     </p:audio>
@@ -6221,7 +6221,7 @@
                                           </p:endCondLst>
                                         </p:cTn>
                                         <p:tgtEl>
-                                          <p:sndTgt r:embed="rIdSnd4" name="win.wav"/>
+                                          <p:sndTgt r:embed="rIdSnd9" name="win.wav"/>
                                         </p:tgtEl>
                                       </p:cMediaNode>
                                     </p:audio>
@@ -7067,7 +7067,7 @@
                                           </p:endCondLst>
                                         </p:cTn>
                                         <p:tgtEl>
-                                          <p:sndTgt r:embed="rIdSnd1" name="pop.wav"/>
+                                          <p:sndTgt r:embed="rIdSnd1" name="pluck1.wav"/>
                                         </p:tgtEl>
                                       </p:cMediaNode>
                                     </p:audio>
@@ -7139,7 +7139,7 @@
                                           </p:endCondLst>
                                         </p:cTn>
                                         <p:tgtEl>
-                                          <p:sndTgt r:embed="rIdSnd2" name="ding.wav"/>
+                                          <p:sndTgt r:embed="rIdSnd2" name="bell1.wav"/>
                                         </p:tgtEl>
                                       </p:cMediaNode>
                                     </p:audio>
@@ -7211,7 +7211,7 @@
                                           </p:endCondLst>
                                         </p:cTn>
                                         <p:tgtEl>
-                                          <p:sndTgt r:embed="rIdSnd3" name="tick.wav"/>
+                                          <p:sndTgt r:embed="rIdSnd3" name="bloop.wav"/>
                                         </p:tgtEl>
                                       </p:cMediaNode>
                                     </p:audio>
@@ -7283,7 +7283,7 @@
                                           </p:endCondLst>
                                         </p:cTn>
                                         <p:tgtEl>
-                                          <p:sndTgt r:embed="rIdSnd1" name="pop.wav"/>
+                                          <p:sndTgt r:embed="rIdSnd4" name="pluck2.wav"/>
                                         </p:tgtEl>
                                       </p:cMediaNode>
                                     </p:audio>
@@ -7355,7 +7355,7 @@
                                           </p:endCondLst>
                                         </p:cTn>
                                         <p:tgtEl>
-                                          <p:sndTgt r:embed="rIdSnd2" name="ding.wav"/>
+                                          <p:sndTgt r:embed="rIdSnd5" name="bell2.wav"/>
                                         </p:tgtEl>
                                       </p:cMediaNode>
                                     </p:audio>
@@ -7427,7 +7427,7 @@
                                           </p:endCondLst>
                                         </p:cTn>
                                         <p:tgtEl>
-                                          <p:sndTgt r:embed="rIdSnd3" name="tick.wav"/>
+                                          <p:sndTgt r:embed="rIdSnd3" name="bloop.wav"/>
                                         </p:tgtEl>
                                       </p:cMediaNode>
                                     </p:audio>
@@ -7499,7 +7499,7 @@
                                           </p:endCondLst>
                                         </p:cTn>
                                         <p:tgtEl>
-                                          <p:sndTgt r:embed="rIdSnd1" name="pop.wav"/>
+                                          <p:sndTgt r:embed="rIdSnd6" name="pluck3.wav"/>
                                         </p:tgtEl>
                                       </p:cMediaNode>
                                     </p:audio>
@@ -7571,7 +7571,7 @@
                                           </p:endCondLst>
                                         </p:cTn>
                                         <p:tgtEl>
-                                          <p:sndTgt r:embed="rIdSnd2" name="ding.wav"/>
+                                          <p:sndTgt r:embed="rIdSnd7" name="bell3.wav"/>
                                         </p:tgtEl>
                                       </p:cMediaNode>
                                     </p:audio>
@@ -7643,7 +7643,7 @@
                                           </p:endCondLst>
                                         </p:cTn>
                                         <p:tgtEl>
-                                          <p:sndTgt r:embed="rIdSnd3" name="tick.wav"/>
+                                          <p:sndTgt r:embed="rIdSnd8" name="whoosh.wav"/>
                                         </p:tgtEl>
                                       </p:cMediaNode>
                                     </p:audio>
@@ -7715,7 +7715,7 @@
                                           </p:endCondLst>
                                         </p:cTn>
                                         <p:tgtEl>
-                                          <p:sndTgt r:embed="rIdSnd4" name="win.wav"/>
+                                          <p:sndTgt r:embed="rIdSnd9" name="win.wav"/>
                                         </p:tgtEl>
                                       </p:cMediaNode>
                                     </p:audio>
@@ -8561,7 +8561,7 @@
                                           </p:endCondLst>
                                         </p:cTn>
                                         <p:tgtEl>
-                                          <p:sndTgt r:embed="rIdSnd1" name="pop.wav"/>
+                                          <p:sndTgt r:embed="rIdSnd1" name="pluck1.wav"/>
                                         </p:tgtEl>
                                       </p:cMediaNode>
                                     </p:audio>
@@ -8633,7 +8633,7 @@
                                           </p:endCondLst>
                                         </p:cTn>
                                         <p:tgtEl>
-                                          <p:sndTgt r:embed="rIdSnd2" name="ding.wav"/>
+                                          <p:sndTgt r:embed="rIdSnd2" name="bell1.wav"/>
                                         </p:tgtEl>
                                       </p:cMediaNode>
                                     </p:audio>
@@ -8705,7 +8705,7 @@
                                           </p:endCondLst>
                                         </p:cTn>
                                         <p:tgtEl>
-                                          <p:sndTgt r:embed="rIdSnd3" name="tick.wav"/>
+                                          <p:sndTgt r:embed="rIdSnd3" name="bloop.wav"/>
                                         </p:tgtEl>
                                       </p:cMediaNode>
                                     </p:audio>
@@ -8777,7 +8777,7 @@
                                           </p:endCondLst>
                                         </p:cTn>
                                         <p:tgtEl>
-                                          <p:sndTgt r:embed="rIdSnd1" name="pop.wav"/>
+                                          <p:sndTgt r:embed="rIdSnd4" name="pluck2.wav"/>
                                         </p:tgtEl>
                                       </p:cMediaNode>
                                     </p:audio>
@@ -8849,7 +8849,7 @@
                                           </p:endCondLst>
                                         </p:cTn>
                                         <p:tgtEl>
-                                          <p:sndTgt r:embed="rIdSnd2" name="ding.wav"/>
+                                          <p:sndTgt r:embed="rIdSnd5" name="bell2.wav"/>
                                         </p:tgtEl>
                                       </p:cMediaNode>
                                     </p:audio>
@@ -8921,7 +8921,7 @@
                                           </p:endCondLst>
                                         </p:cTn>
                                         <p:tgtEl>
-                                          <p:sndTgt r:embed="rIdSnd3" name="tick.wav"/>
+                                          <p:sndTgt r:embed="rIdSnd3" name="bloop.wav"/>
                                         </p:tgtEl>
                                       </p:cMediaNode>
                                     </p:audio>
@@ -8993,7 +8993,7 @@
                                           </p:endCondLst>
                                         </p:cTn>
                                         <p:tgtEl>
-                                          <p:sndTgt r:embed="rIdSnd1" name="pop.wav"/>
+                                          <p:sndTgt r:embed="rIdSnd6" name="pluck3.wav"/>
                                         </p:tgtEl>
                                       </p:cMediaNode>
                                     </p:audio>
@@ -9065,7 +9065,7 @@
                                           </p:endCondLst>
                                         </p:cTn>
                                         <p:tgtEl>
-                                          <p:sndTgt r:embed="rIdSnd2" name="ding.wav"/>
+                                          <p:sndTgt r:embed="rIdSnd7" name="bell3.wav"/>
                                         </p:tgtEl>
                                       </p:cMediaNode>
                                     </p:audio>
@@ -9137,7 +9137,7 @@
                                           </p:endCondLst>
                                         </p:cTn>
                                         <p:tgtEl>
-                                          <p:sndTgt r:embed="rIdSnd3" name="tick.wav"/>
+                                          <p:sndTgt r:embed="rIdSnd8" name="whoosh.wav"/>
                                         </p:tgtEl>
                                       </p:cMediaNode>
                                     </p:audio>
@@ -9209,7 +9209,7 @@
                                           </p:endCondLst>
                                         </p:cTn>
                                         <p:tgtEl>
-                                          <p:sndTgt r:embed="rIdSnd4" name="win.wav"/>
+                                          <p:sndTgt r:embed="rIdSnd9" name="win.wav"/>
                                         </p:tgtEl>
                                       </p:cMediaNode>
                                     </p:audio>
@@ -10055,7 +10055,7 @@
                                           </p:endCondLst>
                                         </p:cTn>
                                         <p:tgtEl>
-                                          <p:sndTgt r:embed="rIdSnd1" name="pop.wav"/>
+                                          <p:sndTgt r:embed="rIdSnd1" name="pluck1.wav"/>
                                         </p:tgtEl>
                                       </p:cMediaNode>
                                     </p:audio>
@@ -10127,7 +10127,7 @@
                                           </p:endCondLst>
                                         </p:cTn>
                                         <p:tgtEl>
-                                          <p:sndTgt r:embed="rIdSnd2" name="ding.wav"/>
+                                          <p:sndTgt r:embed="rIdSnd2" name="bell1.wav"/>
                                         </p:tgtEl>
                                       </p:cMediaNode>
                                     </p:audio>
@@ -10199,7 +10199,7 @@
                                           </p:endCondLst>
                                         </p:cTn>
                                         <p:tgtEl>
-                                          <p:sndTgt r:embed="rIdSnd3" name="tick.wav"/>
+                                          <p:sndTgt r:embed="rIdSnd3" name="bloop.wav"/>
                                         </p:tgtEl>
                                       </p:cMediaNode>
                                     </p:audio>
@@ -10271,7 +10271,7 @@
                                           </p:endCondLst>
                                         </p:cTn>
                                         <p:tgtEl>
-                                          <p:sndTgt r:embed="rIdSnd1" name="pop.wav"/>
+                                          <p:sndTgt r:embed="rIdSnd4" name="pluck2.wav"/>
                                         </p:tgtEl>
                                       </p:cMediaNode>
                                     </p:audio>
@@ -10343,7 +10343,7 @@
                                           </p:endCondLst>
                                         </p:cTn>
                                         <p:tgtEl>
-                                          <p:sndTgt r:embed="rIdSnd2" name="ding.wav"/>
+                                          <p:sndTgt r:embed="rIdSnd5" name="bell2.wav"/>
                                         </p:tgtEl>
                                       </p:cMediaNode>
                                     </p:audio>
@@ -10415,7 +10415,7 @@
                                           </p:endCondLst>
                                         </p:cTn>
                                         <p:tgtEl>
-                                          <p:sndTgt r:embed="rIdSnd3" name="tick.wav"/>
+                                          <p:sndTgt r:embed="rIdSnd3" name="bloop.wav"/>
                                         </p:tgtEl>
                                       </p:cMediaNode>
                                     </p:audio>
@@ -10487,7 +10487,7 @@
                                           </p:endCondLst>
                                         </p:cTn>
                                         <p:tgtEl>
-                                          <p:sndTgt r:embed="rIdSnd1" name="pop.wav"/>
+                                          <p:sndTgt r:embed="rIdSnd6" name="pluck3.wav"/>
                                         </p:tgtEl>
                                       </p:cMediaNode>
                                     </p:audio>
@@ -10559,7 +10559,7 @@
                                           </p:endCondLst>
                                         </p:cTn>
                                         <p:tgtEl>
-                                          <p:sndTgt r:embed="rIdSnd2" name="ding.wav"/>
+                                          <p:sndTgt r:embed="rIdSnd7" name="bell3.wav"/>
                                         </p:tgtEl>
                                       </p:cMediaNode>
                                     </p:audio>
@@ -10631,7 +10631,7 @@
                                           </p:endCondLst>
                                         </p:cTn>
                                         <p:tgtEl>
-                                          <p:sndTgt r:embed="rIdSnd3" name="tick.wav"/>
+                                          <p:sndTgt r:embed="rIdSnd8" name="whoosh.wav"/>
                                         </p:tgtEl>
                                       </p:cMediaNode>
                                     </p:audio>
@@ -10703,7 +10703,7 @@
                                           </p:endCondLst>
                                         </p:cTn>
                                         <p:tgtEl>
-                                          <p:sndTgt r:embed="rIdSnd4" name="win.wav"/>
+                                          <p:sndTgt r:embed="rIdSnd9" name="win.wav"/>
                                         </p:tgtEl>
                                       </p:cMediaNode>
                                     </p:audio>
@@ -11549,7 +11549,7 @@
                                           </p:endCondLst>
                                         </p:cTn>
                                         <p:tgtEl>
-                                          <p:sndTgt r:embed="rIdSnd1" name="pop.wav"/>
+                                          <p:sndTgt r:embed="rIdSnd1" name="pluck1.wav"/>
                                         </p:tgtEl>
                                       </p:cMediaNode>
                                     </p:audio>
@@ -11621,7 +11621,7 @@
                                           </p:endCondLst>
                                         </p:cTn>
                                         <p:tgtEl>
-                                          <p:sndTgt r:embed="rIdSnd2" name="ding.wav"/>
+                                          <p:sndTgt r:embed="rIdSnd2" name="bell1.wav"/>
                                         </p:tgtEl>
                                       </p:cMediaNode>
                                     </p:audio>
@@ -11693,7 +11693,7 @@
                                           </p:endCondLst>
                                         </p:cTn>
                                         <p:tgtEl>
-                                          <p:sndTgt r:embed="rIdSnd3" name="tick.wav"/>
+                                          <p:sndTgt r:embed="rIdSnd3" name="bloop.wav"/>
                                         </p:tgtEl>
                                       </p:cMediaNode>
                                     </p:audio>
@@ -11765,7 +11765,7 @@
                                           </p:endCondLst>
                                         </p:cTn>
                                         <p:tgtEl>
-                                          <p:sndTgt r:embed="rIdSnd1" name="pop.wav"/>
+                                          <p:sndTgt r:embed="rIdSnd4" name="pluck2.wav"/>
                                         </p:tgtEl>
                                       </p:cMediaNode>
                                     </p:audio>
@@ -11837,7 +11837,7 @@
                                           </p:endCondLst>
                                         </p:cTn>
                                         <p:tgtEl>
-                                          <p:sndTgt r:embed="rIdSnd2" name="ding.wav"/>
+                                          <p:sndTgt r:embed="rIdSnd5" name="bell2.wav"/>
                                         </p:tgtEl>
                                       </p:cMediaNode>
                                     </p:audio>
@@ -11909,7 +11909,7 @@
                                           </p:endCondLst>
                                         </p:cTn>
                                         <p:tgtEl>
-                                          <p:sndTgt r:embed="rIdSnd3" name="tick.wav"/>
+                                          <p:sndTgt r:embed="rIdSnd3" name="bloop.wav"/>
                                         </p:tgtEl>
                                       </p:cMediaNode>
                                     </p:audio>
@@ -11981,7 +11981,7 @@
                                           </p:endCondLst>
                                         </p:cTn>
                                         <p:tgtEl>
-                                          <p:sndTgt r:embed="rIdSnd1" name="pop.wav"/>
+                                          <p:sndTgt r:embed="rIdSnd6" name="pluck3.wav"/>
                                         </p:tgtEl>
                                       </p:cMediaNode>
                                     </p:audio>
@@ -12053,7 +12053,7 @@
                                           </p:endCondLst>
                                         </p:cTn>
                                         <p:tgtEl>
-                                          <p:sndTgt r:embed="rIdSnd2" name="ding.wav"/>
+                                          <p:sndTgt r:embed="rIdSnd7" name="bell3.wav"/>
                                         </p:tgtEl>
                                       </p:cMediaNode>
                                     </p:audio>
@@ -12125,7 +12125,7 @@
                                           </p:endCondLst>
                                         </p:cTn>
                                         <p:tgtEl>
-                                          <p:sndTgt r:embed="rIdSnd3" name="tick.wav"/>
+                                          <p:sndTgt r:embed="rIdSnd8" name="whoosh.wav"/>
                                         </p:tgtEl>
                                       </p:cMediaNode>
                                     </p:audio>
@@ -12197,7 +12197,7 @@
                                           </p:endCondLst>
                                         </p:cTn>
                                         <p:tgtEl>
-                                          <p:sndTgt r:embed="rIdSnd4" name="win.wav"/>
+                                          <p:sndTgt r:embed="rIdSnd9" name="win.wav"/>
                                         </p:tgtEl>
                                       </p:cMediaNode>
                                     </p:audio>
@@ -12915,7 +12915,7 @@
                                           </p:endCondLst>
                                         </p:cTn>
                                         <p:tgtEl>
-                                          <p:sndTgt r:embed="rIdSnd1" name="pop.wav"/>
+                                          <p:sndTgt r:embed="rIdSnd1" name="pluck1.wav"/>
                                         </p:tgtEl>
                                       </p:cMediaNode>
                                     </p:audio>
@@ -12987,7 +12987,7 @@
                                           </p:endCondLst>
                                         </p:cTn>
                                         <p:tgtEl>
-                                          <p:sndTgt r:embed="rIdSnd2" name="ding.wav"/>
+                                          <p:sndTgt r:embed="rIdSnd2" name="bell1.wav"/>
                                         </p:tgtEl>
                                       </p:cMediaNode>
                                     </p:audio>
@@ -13059,7 +13059,7 @@
                                           </p:endCondLst>
                                         </p:cTn>
                                         <p:tgtEl>
-                                          <p:sndTgt r:embed="rIdSnd3" name="tick.wav"/>
+                                          <p:sndTgt r:embed="rIdSnd3" name="bloop.wav"/>
                                         </p:tgtEl>
                                       </p:cMediaNode>
                                     </p:audio>
@@ -13131,7 +13131,7 @@
                                           </p:endCondLst>
                                         </p:cTn>
                                         <p:tgtEl>
-                                          <p:sndTgt r:embed="rIdSnd1" name="pop.wav"/>
+                                          <p:sndTgt r:embed="rIdSnd4" name="pluck2.wav"/>
                                         </p:tgtEl>
                                       </p:cMediaNode>
                                     </p:audio>
@@ -13203,7 +13203,7 @@
                                           </p:endCondLst>
                                         </p:cTn>
                                         <p:tgtEl>
-                                          <p:sndTgt r:embed="rIdSnd2" name="ding.wav"/>
+                                          <p:sndTgt r:embed="rIdSnd5" name="bell2.wav"/>
                                         </p:tgtEl>
                                       </p:cMediaNode>
                                     </p:audio>
@@ -13275,7 +13275,7 @@
                                           </p:endCondLst>
                                         </p:cTn>
                                         <p:tgtEl>
-                                          <p:sndTgt r:embed="rIdSnd3" name="tick.wav"/>
+                                          <p:sndTgt r:embed="rIdSnd6" name="whoosh.wav"/>
                                         </p:tgtEl>
                                       </p:cMediaNode>
                                     </p:audio>
@@ -13347,7 +13347,7 @@
                                           </p:endCondLst>
                                         </p:cTn>
                                         <p:tgtEl>
-                                          <p:sndTgt r:embed="rIdSnd4" name="win.wav"/>
+                                          <p:sndTgt r:embed="rIdSnd7" name="win.wav"/>
                                         </p:tgtEl>
                                       </p:cMediaNode>
                                     </p:audio>
@@ -14062,7 +14062,7 @@
                                           </p:endCondLst>
                                         </p:cTn>
                                         <p:tgtEl>
-                                          <p:sndTgt r:embed="rIdSnd1" name="pop.wav"/>
+                                          <p:sndTgt r:embed="rIdSnd1" name="pluck1.wav"/>
                                         </p:tgtEl>
                                       </p:cMediaNode>
                                     </p:audio>
@@ -14134,7 +14134,7 @@
                                           </p:endCondLst>
                                         </p:cTn>
                                         <p:tgtEl>
-                                          <p:sndTgt r:embed="rIdSnd2" name="ding.wav"/>
+                                          <p:sndTgt r:embed="rIdSnd2" name="bell1.wav"/>
                                         </p:tgtEl>
                                       </p:cMediaNode>
                                     </p:audio>
@@ -14206,7 +14206,7 @@
                                           </p:endCondLst>
                                         </p:cTn>
                                         <p:tgtEl>
-                                          <p:sndTgt r:embed="rIdSnd3" name="tick.wav"/>
+                                          <p:sndTgt r:embed="rIdSnd3" name="bloop.wav"/>
                                         </p:tgtEl>
                                       </p:cMediaNode>
                                     </p:audio>
@@ -14278,7 +14278,7 @@
                                           </p:endCondLst>
                                         </p:cTn>
                                         <p:tgtEl>
-                                          <p:sndTgt r:embed="rIdSnd1" name="pop.wav"/>
+                                          <p:sndTgt r:embed="rIdSnd4" name="pluck2.wav"/>
                                         </p:tgtEl>
                                       </p:cMediaNode>
                                     </p:audio>
@@ -14350,7 +14350,7 @@
                                           </p:endCondLst>
                                         </p:cTn>
                                         <p:tgtEl>
-                                          <p:sndTgt r:embed="rIdSnd2" name="ding.wav"/>
+                                          <p:sndTgt r:embed="rIdSnd5" name="bell2.wav"/>
                                         </p:tgtEl>
                                       </p:cMediaNode>
                                     </p:audio>
@@ -14422,7 +14422,7 @@
                                           </p:endCondLst>
                                         </p:cTn>
                                         <p:tgtEl>
-                                          <p:sndTgt r:embed="rIdSnd3" name="tick.wav"/>
+                                          <p:sndTgt r:embed="rIdSnd6" name="whoosh.wav"/>
                                         </p:tgtEl>
                                       </p:cMediaNode>
                                     </p:audio>
@@ -14494,7 +14494,7 @@
                                           </p:endCondLst>
                                         </p:cTn>
                                         <p:tgtEl>
-                                          <p:sndTgt r:embed="rIdSnd4" name="win.wav"/>
+                                          <p:sndTgt r:embed="rIdSnd7" name="win.wav"/>
                                         </p:tgtEl>
                                       </p:cMediaNode>
                                     </p:audio>
@@ -15209,7 +15209,7 @@
                                           </p:endCondLst>
                                         </p:cTn>
                                         <p:tgtEl>
-                                          <p:sndTgt r:embed="rIdSnd1" name="pop.wav"/>
+                                          <p:sndTgt r:embed="rIdSnd1" name="pluck1.wav"/>
                                         </p:tgtEl>
                                       </p:cMediaNode>
                                     </p:audio>
@@ -15281,7 +15281,7 @@
                                           </p:endCondLst>
                                         </p:cTn>
                                         <p:tgtEl>
-                                          <p:sndTgt r:embed="rIdSnd2" name="ding.wav"/>
+                                          <p:sndTgt r:embed="rIdSnd2" name="bell1.wav"/>
                                         </p:tgtEl>
                                       </p:cMediaNode>
                                     </p:audio>
@@ -15353,7 +15353,7 @@
                                           </p:endCondLst>
                                         </p:cTn>
                                         <p:tgtEl>
-                                          <p:sndTgt r:embed="rIdSnd3" name="tick.wav"/>
+                                          <p:sndTgt r:embed="rIdSnd3" name="bloop.wav"/>
                                         </p:tgtEl>
                                       </p:cMediaNode>
                                     </p:audio>
@@ -15425,7 +15425,7 @@
                                           </p:endCondLst>
                                         </p:cTn>
                                         <p:tgtEl>
-                                          <p:sndTgt r:embed="rIdSnd1" name="pop.wav"/>
+                                          <p:sndTgt r:embed="rIdSnd4" name="pluck2.wav"/>
                                         </p:tgtEl>
                                       </p:cMediaNode>
                                     </p:audio>
@@ -15497,7 +15497,7 @@
                                           </p:endCondLst>
                                         </p:cTn>
                                         <p:tgtEl>
-                                          <p:sndTgt r:embed="rIdSnd2" name="ding.wav"/>
+                                          <p:sndTgt r:embed="rIdSnd5" name="bell2.wav"/>
                                         </p:tgtEl>
                                       </p:cMediaNode>
                                     </p:audio>
@@ -15569,7 +15569,7 @@
                                           </p:endCondLst>
                                         </p:cTn>
                                         <p:tgtEl>
-                                          <p:sndTgt r:embed="rIdSnd3" name="tick.wav"/>
+                                          <p:sndTgt r:embed="rIdSnd6" name="whoosh.wav"/>
                                         </p:tgtEl>
                                       </p:cMediaNode>
                                     </p:audio>
@@ -15641,7 +15641,7 @@
                                           </p:endCondLst>
                                         </p:cTn>
                                         <p:tgtEl>
-                                          <p:sndTgt r:embed="rIdSnd4" name="win.wav"/>
+                                          <p:sndTgt r:embed="rIdSnd7" name="win.wav"/>
                                         </p:tgtEl>
                                       </p:cMediaNode>
                                     </p:audio>
@@ -16356,7 +16356,7 @@
                                           </p:endCondLst>
                                         </p:cTn>
                                         <p:tgtEl>
-                                          <p:sndTgt r:embed="rIdSnd1" name="pop.wav"/>
+                                          <p:sndTgt r:embed="rIdSnd1" name="pluck1.wav"/>
                                         </p:tgtEl>
                                       </p:cMediaNode>
                                     </p:audio>
@@ -16428,7 +16428,7 @@
                                           </p:endCondLst>
                                         </p:cTn>
                                         <p:tgtEl>
-                                          <p:sndTgt r:embed="rIdSnd2" name="ding.wav"/>
+                                          <p:sndTgt r:embed="rIdSnd2" name="bell1.wav"/>
                                         </p:tgtEl>
                                       </p:cMediaNode>
                                     </p:audio>
@@ -16500,7 +16500,7 @@
                                           </p:endCondLst>
                                         </p:cTn>
                                         <p:tgtEl>
-                                          <p:sndTgt r:embed="rIdSnd3" name="tick.wav"/>
+                                          <p:sndTgt r:embed="rIdSnd3" name="bloop.wav"/>
                                         </p:tgtEl>
                                       </p:cMediaNode>
                                     </p:audio>
@@ -16572,7 +16572,7 @@
                                           </p:endCondLst>
                                         </p:cTn>
                                         <p:tgtEl>
-                                          <p:sndTgt r:embed="rIdSnd1" name="pop.wav"/>
+                                          <p:sndTgt r:embed="rIdSnd4" name="pluck2.wav"/>
                                         </p:tgtEl>
                                       </p:cMediaNode>
                                     </p:audio>
@@ -16644,7 +16644,7 @@
                                           </p:endCondLst>
                                         </p:cTn>
                                         <p:tgtEl>
-                                          <p:sndTgt r:embed="rIdSnd2" name="ding.wav"/>
+                                          <p:sndTgt r:embed="rIdSnd5" name="bell2.wav"/>
                                         </p:tgtEl>
                                       </p:cMediaNode>
                                     </p:audio>
@@ -16716,7 +16716,7 @@
                                           </p:endCondLst>
                                         </p:cTn>
                                         <p:tgtEl>
-                                          <p:sndTgt r:embed="rIdSnd3" name="tick.wav"/>
+                                          <p:sndTgt r:embed="rIdSnd6" name="whoosh.wav"/>
                                         </p:tgtEl>
                                       </p:cMediaNode>
                                     </p:audio>
@@ -16788,7 +16788,7 @@
                                           </p:endCondLst>
                                         </p:cTn>
                                         <p:tgtEl>
-                                          <p:sndTgt r:embed="rIdSnd4" name="win.wav"/>
+                                          <p:sndTgt r:embed="rIdSnd7" name="win.wav"/>
                                         </p:tgtEl>
                                       </p:cMediaNode>
                                     </p:audio>
@@ -17503,7 +17503,7 @@
                                           </p:endCondLst>
                                         </p:cTn>
                                         <p:tgtEl>
-                                          <p:sndTgt r:embed="rIdSnd1" name="pop.wav"/>
+                                          <p:sndTgt r:embed="rIdSnd1" name="pluck1.wav"/>
                                         </p:tgtEl>
                                       </p:cMediaNode>
                                     </p:audio>
@@ -17575,7 +17575,7 @@
                                           </p:endCondLst>
                                         </p:cTn>
                                         <p:tgtEl>
-                                          <p:sndTgt r:embed="rIdSnd2" name="ding.wav"/>
+                                          <p:sndTgt r:embed="rIdSnd2" name="bell1.wav"/>
                                         </p:tgtEl>
                                       </p:cMediaNode>
                                     </p:audio>
@@ -17647,7 +17647,7 @@
                                           </p:endCondLst>
                                         </p:cTn>
                                         <p:tgtEl>
-                                          <p:sndTgt r:embed="rIdSnd3" name="tick.wav"/>
+                                          <p:sndTgt r:embed="rIdSnd3" name="bloop.wav"/>
                                         </p:tgtEl>
                                       </p:cMediaNode>
                                     </p:audio>
@@ -17719,7 +17719,7 @@
                                           </p:endCondLst>
                                         </p:cTn>
                                         <p:tgtEl>
-                                          <p:sndTgt r:embed="rIdSnd1" name="pop.wav"/>
+                                          <p:sndTgt r:embed="rIdSnd4" name="pluck2.wav"/>
                                         </p:tgtEl>
                                       </p:cMediaNode>
                                     </p:audio>
@@ -17791,7 +17791,7 @@
                                           </p:endCondLst>
                                         </p:cTn>
                                         <p:tgtEl>
-                                          <p:sndTgt r:embed="rIdSnd2" name="ding.wav"/>
+                                          <p:sndTgt r:embed="rIdSnd5" name="bell2.wav"/>
                                         </p:tgtEl>
                                       </p:cMediaNode>
                                     </p:audio>
@@ -17863,7 +17863,7 @@
                                           </p:endCondLst>
                                         </p:cTn>
                                         <p:tgtEl>
-                                          <p:sndTgt r:embed="rIdSnd3" name="tick.wav"/>
+                                          <p:sndTgt r:embed="rIdSnd6" name="whoosh.wav"/>
                                         </p:tgtEl>
                                       </p:cMediaNode>
                                     </p:audio>
@@ -17935,7 +17935,7 @@
                                           </p:endCondLst>
                                         </p:cTn>
                                         <p:tgtEl>
-                                          <p:sndTgt r:embed="rIdSnd4" name="win.wav"/>
+                                          <p:sndTgt r:embed="rIdSnd7" name="win.wav"/>
                                         </p:tgtEl>
                                       </p:cMediaNode>
                                     </p:audio>
@@ -18650,7 +18650,7 @@
                                           </p:endCondLst>
                                         </p:cTn>
                                         <p:tgtEl>
-                                          <p:sndTgt r:embed="rIdSnd1" name="pop.wav"/>
+                                          <p:sndTgt r:embed="rIdSnd1" name="pluck1.wav"/>
                                         </p:tgtEl>
                                       </p:cMediaNode>
                                     </p:audio>
@@ -18722,7 +18722,7 @@
                                           </p:endCondLst>
                                         </p:cTn>
                                         <p:tgtEl>
-                                          <p:sndTgt r:embed="rIdSnd2" name="ding.wav"/>
+                                          <p:sndTgt r:embed="rIdSnd2" name="bell1.wav"/>
                                         </p:tgtEl>
                                       </p:cMediaNode>
                                     </p:audio>
@@ -18794,7 +18794,7 @@
                                           </p:endCondLst>
                                         </p:cTn>
                                         <p:tgtEl>
-                                          <p:sndTgt r:embed="rIdSnd3" name="tick.wav"/>
+                                          <p:sndTgt r:embed="rIdSnd3" name="bloop.wav"/>
                                         </p:tgtEl>
                                       </p:cMediaNode>
                                     </p:audio>
@@ -18866,7 +18866,7 @@
                                           </p:endCondLst>
                                         </p:cTn>
                                         <p:tgtEl>
-                                          <p:sndTgt r:embed="rIdSnd1" name="pop.wav"/>
+                                          <p:sndTgt r:embed="rIdSnd4" name="pluck2.wav"/>
                                         </p:tgtEl>
                                       </p:cMediaNode>
                                     </p:audio>
@@ -18938,7 +18938,7 @@
                                           </p:endCondLst>
                                         </p:cTn>
                                         <p:tgtEl>
-                                          <p:sndTgt r:embed="rIdSnd2" name="ding.wav"/>
+                                          <p:sndTgt r:embed="rIdSnd5" name="bell2.wav"/>
                                         </p:tgtEl>
                                       </p:cMediaNode>
                                     </p:audio>
@@ -19010,7 +19010,7 @@
                                           </p:endCondLst>
                                         </p:cTn>
                                         <p:tgtEl>
-                                          <p:sndTgt r:embed="rIdSnd3" name="tick.wav"/>
+                                          <p:sndTgt r:embed="rIdSnd6" name="whoosh.wav"/>
                                         </p:tgtEl>
                                       </p:cMediaNode>
                                     </p:audio>
@@ -19082,7 +19082,7 @@
                                           </p:endCondLst>
                                         </p:cTn>
                                         <p:tgtEl>
-                                          <p:sndTgt r:embed="rIdSnd4" name="win.wav"/>
+                                          <p:sndTgt r:embed="rIdSnd7" name="win.wav"/>
                                         </p:tgtEl>
                                       </p:cMediaNode>
                                     </p:audio>
@@ -19797,7 +19797,7 @@
                                           </p:endCondLst>
                                         </p:cTn>
                                         <p:tgtEl>
-                                          <p:sndTgt r:embed="rIdSnd1" name="pop.wav"/>
+                                          <p:sndTgt r:embed="rIdSnd1" name="pluck1.wav"/>
                                         </p:tgtEl>
                                       </p:cMediaNode>
                                     </p:audio>
@@ -19869,7 +19869,7 @@
                                           </p:endCondLst>
                                         </p:cTn>
                                         <p:tgtEl>
-                                          <p:sndTgt r:embed="rIdSnd2" name="ding.wav"/>
+                                          <p:sndTgt r:embed="rIdSnd2" name="bell1.wav"/>
                                         </p:tgtEl>
                                       </p:cMediaNode>
                                     </p:audio>
@@ -19941,7 +19941,7 @@
                                           </p:endCondLst>
                                         </p:cTn>
                                         <p:tgtEl>
-                                          <p:sndTgt r:embed="rIdSnd3" name="tick.wav"/>
+                                          <p:sndTgt r:embed="rIdSnd3" name="bloop.wav"/>
                                         </p:tgtEl>
                                       </p:cMediaNode>
                                     </p:audio>
@@ -20013,7 +20013,7 @@
                                           </p:endCondLst>
                                         </p:cTn>
                                         <p:tgtEl>
-                                          <p:sndTgt r:embed="rIdSnd1" name="pop.wav"/>
+                                          <p:sndTgt r:embed="rIdSnd4" name="pluck2.wav"/>
                                         </p:tgtEl>
                                       </p:cMediaNode>
                                     </p:audio>
@@ -20085,7 +20085,7 @@
                                           </p:endCondLst>
                                         </p:cTn>
                                         <p:tgtEl>
-                                          <p:sndTgt r:embed="rIdSnd2" name="ding.wav"/>
+                                          <p:sndTgt r:embed="rIdSnd5" name="bell2.wav"/>
                                         </p:tgtEl>
                                       </p:cMediaNode>
                                     </p:audio>
@@ -20157,7 +20157,7 @@
                                           </p:endCondLst>
                                         </p:cTn>
                                         <p:tgtEl>
-                                          <p:sndTgt r:embed="rIdSnd3" name="tick.wav"/>
+                                          <p:sndTgt r:embed="rIdSnd6" name="whoosh.wav"/>
                                         </p:tgtEl>
                                       </p:cMediaNode>
                                     </p:audio>
@@ -20229,7 +20229,7 @@
                                           </p:endCondLst>
                                         </p:cTn>
                                         <p:tgtEl>
-                                          <p:sndTgt r:embed="rIdSnd4" name="win.wav"/>
+                                          <p:sndTgt r:embed="rIdSnd7" name="win.wav"/>
                                         </p:tgtEl>
                                       </p:cMediaNode>
                                     </p:audio>
@@ -20944,7 +20944,7 @@
                                           </p:endCondLst>
                                         </p:cTn>
                                         <p:tgtEl>
-                                          <p:sndTgt r:embed="rIdSnd1" name="pop.wav"/>
+                                          <p:sndTgt r:embed="rIdSnd1" name="pluck1.wav"/>
                                         </p:tgtEl>
                                       </p:cMediaNode>
                                     </p:audio>
@@ -21016,7 +21016,7 @@
                                           </p:endCondLst>
                                         </p:cTn>
                                         <p:tgtEl>
-                                          <p:sndTgt r:embed="rIdSnd2" name="ding.wav"/>
+                                          <p:sndTgt r:embed="rIdSnd2" name="bell1.wav"/>
                                         </p:tgtEl>
                                       </p:cMediaNode>
                                     </p:audio>
@@ -21088,7 +21088,7 @@
                                           </p:endCondLst>
                                         </p:cTn>
                                         <p:tgtEl>
-                                          <p:sndTgt r:embed="rIdSnd3" name="tick.wav"/>
+                                          <p:sndTgt r:embed="rIdSnd3" name="bloop.wav"/>
                                         </p:tgtEl>
                                       </p:cMediaNode>
                                     </p:audio>
@@ -21160,7 +21160,7 @@
                                           </p:endCondLst>
                                         </p:cTn>
                                         <p:tgtEl>
-                                          <p:sndTgt r:embed="rIdSnd1" name="pop.wav"/>
+                                          <p:sndTgt r:embed="rIdSnd4" name="pluck2.wav"/>
                                         </p:tgtEl>
                                       </p:cMediaNode>
                                     </p:audio>
@@ -21232,7 +21232,7 @@
                                           </p:endCondLst>
                                         </p:cTn>
                                         <p:tgtEl>
-                                          <p:sndTgt r:embed="rIdSnd2" name="ding.wav"/>
+                                          <p:sndTgt r:embed="rIdSnd5" name="bell2.wav"/>
                                         </p:tgtEl>
                                       </p:cMediaNode>
                                     </p:audio>
@@ -21304,7 +21304,7 @@
                                           </p:endCondLst>
                                         </p:cTn>
                                         <p:tgtEl>
-                                          <p:sndTgt r:embed="rIdSnd3" name="tick.wav"/>
+                                          <p:sndTgt r:embed="rIdSnd6" name="whoosh.wav"/>
                                         </p:tgtEl>
                                       </p:cMediaNode>
                                     </p:audio>
@@ -21376,7 +21376,7 @@
                                           </p:endCondLst>
                                         </p:cTn>
                                         <p:tgtEl>
-                                          <p:sndTgt r:embed="rIdSnd4" name="win.wav"/>
+                                          <p:sndTgt r:embed="rIdSnd7" name="win.wav"/>
                                         </p:tgtEl>
                                       </p:cMediaNode>
                                     </p:audio>
@@ -22091,7 +22091,7 @@
                                           </p:endCondLst>
                                         </p:cTn>
                                         <p:tgtEl>
-                                          <p:sndTgt r:embed="rIdSnd1" name="pop.wav"/>
+                                          <p:sndTgt r:embed="rIdSnd1" name="pluck1.wav"/>
                                         </p:tgtEl>
                                       </p:cMediaNode>
                                     </p:audio>
@@ -22163,7 +22163,7 @@
                                           </p:endCondLst>
                                         </p:cTn>
                                         <p:tgtEl>
-                                          <p:sndTgt r:embed="rIdSnd2" name="ding.wav"/>
+                                          <p:sndTgt r:embed="rIdSnd2" name="bell1.wav"/>
                                         </p:tgtEl>
                                       </p:cMediaNode>
                                     </p:audio>
@@ -22235,7 +22235,7 @@
                                           </p:endCondLst>
                                         </p:cTn>
                                         <p:tgtEl>
-                                          <p:sndTgt r:embed="rIdSnd3" name="tick.wav"/>
+                                          <p:sndTgt r:embed="rIdSnd3" name="bloop.wav"/>
                                         </p:tgtEl>
                                       </p:cMediaNode>
                                     </p:audio>
@@ -22307,7 +22307,7 @@
                                           </p:endCondLst>
                                         </p:cTn>
                                         <p:tgtEl>
-                                          <p:sndTgt r:embed="rIdSnd1" name="pop.wav"/>
+                                          <p:sndTgt r:embed="rIdSnd4" name="pluck2.wav"/>
                                         </p:tgtEl>
                                       </p:cMediaNode>
                                     </p:audio>
@@ -22379,7 +22379,7 @@
                                           </p:endCondLst>
                                         </p:cTn>
                                         <p:tgtEl>
-                                          <p:sndTgt r:embed="rIdSnd2" name="ding.wav"/>
+                                          <p:sndTgt r:embed="rIdSnd5" name="bell2.wav"/>
                                         </p:tgtEl>
                                       </p:cMediaNode>
                                     </p:audio>
@@ -22451,7 +22451,7 @@
                                           </p:endCondLst>
                                         </p:cTn>
                                         <p:tgtEl>
-                                          <p:sndTgt r:embed="rIdSnd3" name="tick.wav"/>
+                                          <p:sndTgt r:embed="rIdSnd6" name="whoosh.wav"/>
                                         </p:tgtEl>
                                       </p:cMediaNode>
                                     </p:audio>
@@ -22523,7 +22523,7 @@
                                           </p:endCondLst>
                                         </p:cTn>
                                         <p:tgtEl>
-                                          <p:sndTgt r:embed="rIdSnd4" name="win.wav"/>
+                                          <p:sndTgt r:embed="rIdSnd7" name="win.wav"/>
                                         </p:tgtEl>
                                       </p:cMediaNode>
                                     </p:audio>
@@ -23238,7 +23238,7 @@
                                           </p:endCondLst>
                                         </p:cTn>
                                         <p:tgtEl>
-                                          <p:sndTgt r:embed="rIdSnd1" name="pop.wav"/>
+                                          <p:sndTgt r:embed="rIdSnd1" name="pluck1.wav"/>
                                         </p:tgtEl>
                                       </p:cMediaNode>
                                     </p:audio>
@@ -23310,7 +23310,7 @@
                                           </p:endCondLst>
                                         </p:cTn>
                                         <p:tgtEl>
-                                          <p:sndTgt r:embed="rIdSnd2" name="ding.wav"/>
+                                          <p:sndTgt r:embed="rIdSnd2" name="bell1.wav"/>
                                         </p:tgtEl>
                                       </p:cMediaNode>
                                     </p:audio>
@@ -23382,7 +23382,7 @@
                                           </p:endCondLst>
                                         </p:cTn>
                                         <p:tgtEl>
-                                          <p:sndTgt r:embed="rIdSnd3" name="tick.wav"/>
+                                          <p:sndTgt r:embed="rIdSnd3" name="bloop.wav"/>
                                         </p:tgtEl>
                                       </p:cMediaNode>
                                     </p:audio>
@@ -23454,7 +23454,7 @@
                                           </p:endCondLst>
                                         </p:cTn>
                                         <p:tgtEl>
-                                          <p:sndTgt r:embed="rIdSnd1" name="pop.wav"/>
+                                          <p:sndTgt r:embed="rIdSnd4" name="pluck2.wav"/>
                                         </p:tgtEl>
                                       </p:cMediaNode>
                                     </p:audio>
@@ -23526,7 +23526,7 @@
                                           </p:endCondLst>
                                         </p:cTn>
                                         <p:tgtEl>
-                                          <p:sndTgt r:embed="rIdSnd2" name="ding.wav"/>
+                                          <p:sndTgt r:embed="rIdSnd5" name="bell2.wav"/>
                                         </p:tgtEl>
                                       </p:cMediaNode>
                                     </p:audio>
@@ -23598,7 +23598,7 @@
                                           </p:endCondLst>
                                         </p:cTn>
                                         <p:tgtEl>
-                                          <p:sndTgt r:embed="rIdSnd3" name="tick.wav"/>
+                                          <p:sndTgt r:embed="rIdSnd6" name="whoosh.wav"/>
                                         </p:tgtEl>
                                       </p:cMediaNode>
                                     </p:audio>
@@ -23670,7 +23670,7 @@
                                           </p:endCondLst>
                                         </p:cTn>
                                         <p:tgtEl>
-                                          <p:sndTgt r:embed="rIdSnd4" name="win.wav"/>
+                                          <p:sndTgt r:embed="rIdSnd7" name="win.wav"/>
                                         </p:tgtEl>
                                       </p:cMediaNode>
                                     </p:audio>
@@ -24385,7 +24385,7 @@
                                           </p:endCondLst>
                                         </p:cTn>
                                         <p:tgtEl>
-                                          <p:sndTgt r:embed="rIdSnd1" name="pop.wav"/>
+                                          <p:sndTgt r:embed="rIdSnd1" name="pluck1.wav"/>
                                         </p:tgtEl>
                                       </p:cMediaNode>
                                     </p:audio>
@@ -24457,7 +24457,7 @@
                                           </p:endCondLst>
                                         </p:cTn>
                                         <p:tgtEl>
-                                          <p:sndTgt r:embed="rIdSnd2" name="ding.wav"/>
+                                          <p:sndTgt r:embed="rIdSnd2" name="bell1.wav"/>
                                         </p:tgtEl>
                                       </p:cMediaNode>
                                     </p:audio>
@@ -24529,7 +24529,7 @@
                                           </p:endCondLst>
                                         </p:cTn>
                                         <p:tgtEl>
-                                          <p:sndTgt r:embed="rIdSnd3" name="tick.wav"/>
+                                          <p:sndTgt r:embed="rIdSnd3" name="bloop.wav"/>
                                         </p:tgtEl>
                                       </p:cMediaNode>
                                     </p:audio>
@@ -24601,7 +24601,7 @@
                                           </p:endCondLst>
                                         </p:cTn>
                                         <p:tgtEl>
-                                          <p:sndTgt r:embed="rIdSnd1" name="pop.wav"/>
+                                          <p:sndTgt r:embed="rIdSnd4" name="pluck2.wav"/>
                                         </p:tgtEl>
                                       </p:cMediaNode>
                                     </p:audio>
@@ -24673,7 +24673,7 @@
                                           </p:endCondLst>
                                         </p:cTn>
                                         <p:tgtEl>
-                                          <p:sndTgt r:embed="rIdSnd2" name="ding.wav"/>
+                                          <p:sndTgt r:embed="rIdSnd5" name="bell2.wav"/>
                                         </p:tgtEl>
                                       </p:cMediaNode>
                                     </p:audio>
@@ -24745,7 +24745,7 @@
                                           </p:endCondLst>
                                         </p:cTn>
                                         <p:tgtEl>
-                                          <p:sndTgt r:embed="rIdSnd3" name="tick.wav"/>
+                                          <p:sndTgt r:embed="rIdSnd6" name="whoosh.wav"/>
                                         </p:tgtEl>
                                       </p:cMediaNode>
                                     </p:audio>
@@ -24817,7 +24817,7 @@
                                           </p:endCondLst>
                                         </p:cTn>
                                         <p:tgtEl>
-                                          <p:sndTgt r:embed="rIdSnd4" name="win.wav"/>
+                                          <p:sndTgt r:embed="rIdSnd7" name="win.wav"/>
                                         </p:tgtEl>
                                       </p:cMediaNode>
                                     </p:audio>
@@ -25532,7 +25532,7 @@
                                           </p:endCondLst>
                                         </p:cTn>
                                         <p:tgtEl>
-                                          <p:sndTgt r:embed="rIdSnd1" name="pop.wav"/>
+                                          <p:sndTgt r:embed="rIdSnd1" name="pluck1.wav"/>
                                         </p:tgtEl>
                                       </p:cMediaNode>
                                     </p:audio>
@@ -25604,7 +25604,7 @@
                                           </p:endCondLst>
                                         </p:cTn>
                                         <p:tgtEl>
-                                          <p:sndTgt r:embed="rIdSnd2" name="ding.wav"/>
+                                          <p:sndTgt r:embed="rIdSnd2" name="bell1.wav"/>
                                         </p:tgtEl>
                                       </p:cMediaNode>
                                     </p:audio>
@@ -25676,7 +25676,7 @@
                                           </p:endCondLst>
                                         </p:cTn>
                                         <p:tgtEl>
-                                          <p:sndTgt r:embed="rIdSnd3" name="tick.wav"/>
+                                          <p:sndTgt r:embed="rIdSnd3" name="bloop.wav"/>
                                         </p:tgtEl>
                                       </p:cMediaNode>
                                     </p:audio>
@@ -25748,7 +25748,7 @@
                                           </p:endCondLst>
                                         </p:cTn>
                                         <p:tgtEl>
-                                          <p:sndTgt r:embed="rIdSnd1" name="pop.wav"/>
+                                          <p:sndTgt r:embed="rIdSnd4" name="pluck2.wav"/>
                                         </p:tgtEl>
                                       </p:cMediaNode>
                                     </p:audio>
@@ -25820,7 +25820,7 @@
                                           </p:endCondLst>
                                         </p:cTn>
                                         <p:tgtEl>
-                                          <p:sndTgt r:embed="rIdSnd2" name="ding.wav"/>
+                                          <p:sndTgt r:embed="rIdSnd5" name="bell2.wav"/>
                                         </p:tgtEl>
                                       </p:cMediaNode>
                                     </p:audio>
@@ -25892,7 +25892,7 @@
                                           </p:endCondLst>
                                         </p:cTn>
                                         <p:tgtEl>
-                                          <p:sndTgt r:embed="rIdSnd3" name="tick.wav"/>
+                                          <p:sndTgt r:embed="rIdSnd6" name="whoosh.wav"/>
                                         </p:tgtEl>
                                       </p:cMediaNode>
                                     </p:audio>
@@ -25964,7 +25964,7 @@
                                           </p:endCondLst>
                                         </p:cTn>
                                         <p:tgtEl>
-                                          <p:sndTgt r:embed="rIdSnd4" name="win.wav"/>
+                                          <p:sndTgt r:embed="rIdSnd7" name="win.wav"/>
                                         </p:tgtEl>
                                       </p:cMediaNode>
                                     </p:audio>
@@ -26679,7 +26679,7 @@
                                           </p:endCondLst>
                                         </p:cTn>
                                         <p:tgtEl>
-                                          <p:sndTgt r:embed="rIdSnd1" name="pop.wav"/>
+                                          <p:sndTgt r:embed="rIdSnd1" name="pluck1.wav"/>
                                         </p:tgtEl>
                                       </p:cMediaNode>
                                     </p:audio>
@@ -26751,7 +26751,7 @@
                                           </p:endCondLst>
                                         </p:cTn>
                                         <p:tgtEl>
-                                          <p:sndTgt r:embed="rIdSnd2" name="ding.wav"/>
+                                          <p:sndTgt r:embed="rIdSnd2" name="bell1.wav"/>
                                         </p:tgtEl>
                                       </p:cMediaNode>
                                     </p:audio>
@@ -26823,7 +26823,7 @@
                                           </p:endCondLst>
                                         </p:cTn>
                                         <p:tgtEl>
-                                          <p:sndTgt r:embed="rIdSnd3" name="tick.wav"/>
+                                          <p:sndTgt r:embed="rIdSnd3" name="bloop.wav"/>
                                         </p:tgtEl>
                                       </p:cMediaNode>
                                     </p:audio>
@@ -26895,7 +26895,7 @@
                                           </p:endCondLst>
                                         </p:cTn>
                                         <p:tgtEl>
-                                          <p:sndTgt r:embed="rIdSnd1" name="pop.wav"/>
+                                          <p:sndTgt r:embed="rIdSnd4" name="pluck2.wav"/>
                                         </p:tgtEl>
                                       </p:cMediaNode>
                                     </p:audio>
@@ -26967,7 +26967,7 @@
                                           </p:endCondLst>
                                         </p:cTn>
                                         <p:tgtEl>
-                                          <p:sndTgt r:embed="rIdSnd2" name="ding.wav"/>
+                                          <p:sndTgt r:embed="rIdSnd5" name="bell2.wav"/>
                                         </p:tgtEl>
                                       </p:cMediaNode>
                                     </p:audio>
@@ -27039,7 +27039,7 @@
                                           </p:endCondLst>
                                         </p:cTn>
                                         <p:tgtEl>
-                                          <p:sndTgt r:embed="rIdSnd3" name="tick.wav"/>
+                                          <p:sndTgt r:embed="rIdSnd6" name="whoosh.wav"/>
                                         </p:tgtEl>
                                       </p:cMediaNode>
                                     </p:audio>
@@ -27111,7 +27111,7 @@
                                           </p:endCondLst>
                                         </p:cTn>
                                         <p:tgtEl>
-                                          <p:sndTgt r:embed="rIdSnd4" name="win.wav"/>
+                                          <p:sndTgt r:embed="rIdSnd7" name="win.wav"/>
                                         </p:tgtEl>
                                       </p:cMediaNode>
                                     </p:audio>
@@ -27826,7 +27826,7 @@
                                           </p:endCondLst>
                                         </p:cTn>
                                         <p:tgtEl>
-                                          <p:sndTgt r:embed="rIdSnd1" name="pop.wav"/>
+                                          <p:sndTgt r:embed="rIdSnd1" name="pluck1.wav"/>
                                         </p:tgtEl>
                                       </p:cMediaNode>
                                     </p:audio>
@@ -27898,7 +27898,7 @@
                                           </p:endCondLst>
                                         </p:cTn>
                                         <p:tgtEl>
-                                          <p:sndTgt r:embed="rIdSnd2" name="ding.wav"/>
+                                          <p:sndTgt r:embed="rIdSnd2" name="bell1.wav"/>
                                         </p:tgtEl>
                                       </p:cMediaNode>
                                     </p:audio>
@@ -27970,7 +27970,7 @@
                                           </p:endCondLst>
                                         </p:cTn>
                                         <p:tgtEl>
-                                          <p:sndTgt r:embed="rIdSnd3" name="tick.wav"/>
+                                          <p:sndTgt r:embed="rIdSnd3" name="bloop.wav"/>
                                         </p:tgtEl>
                                       </p:cMediaNode>
                                     </p:audio>
@@ -28042,7 +28042,7 @@
                                           </p:endCondLst>
                                         </p:cTn>
                                         <p:tgtEl>
-                                          <p:sndTgt r:embed="rIdSnd1" name="pop.wav"/>
+                                          <p:sndTgt r:embed="rIdSnd4" name="pluck2.wav"/>
                                         </p:tgtEl>
                                       </p:cMediaNode>
                                     </p:audio>
@@ -28114,7 +28114,7 @@
                                           </p:endCondLst>
                                         </p:cTn>
                                         <p:tgtEl>
-                                          <p:sndTgt r:embed="rIdSnd2" name="ding.wav"/>
+                                          <p:sndTgt r:embed="rIdSnd5" name="bell2.wav"/>
                                         </p:tgtEl>
                                       </p:cMediaNode>
                                     </p:audio>
@@ -28186,7 +28186,7 @@
                                           </p:endCondLst>
                                         </p:cTn>
                                         <p:tgtEl>
-                                          <p:sndTgt r:embed="rIdSnd3" name="tick.wav"/>
+                                          <p:sndTgt r:embed="rIdSnd6" name="whoosh.wav"/>
                                         </p:tgtEl>
                                       </p:cMediaNode>
                                     </p:audio>
@@ -28258,7 +28258,7 @@
                                           </p:endCondLst>
                                         </p:cTn>
                                         <p:tgtEl>
-                                          <p:sndTgt r:embed="rIdSnd4" name="win.wav"/>
+                                          <p:sndTgt r:embed="rIdSnd7" name="win.wav"/>
                                         </p:tgtEl>
                                       </p:cMediaNode>
                                     </p:audio>
@@ -29101,7 +29101,7 @@
                                           </p:endCondLst>
                                         </p:cTn>
                                         <p:tgtEl>
-                                          <p:sndTgt r:embed="rIdSnd1" name="pop.wav"/>
+                                          <p:sndTgt r:embed="rIdSnd1" name="pluck1.wav"/>
                                         </p:tgtEl>
                                       </p:cMediaNode>
                                     </p:audio>
@@ -29173,7 +29173,7 @@
                                           </p:endCondLst>
                                         </p:cTn>
                                         <p:tgtEl>
-                                          <p:sndTgt r:embed="rIdSnd2" name="ding.wav"/>
+                                          <p:sndTgt r:embed="rIdSnd2" name="bell1.wav"/>
                                         </p:tgtEl>
                                       </p:cMediaNode>
                                     </p:audio>
@@ -29245,7 +29245,7 @@
                                           </p:endCondLst>
                                         </p:cTn>
                                         <p:tgtEl>
-                                          <p:sndTgt r:embed="rIdSnd3" name="tick.wav"/>
+                                          <p:sndTgt r:embed="rIdSnd3" name="bloop.wav"/>
                                         </p:tgtEl>
                                       </p:cMediaNode>
                                     </p:audio>
@@ -29317,7 +29317,7 @@
                                           </p:endCondLst>
                                         </p:cTn>
                                         <p:tgtEl>
-                                          <p:sndTgt r:embed="rIdSnd1" name="pop.wav"/>
+                                          <p:sndTgt r:embed="rIdSnd4" name="pluck2.wav"/>
                                         </p:tgtEl>
                                       </p:cMediaNode>
                                     </p:audio>
@@ -29389,7 +29389,7 @@
                                           </p:endCondLst>
                                         </p:cTn>
                                         <p:tgtEl>
-                                          <p:sndTgt r:embed="rIdSnd2" name="ding.wav"/>
+                                          <p:sndTgt r:embed="rIdSnd5" name="bell2.wav"/>
                                         </p:tgtEl>
                                       </p:cMediaNode>
                                     </p:audio>
@@ -29461,7 +29461,7 @@
                                           </p:endCondLst>
                                         </p:cTn>
                                         <p:tgtEl>
-                                          <p:sndTgt r:embed="rIdSnd3" name="tick.wav"/>
+                                          <p:sndTgt r:embed="rIdSnd3" name="bloop.wav"/>
                                         </p:tgtEl>
                                       </p:cMediaNode>
                                     </p:audio>
@@ -29533,7 +29533,7 @@
                                           </p:endCondLst>
                                         </p:cTn>
                                         <p:tgtEl>
-                                          <p:sndTgt r:embed="rIdSnd1" name="pop.wav"/>
+                                          <p:sndTgt r:embed="rIdSnd6" name="pluck3.wav"/>
                                         </p:tgtEl>
                                       </p:cMediaNode>
                                     </p:audio>
@@ -29605,7 +29605,7 @@
                                           </p:endCondLst>
                                         </p:cTn>
                                         <p:tgtEl>
-                                          <p:sndTgt r:embed="rIdSnd2" name="ding.wav"/>
+                                          <p:sndTgt r:embed="rIdSnd7" name="bell3.wav"/>
                                         </p:tgtEl>
                                       </p:cMediaNode>
                                     </p:audio>
@@ -29677,7 +29677,7 @@
                                           </p:endCondLst>
                                         </p:cTn>
                                         <p:tgtEl>
-                                          <p:sndTgt r:embed="rIdSnd3" name="tick.wav"/>
+                                          <p:sndTgt r:embed="rIdSnd8" name="whoosh.wav"/>
                                         </p:tgtEl>
                                       </p:cMediaNode>
                                     </p:audio>
@@ -29749,7 +29749,7 @@
                                           </p:endCondLst>
                                         </p:cTn>
                                         <p:tgtEl>
-                                          <p:sndTgt r:embed="rIdSnd4" name="win.wav"/>
+                                          <p:sndTgt r:embed="rIdSnd9" name="win.wav"/>
                                         </p:tgtEl>
                                       </p:cMediaNode>
                                     </p:audio>
